--- a/attached_assets/decks/Waco-Austin-Fatherhood-Gap-v1.pptx
+++ b/attached_assets/decks/Waco-Austin-Fatherhood-Gap-v1.pptx
@@ -29,9 +29,10 @@
     <p:sldId id="277" r:id="rId23"/>
     <p:sldId id="278" r:id="rId24"/>
     <p:sldId id="279" r:id="rId25"/>
+    <p:sldId id="280" r:id="rId26"/>
   </p:sldIdLst>
   <p:notesMasterIdLst>
-    <p:notesMasterId r:id="rId26"/>
+    <p:notesMasterId r:id="rId27"/>
   </p:notesMasterIdLst>
   <p:sldSz cx="12192000" cy="6858000"/>
   <p:notesSz cx="6858000" cy="12192000"/>
@@ -1957,6 +1958,94 @@
             <a:fld id="{F7021451-1387-4CA6-816F-3879F97B5CBC}" type="slidenum">
               <a:rPr lang="en-US"/>
               <a:t>24</a:t>
+            </a:fld>
+            <a:endParaRPr lang="en-US"/>
+          </a:p>
+        </p:txBody>
+      </p:sp>
+    </p:spTree>
+    <p:extLst>
+      <p:ext uri="{BB962C8B-B14F-4D97-AF65-F5344CB8AC3E}">
+        <p14:creationId xmlns:p14="http://schemas.microsoft.com/office/powerpoint/2010/main" val="1024086991"/>
+      </p:ext>
+    </p:extLst>
+  </p:cSld>
+  <p:clrMapOvr>
+    <a:masterClrMapping/>
+  </p:clrMapOvr>
+</p:notes>
+</file>
+
+<file path=ppt/notesSlides/notesSlide25.xml><?xml version="1.0" encoding="utf-8"?>
+<p:notes xmlns:a="http://schemas.openxmlformats.org/drawingml/2006/main" xmlns:r="http://schemas.openxmlformats.org/officeDocument/2006/relationships" xmlns:p="http://schemas.openxmlformats.org/presentationml/2006/main">
+  <p:cSld>
+    <p:spTree>
+      <p:nvGrpSpPr>
+        <p:cNvPr id="1" name=""/>
+        <p:cNvGrpSpPr/>
+        <p:nvPr/>
+      </p:nvGrpSpPr>
+      <p:grpSpPr>
+        <a:xfrm>
+          <a:off x="0" y="0"/>
+          <a:ext cx="0" cy="0"/>
+          <a:chOff x="0" y="0"/>
+          <a:chExt cx="0" cy="0"/>
+        </a:xfrm>
+      </p:grpSpPr>
+      <p:sp>
+        <p:nvSpPr>
+          <p:cNvPr id="2" name="Slide Image Placeholder 1"/>
+          <p:cNvSpPr>
+            <a:spLocks noGrp="1" noRot="1" noChangeAspect="1"/>
+          </p:cNvSpPr>
+          <p:nvPr>
+            <p:ph type="sldImg"/>
+          </p:nvPr>
+        </p:nvSpPr>
+        <p:spPr/>
+      </p:sp>
+      <p:sp>
+        <p:nvSpPr>
+          <p:cNvPr id="3" name="Notes Placeholder 2"/>
+          <p:cNvSpPr>
+            <a:spLocks noGrp="1"/>
+          </p:cNvSpPr>
+          <p:nvPr>
+            <p:ph type="body" idx="1"/>
+          </p:nvPr>
+        </p:nvSpPr>
+        <p:spPr/>
+        <p:txBody>
+          <a:bodyPr/>
+          <a:lstStyle/>
+          <a:p>
+            <a:r>
+              <a:rPr lang="en-US" dirty="0"/>
+              <a:t/>
+            </a:r>
+            <a:endParaRPr lang="en-US" dirty="0"/>
+          </a:p>
+        </p:txBody>
+      </p:sp>
+      <p:sp>
+        <p:nvSpPr>
+          <p:cNvPr id="4" name="Slide Number Placeholder 3"/>
+          <p:cNvSpPr>
+            <a:spLocks noGrp="1"/>
+          </p:cNvSpPr>
+          <p:nvPr>
+            <p:ph type="sldNum" sz="quarter" idx="10"/>
+          </p:nvPr>
+        </p:nvSpPr>
+        <p:spPr/>
+        <p:txBody>
+          <a:bodyPr/>
+          <a:lstStyle/>
+          <a:p>
+            <a:fld id="{F7021451-1387-4CA6-816F-3879F97B5CBC}" type="slidenum">
+              <a:rPr lang="en-US"/>
+              <a:t>25</a:t>
             </a:fld>
             <a:endParaRPr lang="en-US"/>
           </a:p>
@@ -3151,6 +3240,141 @@
     <p:bg>
       <p:bgPr>
         <a:solidFill>
+          <a:srgbClr val="0B2545"/>
+        </a:solidFill>
+      </p:bgPr>
+    </p:bg>
+    <p:spTree>
+      <p:nvGrpSpPr>
+        <p:cNvPr id="1" name=""/>
+        <p:cNvGrpSpPr/>
+        <p:nvPr/>
+      </p:nvGrpSpPr>
+      <p:grpSpPr>
+        <a:xfrm>
+          <a:off x="0" y="0"/>
+          <a:ext cx="0" cy="0"/>
+          <a:chOff x="0" y="0"/>
+          <a:chExt cx="0" cy="0"/>
+        </a:xfrm>
+      </p:grpSpPr>
+      <p:sp>
+        <p:nvSpPr>
+          <p:cNvPr id="2" name="Shape 0"/>
+          <p:cNvSpPr/>
+          <p:nvPr/>
+        </p:nvSpPr>
+        <p:spPr>
+          <a:xfrm>
+            <a:off x="0" y="3383280"/>
+            <a:ext cx="12188952" cy="45720"/>
+          </a:xfrm>
+          <a:prstGeom prst="rect">
+            <a:avLst/>
+          </a:prstGeom>
+          <a:solidFill>
+            <a:srgbClr val="D4A24C"/>
+          </a:solidFill>
+          <a:ln w="12700">
+            <a:solidFill>
+              <a:srgbClr val="D4A24C"/>
+            </a:solidFill>
+            <a:prstDash val="solid"/>
+          </a:ln>
+        </p:spPr>
+      </p:sp>
+      <p:sp>
+        <p:nvSpPr>
+          <p:cNvPr id="3" name="Text 1"/>
+          <p:cNvSpPr/>
+          <p:nvPr/>
+        </p:nvSpPr>
+        <p:spPr>
+          <a:xfrm>
+            <a:off x="457200" y="2057400"/>
+            <a:ext cx="11274552" cy="914400"/>
+          </a:xfrm>
+          <a:prstGeom prst="rect">
+            <a:avLst/>
+          </a:prstGeom>
+          <a:noFill/>
+          <a:ln/>
+        </p:spPr>
+        <p:txBody>
+          <a:bodyPr wrap="square" rtlCol="0" anchor="ctr"/>
+          <a:lstStyle/>
+          <a:p>
+            <a:pPr algn="ctr" indent="0" marL="0">
+              <a:buNone/>
+            </a:pPr>
+            <a:r>
+              <a:rPr lang="en-US" sz="4400" b="1" dirty="0">
+                <a:solidFill>
+                  <a:srgbClr val="FFFFFF"/>
+                </a:solidFill>
+                <a:latin typeface="Calibri" pitchFamily="34" charset="0"/>
+                <a:ea typeface="Calibri" pitchFamily="34" charset="-122"/>
+                <a:cs typeface="Calibri" pitchFamily="34" charset="-120"/>
+              </a:rPr>
+              <a:t>PART B · AUSTIN / TRAVIS COUNTY</a:t>
+            </a:r>
+            <a:endParaRPr lang="en-US" sz="4400" dirty="0"/>
+          </a:p>
+        </p:txBody>
+      </p:sp>
+      <p:sp>
+        <p:nvSpPr>
+          <p:cNvPr id="4" name="Text 2"/>
+          <p:cNvSpPr/>
+          <p:nvPr/>
+        </p:nvSpPr>
+        <p:spPr>
+          <a:xfrm>
+            <a:off x="457200" y="3611880"/>
+            <a:ext cx="11274552" cy="548640"/>
+          </a:xfrm>
+          <a:prstGeom prst="rect">
+            <a:avLst/>
+          </a:prstGeom>
+          <a:noFill/>
+          <a:ln/>
+        </p:spPr>
+        <p:txBody>
+          <a:bodyPr wrap="square" rtlCol="0" anchor="ctr"/>
+          <a:lstStyle/>
+          <a:p>
+            <a:pPr algn="ctr" indent="0" marL="0">
+              <a:buNone/>
+            </a:pPr>
+            <a:r>
+              <a:rPr lang="en-US" sz="1800" i="1" dirty="0">
+                <a:solidFill>
+                  <a:srgbClr val="D4A24C"/>
+                </a:solidFill>
+                <a:latin typeface="Calibri" pitchFamily="34" charset="0"/>
+                <a:ea typeface="Calibri" pitchFamily="34" charset="-122"/>
+                <a:cs typeface="Calibri" pitchFamily="34" charset="-120"/>
+              </a:rPr>
+              <a:t>The dispersed picture: gentrification scattered the same problem.</a:t>
+            </a:r>
+            <a:endParaRPr lang="en-US" sz="1800" dirty="0"/>
+          </a:p>
+        </p:txBody>
+      </p:sp>
+    </p:spTree>
+  </p:cSld>
+  <p:clrMapOvr>
+    <a:masterClrMapping/>
+  </p:clrMapOvr>
+</p:sld>
+</file>
+
+<file path=ppt/slides/slide11.xml><?xml version="1.0" encoding="utf-8"?>
+<p:sld xmlns:a="http://schemas.openxmlformats.org/drawingml/2006/main" xmlns:r="http://schemas.openxmlformats.org/officeDocument/2006/relationships" xmlns:p="http://schemas.openxmlformats.org/presentationml/2006/main">
+  <p:cSld name="Slide 11">
+    <p:bg>
+      <p:bgPr>
+        <a:solidFill>
           <a:srgbClr val="F7F2E7"/>
         </a:solidFill>
       </p:bgPr>
@@ -3274,7 +3498,7 @@
       </p:sp>
       <p:graphicFrame>
         <p:nvGraphicFramePr>
-          <p:cNvPr id="11" name="Table 0"/>
+          <p:cNvPr id="12" name="Table 0"/>
           <p:cNvGraphicFramePr>
             <a:graphicFrameLocks noGrp="1"/>
           </p:cNvGraphicFramePr>
@@ -5443,1179 +5667,6 @@
 </p:sld>
 </file>
 
-<file path=ppt/slides/slide11.xml><?xml version="1.0" encoding="utf-8"?>
-<p:sld xmlns:a="http://schemas.openxmlformats.org/drawingml/2006/main" xmlns:r="http://schemas.openxmlformats.org/officeDocument/2006/relationships" xmlns:p="http://schemas.openxmlformats.org/presentationml/2006/main">
-  <p:cSld name="Slide 11">
-    <p:bg>
-      <p:bgPr>
-        <a:solidFill>
-          <a:srgbClr val="F7F2E7"/>
-        </a:solidFill>
-      </p:bgPr>
-    </p:bg>
-    <p:spTree>
-      <p:nvGrpSpPr>
-        <p:cNvPr id="1" name=""/>
-        <p:cNvGrpSpPr/>
-        <p:nvPr/>
-      </p:nvGrpSpPr>
-      <p:grpSpPr>
-        <a:xfrm>
-          <a:off x="0" y="0"/>
-          <a:ext cx="0" cy="0"/>
-          <a:chOff x="0" y="0"/>
-          <a:chExt cx="0" cy="0"/>
-        </a:xfrm>
-      </p:grpSpPr>
-      <p:sp>
-        <p:nvSpPr>
-          <p:cNvPr id="2" name="Shape 0"/>
-          <p:cNvSpPr/>
-          <p:nvPr/>
-        </p:nvSpPr>
-        <p:spPr>
-          <a:xfrm>
-            <a:off x="0" y="0"/>
-            <a:ext cx="12188952" cy="822960"/>
-          </a:xfrm>
-          <a:prstGeom prst="rect">
-            <a:avLst/>
-          </a:prstGeom>
-          <a:solidFill>
-            <a:srgbClr val="0B2545"/>
-          </a:solidFill>
-          <a:ln w="12700">
-            <a:solidFill>
-              <a:srgbClr val="0B2545"/>
-            </a:solidFill>
-            <a:prstDash val="solid"/>
-          </a:ln>
-        </p:spPr>
-      </p:sp>
-      <p:sp>
-        <p:nvSpPr>
-          <p:cNvPr id="3" name="Text 1"/>
-          <p:cNvSpPr/>
-          <p:nvPr/>
-        </p:nvSpPr>
-        <p:spPr>
-          <a:xfrm>
-            <a:off x="365760" y="109728"/>
-            <a:ext cx="11457432" cy="457200"/>
-          </a:xfrm>
-          <a:prstGeom prst="rect">
-            <a:avLst/>
-          </a:prstGeom>
-          <a:noFill/>
-          <a:ln/>
-        </p:spPr>
-        <p:txBody>
-          <a:bodyPr wrap="square" rtlCol="0" anchor="ctr"/>
-          <a:lstStyle/>
-          <a:p>
-            <a:pPr indent="0" marL="0">
-              <a:buNone/>
-            </a:pPr>
-            <a:r>
-              <a:rPr lang="en-US" sz="2400" b="1" dirty="0">
-                <a:solidFill>
-                  <a:srgbClr val="FFFFFF"/>
-                </a:solidFill>
-                <a:latin typeface="Calibri" pitchFamily="34" charset="0"/>
-                <a:ea typeface="Calibri" pitchFamily="34" charset="-122"/>
-                <a:cs typeface="Calibri" pitchFamily="34" charset="-120"/>
-              </a:rPr>
-              <a:t>Austin / Travis — by the numbers</a:t>
-            </a:r>
-            <a:endParaRPr lang="en-US" sz="2400" dirty="0"/>
-          </a:p>
-        </p:txBody>
-      </p:sp>
-      <p:sp>
-        <p:nvSpPr>
-          <p:cNvPr id="4" name="Text 2"/>
-          <p:cNvSpPr/>
-          <p:nvPr/>
-        </p:nvSpPr>
-        <p:spPr>
-          <a:xfrm>
-            <a:off x="365760" y="457200"/>
-            <a:ext cx="11457432" cy="320040"/>
-          </a:xfrm>
-          <a:prstGeom prst="rect">
-            <a:avLst/>
-          </a:prstGeom>
-          <a:noFill/>
-          <a:ln/>
-        </p:spPr>
-        <p:txBody>
-          <a:bodyPr wrap="square" rtlCol="0" anchor="ctr"/>
-          <a:lstStyle/>
-          <a:p>
-            <a:pPr indent="0" marL="0">
-              <a:buNone/>
-            </a:pPr>
-            <a:r>
-              <a:rPr lang="en-US" sz="1200" i="1" dirty="0">
-                <a:solidFill>
-                  <a:srgbClr val="D4A24C"/>
-                </a:solidFill>
-                <a:latin typeface="Calibri" pitchFamily="34" charset="0"/>
-                <a:ea typeface="Calibri" pitchFamily="34" charset="-122"/>
-                <a:cs typeface="Calibri" pitchFamily="34" charset="-120"/>
-              </a:rPr>
-              <a:t>Bigger metro, dispersed need, larger absolute gap.</a:t>
-            </a:r>
-            <a:endParaRPr lang="en-US" sz="1200" dirty="0"/>
-          </a:p>
-        </p:txBody>
-      </p:sp>
-      <p:sp>
-        <p:nvSpPr>
-          <p:cNvPr id="5" name="Shape 3"/>
-          <p:cNvSpPr/>
-          <p:nvPr/>
-        </p:nvSpPr>
-        <p:spPr>
-          <a:xfrm>
-            <a:off x="548640" y="1280160"/>
-            <a:ext cx="2651760" cy="1463040"/>
-          </a:xfrm>
-          <a:prstGeom prst="rect">
-            <a:avLst/>
-          </a:prstGeom>
-          <a:solidFill>
-            <a:srgbClr val="FFFFFF"/>
-          </a:solidFill>
-          <a:ln w="19050">
-            <a:solidFill>
-              <a:srgbClr val="2D3E50"/>
-            </a:solidFill>
-            <a:prstDash val="solid"/>
-          </a:ln>
-        </p:spPr>
-      </p:sp>
-      <p:sp>
-        <p:nvSpPr>
-          <p:cNvPr id="6" name="Text 4"/>
-          <p:cNvSpPr/>
-          <p:nvPr/>
-        </p:nvSpPr>
-        <p:spPr>
-          <a:xfrm>
-            <a:off x="548640" y="1417320"/>
-            <a:ext cx="2651760" cy="804672"/>
-          </a:xfrm>
-          <a:prstGeom prst="rect">
-            <a:avLst/>
-          </a:prstGeom>
-          <a:noFill/>
-          <a:ln/>
-        </p:spPr>
-        <p:txBody>
-          <a:bodyPr wrap="square" rtlCol="0" anchor="ctr"/>
-          <a:lstStyle/>
-          <a:p>
-            <a:pPr algn="ctr" indent="0" marL="0">
-              <a:buNone/>
-            </a:pPr>
-            <a:r>
-              <a:rPr lang="en-US" sz="3600" b="1" dirty="0">
-                <a:solidFill>
-                  <a:srgbClr val="2D3E50"/>
-                </a:solidFill>
-                <a:latin typeface="Calibri" pitchFamily="34" charset="0"/>
-                <a:ea typeface="Calibri" pitchFamily="34" charset="-122"/>
-                <a:cs typeface="Calibri" pitchFamily="34" charset="-120"/>
-              </a:rPr>
-              <a:t>1.3M</a:t>
-            </a:r>
-            <a:endParaRPr lang="en-US" sz="3600" dirty="0"/>
-          </a:p>
-        </p:txBody>
-      </p:sp>
-      <p:sp>
-        <p:nvSpPr>
-          <p:cNvPr id="7" name="Text 5"/>
-          <p:cNvSpPr/>
-          <p:nvPr/>
-        </p:nvSpPr>
-        <p:spPr>
-          <a:xfrm>
-            <a:off x="640080" y="2157984"/>
-            <a:ext cx="2468880" cy="512064"/>
-          </a:xfrm>
-          <a:prstGeom prst="rect">
-            <a:avLst/>
-          </a:prstGeom>
-          <a:noFill/>
-          <a:ln/>
-        </p:spPr>
-        <p:txBody>
-          <a:bodyPr wrap="square" rtlCol="0" anchor="ctr"/>
-          <a:lstStyle/>
-          <a:p>
-            <a:pPr algn="ctr" indent="0" marL="0">
-              <a:buNone/>
-            </a:pPr>
-            <a:r>
-              <a:rPr lang="en-US" sz="1100" dirty="0">
-                <a:solidFill>
-                  <a:srgbClr val="2D3E50"/>
-                </a:solidFill>
-                <a:latin typeface="Calibri" pitchFamily="34" charset="0"/>
-                <a:ea typeface="Calibri" pitchFamily="34" charset="-122"/>
-                <a:cs typeface="Calibri" pitchFamily="34" charset="-120"/>
-              </a:rPr>
-              <a:t>Travis County</a:t>
-            </a:r>
-            <a:endParaRPr lang="en-US" sz="1100" dirty="0"/>
-          </a:p>
-          <a:p>
-            <a:pPr algn="ctr" indent="0" marL="0">
-              <a:buNone/>
-            </a:pPr>
-            <a:r>
-              <a:rPr lang="en-US" sz="1100" dirty="0">
-                <a:solidFill>
-                  <a:srgbClr val="2D3E50"/>
-                </a:solidFill>
-                <a:latin typeface="Calibri" pitchFamily="34" charset="0"/>
-                <a:ea typeface="Calibri" pitchFamily="34" charset="-122"/>
-                <a:cs typeface="Calibri" pitchFamily="34" charset="-120"/>
-              </a:rPr>
-              <a:t>population</a:t>
-            </a:r>
-            <a:endParaRPr lang="en-US" sz="1100" dirty="0"/>
-          </a:p>
-        </p:txBody>
-      </p:sp>
-      <p:sp>
-        <p:nvSpPr>
-          <p:cNvPr id="8" name="Shape 6"/>
-          <p:cNvSpPr/>
-          <p:nvPr/>
-        </p:nvSpPr>
-        <p:spPr>
-          <a:xfrm>
-            <a:off x="3383280" y="1280160"/>
-            <a:ext cx="2651760" cy="1463040"/>
-          </a:xfrm>
-          <a:prstGeom prst="rect">
-            <a:avLst/>
-          </a:prstGeom>
-          <a:solidFill>
-            <a:srgbClr val="FFFFFF"/>
-          </a:solidFill>
-          <a:ln w="19050">
-            <a:solidFill>
-              <a:srgbClr val="2D3E50"/>
-            </a:solidFill>
-            <a:prstDash val="solid"/>
-          </a:ln>
-        </p:spPr>
-      </p:sp>
-      <p:sp>
-        <p:nvSpPr>
-          <p:cNvPr id="9" name="Text 7"/>
-          <p:cNvSpPr/>
-          <p:nvPr/>
-        </p:nvSpPr>
-        <p:spPr>
-          <a:xfrm>
-            <a:off x="3383280" y="1417320"/>
-            <a:ext cx="2651760" cy="804672"/>
-          </a:xfrm>
-          <a:prstGeom prst="rect">
-            <a:avLst/>
-          </a:prstGeom>
-          <a:noFill/>
-          <a:ln/>
-        </p:spPr>
-        <p:txBody>
-          <a:bodyPr wrap="square" rtlCol="0" anchor="ctr"/>
-          <a:lstStyle/>
-          <a:p>
-            <a:pPr algn="ctr" indent="0" marL="0">
-              <a:buNone/>
-            </a:pPr>
-            <a:r>
-              <a:rPr lang="en-US" sz="3600" b="1" dirty="0">
-                <a:solidFill>
-                  <a:srgbClr val="2D3E50"/>
-                </a:solidFill>
-                <a:latin typeface="Calibri" pitchFamily="34" charset="0"/>
-                <a:ea typeface="Calibri" pitchFamily="34" charset="-122"/>
-                <a:cs typeface="Calibri" pitchFamily="34" charset="-120"/>
-              </a:rPr>
-              <a:t>~9%</a:t>
-            </a:r>
-            <a:endParaRPr lang="en-US" sz="3600" dirty="0"/>
-          </a:p>
-        </p:txBody>
-      </p:sp>
-      <p:sp>
-        <p:nvSpPr>
-          <p:cNvPr id="10" name="Text 8"/>
-          <p:cNvSpPr/>
-          <p:nvPr/>
-        </p:nvSpPr>
-        <p:spPr>
-          <a:xfrm>
-            <a:off x="3474720" y="2157984"/>
-            <a:ext cx="2468880" cy="512064"/>
-          </a:xfrm>
-          <a:prstGeom prst="rect">
-            <a:avLst/>
-          </a:prstGeom>
-          <a:noFill/>
-          <a:ln/>
-        </p:spPr>
-        <p:txBody>
-          <a:bodyPr wrap="square" rtlCol="0" anchor="ctr"/>
-          <a:lstStyle/>
-          <a:p>
-            <a:pPr algn="ctr" indent="0" marL="0">
-              <a:buNone/>
-            </a:pPr>
-            <a:r>
-              <a:rPr lang="en-US" sz="1100" dirty="0">
-                <a:solidFill>
-                  <a:srgbClr val="2D3E50"/>
-                </a:solidFill>
-                <a:latin typeface="Calibri" pitchFamily="34" charset="0"/>
-                <a:ea typeface="Calibri" pitchFamily="34" charset="-122"/>
-                <a:cs typeface="Calibri" pitchFamily="34" charset="-120"/>
-              </a:rPr>
-              <a:t>Black share of</a:t>
-            </a:r>
-            <a:endParaRPr lang="en-US" sz="1100" dirty="0"/>
-          </a:p>
-          <a:p>
-            <a:pPr algn="ctr" indent="0" marL="0">
-              <a:buNone/>
-            </a:pPr>
-            <a:r>
-              <a:rPr lang="en-US" sz="1100" dirty="0">
-                <a:solidFill>
-                  <a:srgbClr val="2D3E50"/>
-                </a:solidFill>
-                <a:latin typeface="Calibri" pitchFamily="34" charset="0"/>
-                <a:ea typeface="Calibri" pitchFamily="34" charset="-122"/>
-                <a:cs typeface="Calibri" pitchFamily="34" charset="-120"/>
-              </a:rPr>
-              <a:t>Travis County</a:t>
-            </a:r>
-            <a:endParaRPr lang="en-US" sz="1100" dirty="0"/>
-          </a:p>
-        </p:txBody>
-      </p:sp>
-      <p:sp>
-        <p:nvSpPr>
-          <p:cNvPr id="11" name="Shape 9"/>
-          <p:cNvSpPr/>
-          <p:nvPr/>
-        </p:nvSpPr>
-        <p:spPr>
-          <a:xfrm>
-            <a:off x="6217920" y="1280160"/>
-            <a:ext cx="2651760" cy="1463040"/>
-          </a:xfrm>
-          <a:prstGeom prst="rect">
-            <a:avLst/>
-          </a:prstGeom>
-          <a:solidFill>
-            <a:srgbClr val="FFFFFF"/>
-          </a:solidFill>
-          <a:ln w="19050">
-            <a:solidFill>
-              <a:srgbClr val="2D3E50"/>
-            </a:solidFill>
-            <a:prstDash val="solid"/>
-          </a:ln>
-        </p:spPr>
-      </p:sp>
-      <p:sp>
-        <p:nvSpPr>
-          <p:cNvPr id="12" name="Text 10"/>
-          <p:cNvSpPr/>
-          <p:nvPr/>
-        </p:nvSpPr>
-        <p:spPr>
-          <a:xfrm>
-            <a:off x="6217920" y="1417320"/>
-            <a:ext cx="2651760" cy="804672"/>
-          </a:xfrm>
-          <a:prstGeom prst="rect">
-            <a:avLst/>
-          </a:prstGeom>
-          <a:noFill/>
-          <a:ln/>
-        </p:spPr>
-        <p:txBody>
-          <a:bodyPr wrap="square" rtlCol="0" anchor="ctr"/>
-          <a:lstStyle/>
-          <a:p>
-            <a:pPr algn="ctr" indent="0" marL="0">
-              <a:buNone/>
-            </a:pPr>
-            <a:r>
-              <a:rPr lang="en-US" sz="3600" b="1" dirty="0">
-                <a:solidFill>
-                  <a:srgbClr val="2D3E50"/>
-                </a:solidFill>
-                <a:latin typeface="Calibri" pitchFamily="34" charset="0"/>
-                <a:ea typeface="Calibri" pitchFamily="34" charset="-122"/>
-                <a:cs typeface="Calibri" pitchFamily="34" charset="-120"/>
-              </a:rPr>
-              <a:t>~7%</a:t>
-            </a:r>
-            <a:endParaRPr lang="en-US" sz="3600" dirty="0"/>
-          </a:p>
-        </p:txBody>
-      </p:sp>
-      <p:sp>
-        <p:nvSpPr>
-          <p:cNvPr id="13" name="Text 11"/>
-          <p:cNvSpPr/>
-          <p:nvPr/>
-        </p:nvSpPr>
-        <p:spPr>
-          <a:xfrm>
-            <a:off x="6309360" y="2157984"/>
-            <a:ext cx="2468880" cy="512064"/>
-          </a:xfrm>
-          <a:prstGeom prst="rect">
-            <a:avLst/>
-          </a:prstGeom>
-          <a:noFill/>
-          <a:ln/>
-        </p:spPr>
-        <p:txBody>
-          <a:bodyPr wrap="square" rtlCol="0" anchor="ctr"/>
-          <a:lstStyle/>
-          <a:p>
-            <a:pPr algn="ctr" indent="0" marL="0">
-              <a:buNone/>
-            </a:pPr>
-            <a:r>
-              <a:rPr lang="en-US" sz="1100" dirty="0">
-                <a:solidFill>
-                  <a:srgbClr val="2D3E50"/>
-                </a:solidFill>
-                <a:latin typeface="Calibri" pitchFamily="34" charset="0"/>
-                <a:ea typeface="Calibri" pitchFamily="34" charset="-122"/>
-                <a:cs typeface="Calibri" pitchFamily="34" charset="-120"/>
-              </a:rPr>
-              <a:t>Black share of</a:t>
-            </a:r>
-            <a:endParaRPr lang="en-US" sz="1100" dirty="0"/>
-          </a:p>
-          <a:p>
-            <a:pPr algn="ctr" indent="0" marL="0">
-              <a:buNone/>
-            </a:pPr>
-            <a:r>
-              <a:rPr lang="en-US" sz="1100" dirty="0">
-                <a:solidFill>
-                  <a:srgbClr val="2D3E50"/>
-                </a:solidFill>
-                <a:latin typeface="Calibri" pitchFamily="34" charset="0"/>
-                <a:ea typeface="Calibri" pitchFamily="34" charset="-122"/>
-                <a:cs typeface="Calibri" pitchFamily="34" charset="-120"/>
-              </a:rPr>
-              <a:t>Austin ISD</a:t>
-            </a:r>
-            <a:endParaRPr lang="en-US" sz="1100" dirty="0"/>
-          </a:p>
-        </p:txBody>
-      </p:sp>
-      <p:sp>
-        <p:nvSpPr>
-          <p:cNvPr id="14" name="Shape 12"/>
-          <p:cNvSpPr/>
-          <p:nvPr/>
-        </p:nvSpPr>
-        <p:spPr>
-          <a:xfrm>
-            <a:off x="9052560" y="1280160"/>
-            <a:ext cx="2651760" cy="1463040"/>
-          </a:xfrm>
-          <a:prstGeom prst="rect">
-            <a:avLst/>
-          </a:prstGeom>
-          <a:solidFill>
-            <a:srgbClr val="FFFFFF"/>
-          </a:solidFill>
-          <a:ln w="19050">
-            <a:solidFill>
-              <a:srgbClr val="9B1C2E"/>
-            </a:solidFill>
-            <a:prstDash val="solid"/>
-          </a:ln>
-        </p:spPr>
-      </p:sp>
-      <p:sp>
-        <p:nvSpPr>
-          <p:cNvPr id="15" name="Text 13"/>
-          <p:cNvSpPr/>
-          <p:nvPr/>
-        </p:nvSpPr>
-        <p:spPr>
-          <a:xfrm>
-            <a:off x="9052560" y="1417320"/>
-            <a:ext cx="2651760" cy="804672"/>
-          </a:xfrm>
-          <a:prstGeom prst="rect">
-            <a:avLst/>
-          </a:prstGeom>
-          <a:noFill/>
-          <a:ln/>
-        </p:spPr>
-        <p:txBody>
-          <a:bodyPr wrap="square" rtlCol="0" anchor="ctr"/>
-          <a:lstStyle/>
-          <a:p>
-            <a:pPr algn="ctr" indent="0" marL="0">
-              <a:buNone/>
-            </a:pPr>
-            <a:r>
-              <a:rPr lang="en-US" sz="3600" b="1" dirty="0">
-                <a:solidFill>
-                  <a:srgbClr val="9B1C2E"/>
-                </a:solidFill>
-                <a:latin typeface="Calibri" pitchFamily="34" charset="0"/>
-                <a:ea typeface="Calibri" pitchFamily="34" charset="-122"/>
-                <a:cs typeface="Calibri" pitchFamily="34" charset="-120"/>
-              </a:rPr>
-              <a:t>20%+</a:t>
-            </a:r>
-            <a:endParaRPr lang="en-US" sz="3600" dirty="0"/>
-          </a:p>
-        </p:txBody>
-      </p:sp>
-      <p:sp>
-        <p:nvSpPr>
-          <p:cNvPr id="16" name="Text 14"/>
-          <p:cNvSpPr/>
-          <p:nvPr/>
-        </p:nvSpPr>
-        <p:spPr>
-          <a:xfrm>
-            <a:off x="9144000" y="2157984"/>
-            <a:ext cx="2468880" cy="512064"/>
-          </a:xfrm>
-          <a:prstGeom prst="rect">
-            <a:avLst/>
-          </a:prstGeom>
-          <a:noFill/>
-          <a:ln/>
-        </p:spPr>
-        <p:txBody>
-          <a:bodyPr wrap="square" rtlCol="0" anchor="ctr"/>
-          <a:lstStyle/>
-          <a:p>
-            <a:pPr algn="ctr" indent="0" marL="0">
-              <a:buNone/>
-            </a:pPr>
-            <a:r>
-              <a:rPr lang="en-US" sz="1100" dirty="0">
-                <a:solidFill>
-                  <a:srgbClr val="2D3E50"/>
-                </a:solidFill>
-                <a:latin typeface="Calibri" pitchFamily="34" charset="0"/>
-                <a:ea typeface="Calibri" pitchFamily="34" charset="-122"/>
-                <a:cs typeface="Calibri" pitchFamily="34" charset="-120"/>
-              </a:rPr>
-              <a:t>Black share of AISD</a:t>
-            </a:r>
-            <a:endParaRPr lang="en-US" sz="1100" dirty="0"/>
-          </a:p>
-          <a:p>
-            <a:pPr algn="ctr" indent="0" marL="0">
-              <a:buNone/>
-            </a:pPr>
-            <a:r>
-              <a:rPr lang="en-US" sz="1100" dirty="0">
-                <a:solidFill>
-                  <a:srgbClr val="2D3E50"/>
-                </a:solidFill>
-                <a:latin typeface="Calibri" pitchFamily="34" charset="0"/>
-                <a:ea typeface="Calibri" pitchFamily="34" charset="-122"/>
-                <a:cs typeface="Calibri" pitchFamily="34" charset="-120"/>
-              </a:rPr>
-              <a:t>out-of-school suspensions</a:t>
-            </a:r>
-            <a:endParaRPr lang="en-US" sz="1100" dirty="0"/>
-          </a:p>
-        </p:txBody>
-      </p:sp>
-      <p:sp>
-        <p:nvSpPr>
-          <p:cNvPr id="17" name="Shape 15"/>
-          <p:cNvSpPr/>
-          <p:nvPr/>
-        </p:nvSpPr>
-        <p:spPr>
-          <a:xfrm>
-            <a:off x="548640" y="3017520"/>
-            <a:ext cx="2651760" cy="1463040"/>
-          </a:xfrm>
-          <a:prstGeom prst="rect">
-            <a:avLst/>
-          </a:prstGeom>
-          <a:solidFill>
-            <a:srgbClr val="FFFFFF"/>
-          </a:solidFill>
-          <a:ln w="19050">
-            <a:solidFill>
-              <a:srgbClr val="9B1C2E"/>
-            </a:solidFill>
-            <a:prstDash val="solid"/>
-          </a:ln>
-        </p:spPr>
-      </p:sp>
-      <p:sp>
-        <p:nvSpPr>
-          <p:cNvPr id="18" name="Text 16"/>
-          <p:cNvSpPr/>
-          <p:nvPr/>
-        </p:nvSpPr>
-        <p:spPr>
-          <a:xfrm>
-            <a:off x="548640" y="3154680"/>
-            <a:ext cx="2651760" cy="804672"/>
-          </a:xfrm>
-          <a:prstGeom prst="rect">
-            <a:avLst/>
-          </a:prstGeom>
-          <a:noFill/>
-          <a:ln/>
-        </p:spPr>
-        <p:txBody>
-          <a:bodyPr wrap="square" rtlCol="0" anchor="ctr"/>
-          <a:lstStyle/>
-          <a:p>
-            <a:pPr algn="ctr" indent="0" marL="0">
-              <a:buNone/>
-            </a:pPr>
-            <a:r>
-              <a:rPr lang="en-US" sz="3600" b="1" dirty="0">
-                <a:solidFill>
-                  <a:srgbClr val="9B1C2E"/>
-                </a:solidFill>
-                <a:latin typeface="Calibri" pitchFamily="34" charset="0"/>
-                <a:ea typeface="Calibri" pitchFamily="34" charset="-122"/>
-                <a:cs typeface="Calibri" pitchFamily="34" charset="-120"/>
-              </a:rPr>
-              <a:t>~3.5×</a:t>
-            </a:r>
-            <a:endParaRPr lang="en-US" sz="3600" dirty="0"/>
-          </a:p>
-        </p:txBody>
-      </p:sp>
-      <p:sp>
-        <p:nvSpPr>
-          <p:cNvPr id="19" name="Text 17"/>
-          <p:cNvSpPr/>
-          <p:nvPr/>
-        </p:nvSpPr>
-        <p:spPr>
-          <a:xfrm>
-            <a:off x="640080" y="3895344"/>
-            <a:ext cx="2468880" cy="512064"/>
-          </a:xfrm>
-          <a:prstGeom prst="rect">
-            <a:avLst/>
-          </a:prstGeom>
-          <a:noFill/>
-          <a:ln/>
-        </p:spPr>
-        <p:txBody>
-          <a:bodyPr wrap="square" rtlCol="0" anchor="ctr"/>
-          <a:lstStyle/>
-          <a:p>
-            <a:pPr algn="ctr" indent="0" marL="0">
-              <a:buNone/>
-            </a:pPr>
-            <a:r>
-              <a:rPr lang="en-US" sz="1100" dirty="0">
-                <a:solidFill>
-                  <a:srgbClr val="2D3E50"/>
-                </a:solidFill>
-                <a:latin typeface="Calibri" pitchFamily="34" charset="0"/>
-                <a:ea typeface="Calibri" pitchFamily="34" charset="-122"/>
-                <a:cs typeface="Calibri" pitchFamily="34" charset="-120"/>
-              </a:rPr>
-              <a:t>Black students suspended</a:t>
-            </a:r>
-            <a:endParaRPr lang="en-US" sz="1100" dirty="0"/>
-          </a:p>
-          <a:p>
-            <a:pPr algn="ctr" indent="0" marL="0">
-              <a:buNone/>
-            </a:pPr>
-            <a:r>
-              <a:rPr lang="en-US" sz="1100" dirty="0">
-                <a:solidFill>
-                  <a:srgbClr val="2D3E50"/>
-                </a:solidFill>
-                <a:latin typeface="Calibri" pitchFamily="34" charset="0"/>
-                <a:ea typeface="Calibri" pitchFamily="34" charset="-122"/>
-                <a:cs typeface="Calibri" pitchFamily="34" charset="-120"/>
-              </a:rPr>
-              <a:t>vs White peers (AISD)</a:t>
-            </a:r>
-            <a:endParaRPr lang="en-US" sz="1100" dirty="0"/>
-          </a:p>
-        </p:txBody>
-      </p:sp>
-      <p:sp>
-        <p:nvSpPr>
-          <p:cNvPr id="20" name="Shape 18"/>
-          <p:cNvSpPr/>
-          <p:nvPr/>
-        </p:nvSpPr>
-        <p:spPr>
-          <a:xfrm>
-            <a:off x="3383280" y="3017520"/>
-            <a:ext cx="2651760" cy="1463040"/>
-          </a:xfrm>
-          <a:prstGeom prst="rect">
-            <a:avLst/>
-          </a:prstGeom>
-          <a:solidFill>
-            <a:srgbClr val="FFFFFF"/>
-          </a:solidFill>
-          <a:ln w="19050">
-            <a:solidFill>
-              <a:srgbClr val="2D3E50"/>
-            </a:solidFill>
-            <a:prstDash val="solid"/>
-          </a:ln>
-        </p:spPr>
-      </p:sp>
-      <p:sp>
-        <p:nvSpPr>
-          <p:cNvPr id="21" name="Text 19"/>
-          <p:cNvSpPr/>
-          <p:nvPr/>
-        </p:nvSpPr>
-        <p:spPr>
-          <a:xfrm>
-            <a:off x="3383280" y="3154680"/>
-            <a:ext cx="2651760" cy="804672"/>
-          </a:xfrm>
-          <a:prstGeom prst="rect">
-            <a:avLst/>
-          </a:prstGeom>
-          <a:noFill/>
-          <a:ln/>
-        </p:spPr>
-        <p:txBody>
-          <a:bodyPr wrap="square" rtlCol="0" anchor="ctr"/>
-          <a:lstStyle/>
-          <a:p>
-            <a:pPr algn="ctr" indent="0" marL="0">
-              <a:buNone/>
-            </a:pPr>
-            <a:r>
-              <a:rPr lang="en-US" sz="3600" b="1" dirty="0">
-                <a:solidFill>
-                  <a:srgbClr val="2D3E50"/>
-                </a:solidFill>
-                <a:latin typeface="Calibri" pitchFamily="34" charset="0"/>
-                <a:ea typeface="Calibri" pitchFamily="34" charset="-122"/>
-                <a:cs typeface="Calibri" pitchFamily="34" charset="-120"/>
-              </a:rPr>
-              <a:t>~5,500</a:t>
-            </a:r>
-            <a:endParaRPr lang="en-US" sz="3600" dirty="0"/>
-          </a:p>
-        </p:txBody>
-      </p:sp>
-      <p:sp>
-        <p:nvSpPr>
-          <p:cNvPr id="22" name="Text 20"/>
-          <p:cNvSpPr/>
-          <p:nvPr/>
-        </p:nvSpPr>
-        <p:spPr>
-          <a:xfrm>
-            <a:off x="3474720" y="3895344"/>
-            <a:ext cx="2468880" cy="512064"/>
-          </a:xfrm>
-          <a:prstGeom prst="rect">
-            <a:avLst/>
-          </a:prstGeom>
-          <a:noFill/>
-          <a:ln/>
-        </p:spPr>
-        <p:txBody>
-          <a:bodyPr wrap="square" rtlCol="0" anchor="ctr"/>
-          <a:lstStyle/>
-          <a:p>
-            <a:pPr algn="ctr" indent="0" marL="0">
-              <a:buNone/>
-            </a:pPr>
-            <a:r>
-              <a:rPr lang="en-US" sz="1100" dirty="0">
-                <a:solidFill>
-                  <a:srgbClr val="2D3E50"/>
-                </a:solidFill>
-                <a:latin typeface="Calibri" pitchFamily="34" charset="0"/>
-                <a:ea typeface="Calibri" pitchFamily="34" charset="-122"/>
-                <a:cs typeface="Calibri" pitchFamily="34" charset="-120"/>
-              </a:rPr>
-              <a:t>Est. disconnected Black</a:t>
-            </a:r>
-            <a:endParaRPr lang="en-US" sz="1100" dirty="0"/>
-          </a:p>
-          <a:p>
-            <a:pPr algn="ctr" indent="0" marL="0">
-              <a:buNone/>
-            </a:pPr>
-            <a:r>
-              <a:rPr lang="en-US" sz="1100" dirty="0">
-                <a:solidFill>
-                  <a:srgbClr val="2D3E50"/>
-                </a:solidFill>
-                <a:latin typeface="Calibri" pitchFamily="34" charset="0"/>
-                <a:ea typeface="Calibri" pitchFamily="34" charset="-122"/>
-                <a:cs typeface="Calibri" pitchFamily="34" charset="-120"/>
-              </a:rPr>
-              <a:t>youth 16–24 metro-wide</a:t>
-            </a:r>
-            <a:endParaRPr lang="en-US" sz="1100" dirty="0"/>
-          </a:p>
-        </p:txBody>
-      </p:sp>
-      <p:sp>
-        <p:nvSpPr>
-          <p:cNvPr id="23" name="Shape 21"/>
-          <p:cNvSpPr/>
-          <p:nvPr/>
-        </p:nvSpPr>
-        <p:spPr>
-          <a:xfrm>
-            <a:off x="6217920" y="3017520"/>
-            <a:ext cx="2651760" cy="1463040"/>
-          </a:xfrm>
-          <a:prstGeom prst="rect">
-            <a:avLst/>
-          </a:prstGeom>
-          <a:solidFill>
-            <a:srgbClr val="FFFFFF"/>
-          </a:solidFill>
-          <a:ln w="19050">
-            <a:solidFill>
-              <a:srgbClr val="2D3E50"/>
-            </a:solidFill>
-            <a:prstDash val="solid"/>
-          </a:ln>
-        </p:spPr>
-      </p:sp>
-      <p:sp>
-        <p:nvSpPr>
-          <p:cNvPr id="24" name="Text 22"/>
-          <p:cNvSpPr/>
-          <p:nvPr/>
-        </p:nvSpPr>
-        <p:spPr>
-          <a:xfrm>
-            <a:off x="6217920" y="3154680"/>
-            <a:ext cx="2651760" cy="804672"/>
-          </a:xfrm>
-          <a:prstGeom prst="rect">
-            <a:avLst/>
-          </a:prstGeom>
-          <a:noFill/>
-          <a:ln/>
-        </p:spPr>
-        <p:txBody>
-          <a:bodyPr wrap="square" rtlCol="0" anchor="ctr"/>
-          <a:lstStyle/>
-          <a:p>
-            <a:pPr algn="ctr" indent="0" marL="0">
-              <a:buNone/>
-            </a:pPr>
-            <a:r>
-              <a:rPr lang="en-US" sz="3600" b="1" dirty="0">
-                <a:solidFill>
-                  <a:srgbClr val="2D3E50"/>
-                </a:solidFill>
-                <a:latin typeface="Calibri" pitchFamily="34" charset="0"/>
-                <a:ea typeface="Calibri" pitchFamily="34" charset="-122"/>
-                <a:cs typeface="Calibri" pitchFamily="34" charset="-120"/>
-              </a:rPr>
-              <a:t>~12,000</a:t>
-            </a:r>
-            <a:endParaRPr lang="en-US" sz="3600" dirty="0"/>
-          </a:p>
-        </p:txBody>
-      </p:sp>
-      <p:sp>
-        <p:nvSpPr>
-          <p:cNvPr id="25" name="Text 23"/>
-          <p:cNvSpPr/>
-          <p:nvPr/>
-        </p:nvSpPr>
-        <p:spPr>
-          <a:xfrm>
-            <a:off x="6309360" y="3895344"/>
-            <a:ext cx="2468880" cy="512064"/>
-          </a:xfrm>
-          <a:prstGeom prst="rect">
-            <a:avLst/>
-          </a:prstGeom>
-          <a:noFill/>
-          <a:ln/>
-        </p:spPr>
-        <p:txBody>
-          <a:bodyPr wrap="square" rtlCol="0" anchor="ctr"/>
-          <a:lstStyle/>
-          <a:p>
-            <a:pPr algn="ctr" indent="0" marL="0">
-              <a:buNone/>
-            </a:pPr>
-            <a:r>
-              <a:rPr lang="en-US" sz="1100" dirty="0">
-                <a:solidFill>
-                  <a:srgbClr val="2D3E50"/>
-                </a:solidFill>
-                <a:latin typeface="Calibri" pitchFamily="34" charset="0"/>
-                <a:ea typeface="Calibri" pitchFamily="34" charset="-122"/>
-                <a:cs typeface="Calibri" pitchFamily="34" charset="-120"/>
-              </a:rPr>
-              <a:t>Black children in single-</a:t>
-            </a:r>
-            <a:endParaRPr lang="en-US" sz="1100" dirty="0"/>
-          </a:p>
-          <a:p>
-            <a:pPr algn="ctr" indent="0" marL="0">
-              <a:buNone/>
-            </a:pPr>
-            <a:r>
-              <a:rPr lang="en-US" sz="1100" dirty="0">
-                <a:solidFill>
-                  <a:srgbClr val="2D3E50"/>
-                </a:solidFill>
-                <a:latin typeface="Calibri" pitchFamily="34" charset="0"/>
-                <a:ea typeface="Calibri" pitchFamily="34" charset="-122"/>
-                <a:cs typeface="Calibri" pitchFamily="34" charset="-120"/>
-              </a:rPr>
-              <a:t>parent households</a:t>
-            </a:r>
-            <a:endParaRPr lang="en-US" sz="1100" dirty="0"/>
-          </a:p>
-        </p:txBody>
-      </p:sp>
-      <p:sp>
-        <p:nvSpPr>
-          <p:cNvPr id="26" name="Shape 24"/>
-          <p:cNvSpPr/>
-          <p:nvPr/>
-        </p:nvSpPr>
-        <p:spPr>
-          <a:xfrm>
-            <a:off x="9052560" y="3017520"/>
-            <a:ext cx="2651760" cy="1463040"/>
-          </a:xfrm>
-          <a:prstGeom prst="rect">
-            <a:avLst/>
-          </a:prstGeom>
-          <a:solidFill>
-            <a:srgbClr val="FFFFFF"/>
-          </a:solidFill>
-          <a:ln w="19050">
-            <a:solidFill>
-              <a:srgbClr val="D4A24C"/>
-            </a:solidFill>
-            <a:prstDash val="solid"/>
-          </a:ln>
-        </p:spPr>
-      </p:sp>
-      <p:sp>
-        <p:nvSpPr>
-          <p:cNvPr id="27" name="Text 25"/>
-          <p:cNvSpPr/>
-          <p:nvPr/>
-        </p:nvSpPr>
-        <p:spPr>
-          <a:xfrm>
-            <a:off x="9052560" y="3154680"/>
-            <a:ext cx="2651760" cy="804672"/>
-          </a:xfrm>
-          <a:prstGeom prst="rect">
-            <a:avLst/>
-          </a:prstGeom>
-          <a:noFill/>
-          <a:ln/>
-        </p:spPr>
-        <p:txBody>
-          <a:bodyPr wrap="square" rtlCol="0" anchor="ctr"/>
-          <a:lstStyle/>
-          <a:p>
-            <a:pPr algn="ctr" indent="0" marL="0">
-              <a:buNone/>
-            </a:pPr>
-            <a:r>
-              <a:rPr lang="en-US" sz="3600" b="1" dirty="0">
-                <a:solidFill>
-                  <a:srgbClr val="D4A24C"/>
-                </a:solidFill>
-                <a:latin typeface="Calibri" pitchFamily="34" charset="0"/>
-                <a:ea typeface="Calibri" pitchFamily="34" charset="-122"/>
-                <a:cs typeface="Calibri" pitchFamily="34" charset="-120"/>
-              </a:rPr>
-              <a:t>~1,500+</a:t>
-            </a:r>
-            <a:endParaRPr lang="en-US" sz="3600" dirty="0"/>
-          </a:p>
-        </p:txBody>
-      </p:sp>
-      <p:sp>
-        <p:nvSpPr>
-          <p:cNvPr id="28" name="Text 26"/>
-          <p:cNvSpPr/>
-          <p:nvPr/>
-        </p:nvSpPr>
-        <p:spPr>
-          <a:xfrm>
-            <a:off x="9144000" y="3895344"/>
-            <a:ext cx="2468880" cy="512064"/>
-          </a:xfrm>
-          <a:prstGeom prst="rect">
-            <a:avLst/>
-          </a:prstGeom>
-          <a:noFill/>
-          <a:ln/>
-        </p:spPr>
-        <p:txBody>
-          <a:bodyPr wrap="square" rtlCol="0" anchor="ctr"/>
-          <a:lstStyle/>
-          <a:p>
-            <a:pPr algn="ctr" indent="0" marL="0">
-              <a:buNone/>
-            </a:pPr>
-            <a:r>
-              <a:rPr lang="en-US" sz="1100" dirty="0">
-                <a:solidFill>
-                  <a:srgbClr val="2D3E50"/>
-                </a:solidFill>
-                <a:latin typeface="Calibri" pitchFamily="34" charset="0"/>
-                <a:ea typeface="Calibri" pitchFamily="34" charset="-122"/>
-                <a:cs typeface="Calibri" pitchFamily="34" charset="-120"/>
-              </a:rPr>
-              <a:t>Mentor gap (Black-male</a:t>
-            </a:r>
-            <a:endParaRPr lang="en-US" sz="1100" dirty="0"/>
-          </a:p>
-          <a:p>
-            <a:pPr algn="ctr" indent="0" marL="0">
-              <a:buNone/>
-            </a:pPr>
-            <a:r>
-              <a:rPr lang="en-US" sz="1100" dirty="0">
-                <a:solidFill>
-                  <a:srgbClr val="2D3E50"/>
-                </a:solidFill>
-                <a:latin typeface="Calibri" pitchFamily="34" charset="0"/>
-                <a:ea typeface="Calibri" pitchFamily="34" charset="-122"/>
-                <a:cs typeface="Calibri" pitchFamily="34" charset="-120"/>
-              </a:rPr>
-              <a:t>mentors needed)</a:t>
-            </a:r>
-            <a:endParaRPr lang="en-US" sz="1100" dirty="0"/>
-          </a:p>
-        </p:txBody>
-      </p:sp>
-      <p:sp>
-        <p:nvSpPr>
-          <p:cNvPr id="29" name="Text 27"/>
-          <p:cNvSpPr/>
-          <p:nvPr/>
-        </p:nvSpPr>
-        <p:spPr>
-          <a:xfrm>
-            <a:off x="548640" y="5029200"/>
-            <a:ext cx="11247120" cy="457200"/>
-          </a:xfrm>
-          <a:prstGeom prst="rect">
-            <a:avLst/>
-          </a:prstGeom>
-          <a:noFill/>
-          <a:ln/>
-        </p:spPr>
-        <p:txBody>
-          <a:bodyPr wrap="square" rtlCol="0" anchor="ctr"/>
-          <a:lstStyle/>
-          <a:p>
-            <a:pPr indent="0" marL="0">
-              <a:buNone/>
-            </a:pPr>
-            <a:r>
-              <a:rPr lang="en-US" sz="1000" i="1" dirty="0">
-                <a:solidFill>
-                  <a:srgbClr val="5A6470"/>
-                </a:solidFill>
-                <a:latin typeface="Calibri" pitchFamily="34" charset="0"/>
-                <a:ea typeface="Calibri" pitchFamily="34" charset="-122"/>
-                <a:cs typeface="Calibri" pitchFamily="34" charset="-120"/>
-              </a:rPr>
-              <a:t>Sources: ACS 2019–2023, AISD discipline reports, Travis County Juvenile Probation, BBBS Lone Star, Texas Demographic Center.</a:t>
-            </a:r>
-            <a:endParaRPr lang="en-US" sz="1000" dirty="0"/>
-          </a:p>
-        </p:txBody>
-      </p:sp>
-      <p:sp>
-        <p:nvSpPr>
-          <p:cNvPr id="30" name="Text 28"/>
-          <p:cNvSpPr/>
-          <p:nvPr/>
-        </p:nvSpPr>
-        <p:spPr>
-          <a:xfrm>
-            <a:off x="365760" y="6565392"/>
-            <a:ext cx="11457432" cy="228600"/>
-          </a:xfrm>
-          <a:prstGeom prst="rect">
-            <a:avLst/>
-          </a:prstGeom>
-          <a:noFill/>
-          <a:ln/>
-        </p:spPr>
-        <p:txBody>
-          <a:bodyPr wrap="square" rtlCol="0" anchor="ctr"/>
-          <a:lstStyle/>
-          <a:p>
-            <a:pPr indent="0" marL="0">
-              <a:buNone/>
-            </a:pPr>
-            <a:r>
-              <a:rPr lang="en-US" sz="900" dirty="0">
-                <a:solidFill>
-                  <a:srgbClr val="5A6470"/>
-                </a:solidFill>
-                <a:latin typeface="Calibri" pitchFamily="34" charset="0"/>
-                <a:ea typeface="Calibri" pitchFamily="34" charset="-122"/>
-                <a:cs typeface="Calibri" pitchFamily="34" charset="-120"/>
-              </a:rPr>
-              <a:t>TCAF · Austin · By the numbers · April 17, 2026</a:t>
-            </a:r>
-            <a:endParaRPr lang="en-US" sz="900" dirty="0"/>
-          </a:p>
-        </p:txBody>
-      </p:sp>
-    </p:spTree>
-  </p:cSld>
-  <p:clrMapOvr>
-    <a:masterClrMapping/>
-  </p:clrMapOvr>
-</p:sld>
-</file>
-
 <file path=ppt/slides/slide12.xml><?xml version="1.0" encoding="utf-8"?>
 <p:sld xmlns:a="http://schemas.openxmlformats.org/drawingml/2006/main" xmlns:r="http://schemas.openxmlformats.org/officeDocument/2006/relationships" xmlns:p="http://schemas.openxmlformats.org/presentationml/2006/main">
   <p:cSld name="Slide 12">
@@ -6698,7 +5749,7 @@
                 <a:ea typeface="Calibri" pitchFamily="34" charset="-122"/>
                 <a:cs typeface="Calibri" pitchFamily="34" charset="-120"/>
               </a:rPr>
-              <a:t>Austin — who's already in the field</a:t>
+              <a:t>Austin / Travis — by the numbers</a:t>
             </a:r>
             <a:endParaRPr lang="en-US" sz="2400" dirty="0"/>
           </a:p>
@@ -6737,6 +5788,1179 @@
                 <a:ea typeface="Calibri" pitchFamily="34" charset="-122"/>
                 <a:cs typeface="Calibri" pitchFamily="34" charset="-120"/>
               </a:rPr>
+              <a:t>Bigger metro, dispersed need, larger absolute gap.</a:t>
+            </a:r>
+            <a:endParaRPr lang="en-US" sz="1200" dirty="0"/>
+          </a:p>
+        </p:txBody>
+      </p:sp>
+      <p:sp>
+        <p:nvSpPr>
+          <p:cNvPr id="5" name="Shape 3"/>
+          <p:cNvSpPr/>
+          <p:nvPr/>
+        </p:nvSpPr>
+        <p:spPr>
+          <a:xfrm>
+            <a:off x="548640" y="1280160"/>
+            <a:ext cx="2651760" cy="1463040"/>
+          </a:xfrm>
+          <a:prstGeom prst="rect">
+            <a:avLst/>
+          </a:prstGeom>
+          <a:solidFill>
+            <a:srgbClr val="FFFFFF"/>
+          </a:solidFill>
+          <a:ln w="19050">
+            <a:solidFill>
+              <a:srgbClr val="2D3E50"/>
+            </a:solidFill>
+            <a:prstDash val="solid"/>
+          </a:ln>
+        </p:spPr>
+      </p:sp>
+      <p:sp>
+        <p:nvSpPr>
+          <p:cNvPr id="6" name="Text 4"/>
+          <p:cNvSpPr/>
+          <p:nvPr/>
+        </p:nvSpPr>
+        <p:spPr>
+          <a:xfrm>
+            <a:off x="548640" y="1417320"/>
+            <a:ext cx="2651760" cy="804672"/>
+          </a:xfrm>
+          <a:prstGeom prst="rect">
+            <a:avLst/>
+          </a:prstGeom>
+          <a:noFill/>
+          <a:ln/>
+        </p:spPr>
+        <p:txBody>
+          <a:bodyPr wrap="square" rtlCol="0" anchor="ctr"/>
+          <a:lstStyle/>
+          <a:p>
+            <a:pPr algn="ctr" indent="0" marL="0">
+              <a:buNone/>
+            </a:pPr>
+            <a:r>
+              <a:rPr lang="en-US" sz="3600" b="1" dirty="0">
+                <a:solidFill>
+                  <a:srgbClr val="2D3E50"/>
+                </a:solidFill>
+                <a:latin typeface="Calibri" pitchFamily="34" charset="0"/>
+                <a:ea typeface="Calibri" pitchFamily="34" charset="-122"/>
+                <a:cs typeface="Calibri" pitchFamily="34" charset="-120"/>
+              </a:rPr>
+              <a:t>1.3M</a:t>
+            </a:r>
+            <a:endParaRPr lang="en-US" sz="3600" dirty="0"/>
+          </a:p>
+        </p:txBody>
+      </p:sp>
+      <p:sp>
+        <p:nvSpPr>
+          <p:cNvPr id="7" name="Text 5"/>
+          <p:cNvSpPr/>
+          <p:nvPr/>
+        </p:nvSpPr>
+        <p:spPr>
+          <a:xfrm>
+            <a:off x="640080" y="2157984"/>
+            <a:ext cx="2468880" cy="512064"/>
+          </a:xfrm>
+          <a:prstGeom prst="rect">
+            <a:avLst/>
+          </a:prstGeom>
+          <a:noFill/>
+          <a:ln/>
+        </p:spPr>
+        <p:txBody>
+          <a:bodyPr wrap="square" rtlCol="0" anchor="ctr"/>
+          <a:lstStyle/>
+          <a:p>
+            <a:pPr algn="ctr" indent="0" marL="0">
+              <a:buNone/>
+            </a:pPr>
+            <a:r>
+              <a:rPr lang="en-US" sz="1100" dirty="0">
+                <a:solidFill>
+                  <a:srgbClr val="2D3E50"/>
+                </a:solidFill>
+                <a:latin typeface="Calibri" pitchFamily="34" charset="0"/>
+                <a:ea typeface="Calibri" pitchFamily="34" charset="-122"/>
+                <a:cs typeface="Calibri" pitchFamily="34" charset="-120"/>
+              </a:rPr>
+              <a:t>Travis County</a:t>
+            </a:r>
+            <a:endParaRPr lang="en-US" sz="1100" dirty="0"/>
+          </a:p>
+          <a:p>
+            <a:pPr algn="ctr" indent="0" marL="0">
+              <a:buNone/>
+            </a:pPr>
+            <a:r>
+              <a:rPr lang="en-US" sz="1100" dirty="0">
+                <a:solidFill>
+                  <a:srgbClr val="2D3E50"/>
+                </a:solidFill>
+                <a:latin typeface="Calibri" pitchFamily="34" charset="0"/>
+                <a:ea typeface="Calibri" pitchFamily="34" charset="-122"/>
+                <a:cs typeface="Calibri" pitchFamily="34" charset="-120"/>
+              </a:rPr>
+              <a:t>population</a:t>
+            </a:r>
+            <a:endParaRPr lang="en-US" sz="1100" dirty="0"/>
+          </a:p>
+        </p:txBody>
+      </p:sp>
+      <p:sp>
+        <p:nvSpPr>
+          <p:cNvPr id="8" name="Shape 6"/>
+          <p:cNvSpPr/>
+          <p:nvPr/>
+        </p:nvSpPr>
+        <p:spPr>
+          <a:xfrm>
+            <a:off x="3383280" y="1280160"/>
+            <a:ext cx="2651760" cy="1463040"/>
+          </a:xfrm>
+          <a:prstGeom prst="rect">
+            <a:avLst/>
+          </a:prstGeom>
+          <a:solidFill>
+            <a:srgbClr val="FFFFFF"/>
+          </a:solidFill>
+          <a:ln w="19050">
+            <a:solidFill>
+              <a:srgbClr val="2D3E50"/>
+            </a:solidFill>
+            <a:prstDash val="solid"/>
+          </a:ln>
+        </p:spPr>
+      </p:sp>
+      <p:sp>
+        <p:nvSpPr>
+          <p:cNvPr id="9" name="Text 7"/>
+          <p:cNvSpPr/>
+          <p:nvPr/>
+        </p:nvSpPr>
+        <p:spPr>
+          <a:xfrm>
+            <a:off x="3383280" y="1417320"/>
+            <a:ext cx="2651760" cy="804672"/>
+          </a:xfrm>
+          <a:prstGeom prst="rect">
+            <a:avLst/>
+          </a:prstGeom>
+          <a:noFill/>
+          <a:ln/>
+        </p:spPr>
+        <p:txBody>
+          <a:bodyPr wrap="square" rtlCol="0" anchor="ctr"/>
+          <a:lstStyle/>
+          <a:p>
+            <a:pPr algn="ctr" indent="0" marL="0">
+              <a:buNone/>
+            </a:pPr>
+            <a:r>
+              <a:rPr lang="en-US" sz="3600" b="1" dirty="0">
+                <a:solidFill>
+                  <a:srgbClr val="2D3E50"/>
+                </a:solidFill>
+                <a:latin typeface="Calibri" pitchFamily="34" charset="0"/>
+                <a:ea typeface="Calibri" pitchFamily="34" charset="-122"/>
+                <a:cs typeface="Calibri" pitchFamily="34" charset="-120"/>
+              </a:rPr>
+              <a:t>~9%</a:t>
+            </a:r>
+            <a:endParaRPr lang="en-US" sz="3600" dirty="0"/>
+          </a:p>
+        </p:txBody>
+      </p:sp>
+      <p:sp>
+        <p:nvSpPr>
+          <p:cNvPr id="10" name="Text 8"/>
+          <p:cNvSpPr/>
+          <p:nvPr/>
+        </p:nvSpPr>
+        <p:spPr>
+          <a:xfrm>
+            <a:off x="3474720" y="2157984"/>
+            <a:ext cx="2468880" cy="512064"/>
+          </a:xfrm>
+          <a:prstGeom prst="rect">
+            <a:avLst/>
+          </a:prstGeom>
+          <a:noFill/>
+          <a:ln/>
+        </p:spPr>
+        <p:txBody>
+          <a:bodyPr wrap="square" rtlCol="0" anchor="ctr"/>
+          <a:lstStyle/>
+          <a:p>
+            <a:pPr algn="ctr" indent="0" marL="0">
+              <a:buNone/>
+            </a:pPr>
+            <a:r>
+              <a:rPr lang="en-US" sz="1100" dirty="0">
+                <a:solidFill>
+                  <a:srgbClr val="2D3E50"/>
+                </a:solidFill>
+                <a:latin typeface="Calibri" pitchFamily="34" charset="0"/>
+                <a:ea typeface="Calibri" pitchFamily="34" charset="-122"/>
+                <a:cs typeface="Calibri" pitchFamily="34" charset="-120"/>
+              </a:rPr>
+              <a:t>Black share of</a:t>
+            </a:r>
+            <a:endParaRPr lang="en-US" sz="1100" dirty="0"/>
+          </a:p>
+          <a:p>
+            <a:pPr algn="ctr" indent="0" marL="0">
+              <a:buNone/>
+            </a:pPr>
+            <a:r>
+              <a:rPr lang="en-US" sz="1100" dirty="0">
+                <a:solidFill>
+                  <a:srgbClr val="2D3E50"/>
+                </a:solidFill>
+                <a:latin typeface="Calibri" pitchFamily="34" charset="0"/>
+                <a:ea typeface="Calibri" pitchFamily="34" charset="-122"/>
+                <a:cs typeface="Calibri" pitchFamily="34" charset="-120"/>
+              </a:rPr>
+              <a:t>Travis County</a:t>
+            </a:r>
+            <a:endParaRPr lang="en-US" sz="1100" dirty="0"/>
+          </a:p>
+        </p:txBody>
+      </p:sp>
+      <p:sp>
+        <p:nvSpPr>
+          <p:cNvPr id="11" name="Shape 9"/>
+          <p:cNvSpPr/>
+          <p:nvPr/>
+        </p:nvSpPr>
+        <p:spPr>
+          <a:xfrm>
+            <a:off x="6217920" y="1280160"/>
+            <a:ext cx="2651760" cy="1463040"/>
+          </a:xfrm>
+          <a:prstGeom prst="rect">
+            <a:avLst/>
+          </a:prstGeom>
+          <a:solidFill>
+            <a:srgbClr val="FFFFFF"/>
+          </a:solidFill>
+          <a:ln w="19050">
+            <a:solidFill>
+              <a:srgbClr val="2D3E50"/>
+            </a:solidFill>
+            <a:prstDash val="solid"/>
+          </a:ln>
+        </p:spPr>
+      </p:sp>
+      <p:sp>
+        <p:nvSpPr>
+          <p:cNvPr id="12" name="Text 10"/>
+          <p:cNvSpPr/>
+          <p:nvPr/>
+        </p:nvSpPr>
+        <p:spPr>
+          <a:xfrm>
+            <a:off x="6217920" y="1417320"/>
+            <a:ext cx="2651760" cy="804672"/>
+          </a:xfrm>
+          <a:prstGeom prst="rect">
+            <a:avLst/>
+          </a:prstGeom>
+          <a:noFill/>
+          <a:ln/>
+        </p:spPr>
+        <p:txBody>
+          <a:bodyPr wrap="square" rtlCol="0" anchor="ctr"/>
+          <a:lstStyle/>
+          <a:p>
+            <a:pPr algn="ctr" indent="0" marL="0">
+              <a:buNone/>
+            </a:pPr>
+            <a:r>
+              <a:rPr lang="en-US" sz="3600" b="1" dirty="0">
+                <a:solidFill>
+                  <a:srgbClr val="2D3E50"/>
+                </a:solidFill>
+                <a:latin typeface="Calibri" pitchFamily="34" charset="0"/>
+                <a:ea typeface="Calibri" pitchFamily="34" charset="-122"/>
+                <a:cs typeface="Calibri" pitchFamily="34" charset="-120"/>
+              </a:rPr>
+              <a:t>~7%</a:t>
+            </a:r>
+            <a:endParaRPr lang="en-US" sz="3600" dirty="0"/>
+          </a:p>
+        </p:txBody>
+      </p:sp>
+      <p:sp>
+        <p:nvSpPr>
+          <p:cNvPr id="13" name="Text 11"/>
+          <p:cNvSpPr/>
+          <p:nvPr/>
+        </p:nvSpPr>
+        <p:spPr>
+          <a:xfrm>
+            <a:off x="6309360" y="2157984"/>
+            <a:ext cx="2468880" cy="512064"/>
+          </a:xfrm>
+          <a:prstGeom prst="rect">
+            <a:avLst/>
+          </a:prstGeom>
+          <a:noFill/>
+          <a:ln/>
+        </p:spPr>
+        <p:txBody>
+          <a:bodyPr wrap="square" rtlCol="0" anchor="ctr"/>
+          <a:lstStyle/>
+          <a:p>
+            <a:pPr algn="ctr" indent="0" marL="0">
+              <a:buNone/>
+            </a:pPr>
+            <a:r>
+              <a:rPr lang="en-US" sz="1100" dirty="0">
+                <a:solidFill>
+                  <a:srgbClr val="2D3E50"/>
+                </a:solidFill>
+                <a:latin typeface="Calibri" pitchFamily="34" charset="0"/>
+                <a:ea typeface="Calibri" pitchFamily="34" charset="-122"/>
+                <a:cs typeface="Calibri" pitchFamily="34" charset="-120"/>
+              </a:rPr>
+              <a:t>Black share of</a:t>
+            </a:r>
+            <a:endParaRPr lang="en-US" sz="1100" dirty="0"/>
+          </a:p>
+          <a:p>
+            <a:pPr algn="ctr" indent="0" marL="0">
+              <a:buNone/>
+            </a:pPr>
+            <a:r>
+              <a:rPr lang="en-US" sz="1100" dirty="0">
+                <a:solidFill>
+                  <a:srgbClr val="2D3E50"/>
+                </a:solidFill>
+                <a:latin typeface="Calibri" pitchFamily="34" charset="0"/>
+                <a:ea typeface="Calibri" pitchFamily="34" charset="-122"/>
+                <a:cs typeface="Calibri" pitchFamily="34" charset="-120"/>
+              </a:rPr>
+              <a:t>Austin ISD</a:t>
+            </a:r>
+            <a:endParaRPr lang="en-US" sz="1100" dirty="0"/>
+          </a:p>
+        </p:txBody>
+      </p:sp>
+      <p:sp>
+        <p:nvSpPr>
+          <p:cNvPr id="14" name="Shape 12"/>
+          <p:cNvSpPr/>
+          <p:nvPr/>
+        </p:nvSpPr>
+        <p:spPr>
+          <a:xfrm>
+            <a:off x="9052560" y="1280160"/>
+            <a:ext cx="2651760" cy="1463040"/>
+          </a:xfrm>
+          <a:prstGeom prst="rect">
+            <a:avLst/>
+          </a:prstGeom>
+          <a:solidFill>
+            <a:srgbClr val="FFFFFF"/>
+          </a:solidFill>
+          <a:ln w="19050">
+            <a:solidFill>
+              <a:srgbClr val="9B1C2E"/>
+            </a:solidFill>
+            <a:prstDash val="solid"/>
+          </a:ln>
+        </p:spPr>
+      </p:sp>
+      <p:sp>
+        <p:nvSpPr>
+          <p:cNvPr id="15" name="Text 13"/>
+          <p:cNvSpPr/>
+          <p:nvPr/>
+        </p:nvSpPr>
+        <p:spPr>
+          <a:xfrm>
+            <a:off x="9052560" y="1417320"/>
+            <a:ext cx="2651760" cy="804672"/>
+          </a:xfrm>
+          <a:prstGeom prst="rect">
+            <a:avLst/>
+          </a:prstGeom>
+          <a:noFill/>
+          <a:ln/>
+        </p:spPr>
+        <p:txBody>
+          <a:bodyPr wrap="square" rtlCol="0" anchor="ctr"/>
+          <a:lstStyle/>
+          <a:p>
+            <a:pPr algn="ctr" indent="0" marL="0">
+              <a:buNone/>
+            </a:pPr>
+            <a:r>
+              <a:rPr lang="en-US" sz="3600" b="1" dirty="0">
+                <a:solidFill>
+                  <a:srgbClr val="9B1C2E"/>
+                </a:solidFill>
+                <a:latin typeface="Calibri" pitchFamily="34" charset="0"/>
+                <a:ea typeface="Calibri" pitchFamily="34" charset="-122"/>
+                <a:cs typeface="Calibri" pitchFamily="34" charset="-120"/>
+              </a:rPr>
+              <a:t>20%+</a:t>
+            </a:r>
+            <a:endParaRPr lang="en-US" sz="3600" dirty="0"/>
+          </a:p>
+        </p:txBody>
+      </p:sp>
+      <p:sp>
+        <p:nvSpPr>
+          <p:cNvPr id="16" name="Text 14"/>
+          <p:cNvSpPr/>
+          <p:nvPr/>
+        </p:nvSpPr>
+        <p:spPr>
+          <a:xfrm>
+            <a:off x="9144000" y="2157984"/>
+            <a:ext cx="2468880" cy="512064"/>
+          </a:xfrm>
+          <a:prstGeom prst="rect">
+            <a:avLst/>
+          </a:prstGeom>
+          <a:noFill/>
+          <a:ln/>
+        </p:spPr>
+        <p:txBody>
+          <a:bodyPr wrap="square" rtlCol="0" anchor="ctr"/>
+          <a:lstStyle/>
+          <a:p>
+            <a:pPr algn="ctr" indent="0" marL="0">
+              <a:buNone/>
+            </a:pPr>
+            <a:r>
+              <a:rPr lang="en-US" sz="1100" dirty="0">
+                <a:solidFill>
+                  <a:srgbClr val="2D3E50"/>
+                </a:solidFill>
+                <a:latin typeface="Calibri" pitchFamily="34" charset="0"/>
+                <a:ea typeface="Calibri" pitchFamily="34" charset="-122"/>
+                <a:cs typeface="Calibri" pitchFamily="34" charset="-120"/>
+              </a:rPr>
+              <a:t>Black share of AISD</a:t>
+            </a:r>
+            <a:endParaRPr lang="en-US" sz="1100" dirty="0"/>
+          </a:p>
+          <a:p>
+            <a:pPr algn="ctr" indent="0" marL="0">
+              <a:buNone/>
+            </a:pPr>
+            <a:r>
+              <a:rPr lang="en-US" sz="1100" dirty="0">
+                <a:solidFill>
+                  <a:srgbClr val="2D3E50"/>
+                </a:solidFill>
+                <a:latin typeface="Calibri" pitchFamily="34" charset="0"/>
+                <a:ea typeface="Calibri" pitchFamily="34" charset="-122"/>
+                <a:cs typeface="Calibri" pitchFamily="34" charset="-120"/>
+              </a:rPr>
+              <a:t>out-of-school suspensions</a:t>
+            </a:r>
+            <a:endParaRPr lang="en-US" sz="1100" dirty="0"/>
+          </a:p>
+        </p:txBody>
+      </p:sp>
+      <p:sp>
+        <p:nvSpPr>
+          <p:cNvPr id="17" name="Shape 15"/>
+          <p:cNvSpPr/>
+          <p:nvPr/>
+        </p:nvSpPr>
+        <p:spPr>
+          <a:xfrm>
+            <a:off x="548640" y="3017520"/>
+            <a:ext cx="2651760" cy="1463040"/>
+          </a:xfrm>
+          <a:prstGeom prst="rect">
+            <a:avLst/>
+          </a:prstGeom>
+          <a:solidFill>
+            <a:srgbClr val="FFFFFF"/>
+          </a:solidFill>
+          <a:ln w="19050">
+            <a:solidFill>
+              <a:srgbClr val="9B1C2E"/>
+            </a:solidFill>
+            <a:prstDash val="solid"/>
+          </a:ln>
+        </p:spPr>
+      </p:sp>
+      <p:sp>
+        <p:nvSpPr>
+          <p:cNvPr id="18" name="Text 16"/>
+          <p:cNvSpPr/>
+          <p:nvPr/>
+        </p:nvSpPr>
+        <p:spPr>
+          <a:xfrm>
+            <a:off x="548640" y="3154680"/>
+            <a:ext cx="2651760" cy="804672"/>
+          </a:xfrm>
+          <a:prstGeom prst="rect">
+            <a:avLst/>
+          </a:prstGeom>
+          <a:noFill/>
+          <a:ln/>
+        </p:spPr>
+        <p:txBody>
+          <a:bodyPr wrap="square" rtlCol="0" anchor="ctr"/>
+          <a:lstStyle/>
+          <a:p>
+            <a:pPr algn="ctr" indent="0" marL="0">
+              <a:buNone/>
+            </a:pPr>
+            <a:r>
+              <a:rPr lang="en-US" sz="3600" b="1" dirty="0">
+                <a:solidFill>
+                  <a:srgbClr val="9B1C2E"/>
+                </a:solidFill>
+                <a:latin typeface="Calibri" pitchFamily="34" charset="0"/>
+                <a:ea typeface="Calibri" pitchFamily="34" charset="-122"/>
+                <a:cs typeface="Calibri" pitchFamily="34" charset="-120"/>
+              </a:rPr>
+              <a:t>~3.5×</a:t>
+            </a:r>
+            <a:endParaRPr lang="en-US" sz="3600" dirty="0"/>
+          </a:p>
+        </p:txBody>
+      </p:sp>
+      <p:sp>
+        <p:nvSpPr>
+          <p:cNvPr id="19" name="Text 17"/>
+          <p:cNvSpPr/>
+          <p:nvPr/>
+        </p:nvSpPr>
+        <p:spPr>
+          <a:xfrm>
+            <a:off x="640080" y="3895344"/>
+            <a:ext cx="2468880" cy="512064"/>
+          </a:xfrm>
+          <a:prstGeom prst="rect">
+            <a:avLst/>
+          </a:prstGeom>
+          <a:noFill/>
+          <a:ln/>
+        </p:spPr>
+        <p:txBody>
+          <a:bodyPr wrap="square" rtlCol="0" anchor="ctr"/>
+          <a:lstStyle/>
+          <a:p>
+            <a:pPr algn="ctr" indent="0" marL="0">
+              <a:buNone/>
+            </a:pPr>
+            <a:r>
+              <a:rPr lang="en-US" sz="1100" dirty="0">
+                <a:solidFill>
+                  <a:srgbClr val="2D3E50"/>
+                </a:solidFill>
+                <a:latin typeface="Calibri" pitchFamily="34" charset="0"/>
+                <a:ea typeface="Calibri" pitchFamily="34" charset="-122"/>
+                <a:cs typeface="Calibri" pitchFamily="34" charset="-120"/>
+              </a:rPr>
+              <a:t>Black students suspended</a:t>
+            </a:r>
+            <a:endParaRPr lang="en-US" sz="1100" dirty="0"/>
+          </a:p>
+          <a:p>
+            <a:pPr algn="ctr" indent="0" marL="0">
+              <a:buNone/>
+            </a:pPr>
+            <a:r>
+              <a:rPr lang="en-US" sz="1100" dirty="0">
+                <a:solidFill>
+                  <a:srgbClr val="2D3E50"/>
+                </a:solidFill>
+                <a:latin typeface="Calibri" pitchFamily="34" charset="0"/>
+                <a:ea typeface="Calibri" pitchFamily="34" charset="-122"/>
+                <a:cs typeface="Calibri" pitchFamily="34" charset="-120"/>
+              </a:rPr>
+              <a:t>vs White peers (AISD)</a:t>
+            </a:r>
+            <a:endParaRPr lang="en-US" sz="1100" dirty="0"/>
+          </a:p>
+        </p:txBody>
+      </p:sp>
+      <p:sp>
+        <p:nvSpPr>
+          <p:cNvPr id="20" name="Shape 18"/>
+          <p:cNvSpPr/>
+          <p:nvPr/>
+        </p:nvSpPr>
+        <p:spPr>
+          <a:xfrm>
+            <a:off x="3383280" y="3017520"/>
+            <a:ext cx="2651760" cy="1463040"/>
+          </a:xfrm>
+          <a:prstGeom prst="rect">
+            <a:avLst/>
+          </a:prstGeom>
+          <a:solidFill>
+            <a:srgbClr val="FFFFFF"/>
+          </a:solidFill>
+          <a:ln w="19050">
+            <a:solidFill>
+              <a:srgbClr val="2D3E50"/>
+            </a:solidFill>
+            <a:prstDash val="solid"/>
+          </a:ln>
+        </p:spPr>
+      </p:sp>
+      <p:sp>
+        <p:nvSpPr>
+          <p:cNvPr id="21" name="Text 19"/>
+          <p:cNvSpPr/>
+          <p:nvPr/>
+        </p:nvSpPr>
+        <p:spPr>
+          <a:xfrm>
+            <a:off x="3383280" y="3154680"/>
+            <a:ext cx="2651760" cy="804672"/>
+          </a:xfrm>
+          <a:prstGeom prst="rect">
+            <a:avLst/>
+          </a:prstGeom>
+          <a:noFill/>
+          <a:ln/>
+        </p:spPr>
+        <p:txBody>
+          <a:bodyPr wrap="square" rtlCol="0" anchor="ctr"/>
+          <a:lstStyle/>
+          <a:p>
+            <a:pPr algn="ctr" indent="0" marL="0">
+              <a:buNone/>
+            </a:pPr>
+            <a:r>
+              <a:rPr lang="en-US" sz="3600" b="1" dirty="0">
+                <a:solidFill>
+                  <a:srgbClr val="2D3E50"/>
+                </a:solidFill>
+                <a:latin typeface="Calibri" pitchFamily="34" charset="0"/>
+                <a:ea typeface="Calibri" pitchFamily="34" charset="-122"/>
+                <a:cs typeface="Calibri" pitchFamily="34" charset="-120"/>
+              </a:rPr>
+              <a:t>~5,500</a:t>
+            </a:r>
+            <a:endParaRPr lang="en-US" sz="3600" dirty="0"/>
+          </a:p>
+        </p:txBody>
+      </p:sp>
+      <p:sp>
+        <p:nvSpPr>
+          <p:cNvPr id="22" name="Text 20"/>
+          <p:cNvSpPr/>
+          <p:nvPr/>
+        </p:nvSpPr>
+        <p:spPr>
+          <a:xfrm>
+            <a:off x="3474720" y="3895344"/>
+            <a:ext cx="2468880" cy="512064"/>
+          </a:xfrm>
+          <a:prstGeom prst="rect">
+            <a:avLst/>
+          </a:prstGeom>
+          <a:noFill/>
+          <a:ln/>
+        </p:spPr>
+        <p:txBody>
+          <a:bodyPr wrap="square" rtlCol="0" anchor="ctr"/>
+          <a:lstStyle/>
+          <a:p>
+            <a:pPr algn="ctr" indent="0" marL="0">
+              <a:buNone/>
+            </a:pPr>
+            <a:r>
+              <a:rPr lang="en-US" sz="1100" dirty="0">
+                <a:solidFill>
+                  <a:srgbClr val="2D3E50"/>
+                </a:solidFill>
+                <a:latin typeface="Calibri" pitchFamily="34" charset="0"/>
+                <a:ea typeface="Calibri" pitchFamily="34" charset="-122"/>
+                <a:cs typeface="Calibri" pitchFamily="34" charset="-120"/>
+              </a:rPr>
+              <a:t>Est. disconnected Black</a:t>
+            </a:r>
+            <a:endParaRPr lang="en-US" sz="1100" dirty="0"/>
+          </a:p>
+          <a:p>
+            <a:pPr algn="ctr" indent="0" marL="0">
+              <a:buNone/>
+            </a:pPr>
+            <a:r>
+              <a:rPr lang="en-US" sz="1100" dirty="0">
+                <a:solidFill>
+                  <a:srgbClr val="2D3E50"/>
+                </a:solidFill>
+                <a:latin typeface="Calibri" pitchFamily="34" charset="0"/>
+                <a:ea typeface="Calibri" pitchFamily="34" charset="-122"/>
+                <a:cs typeface="Calibri" pitchFamily="34" charset="-120"/>
+              </a:rPr>
+              <a:t>youth 16–24 metro-wide</a:t>
+            </a:r>
+            <a:endParaRPr lang="en-US" sz="1100" dirty="0"/>
+          </a:p>
+        </p:txBody>
+      </p:sp>
+      <p:sp>
+        <p:nvSpPr>
+          <p:cNvPr id="23" name="Shape 21"/>
+          <p:cNvSpPr/>
+          <p:nvPr/>
+        </p:nvSpPr>
+        <p:spPr>
+          <a:xfrm>
+            <a:off x="6217920" y="3017520"/>
+            <a:ext cx="2651760" cy="1463040"/>
+          </a:xfrm>
+          <a:prstGeom prst="rect">
+            <a:avLst/>
+          </a:prstGeom>
+          <a:solidFill>
+            <a:srgbClr val="FFFFFF"/>
+          </a:solidFill>
+          <a:ln w="19050">
+            <a:solidFill>
+              <a:srgbClr val="2D3E50"/>
+            </a:solidFill>
+            <a:prstDash val="solid"/>
+          </a:ln>
+        </p:spPr>
+      </p:sp>
+      <p:sp>
+        <p:nvSpPr>
+          <p:cNvPr id="24" name="Text 22"/>
+          <p:cNvSpPr/>
+          <p:nvPr/>
+        </p:nvSpPr>
+        <p:spPr>
+          <a:xfrm>
+            <a:off x="6217920" y="3154680"/>
+            <a:ext cx="2651760" cy="804672"/>
+          </a:xfrm>
+          <a:prstGeom prst="rect">
+            <a:avLst/>
+          </a:prstGeom>
+          <a:noFill/>
+          <a:ln/>
+        </p:spPr>
+        <p:txBody>
+          <a:bodyPr wrap="square" rtlCol="0" anchor="ctr"/>
+          <a:lstStyle/>
+          <a:p>
+            <a:pPr algn="ctr" indent="0" marL="0">
+              <a:buNone/>
+            </a:pPr>
+            <a:r>
+              <a:rPr lang="en-US" sz="3600" b="1" dirty="0">
+                <a:solidFill>
+                  <a:srgbClr val="2D3E50"/>
+                </a:solidFill>
+                <a:latin typeface="Calibri" pitchFamily="34" charset="0"/>
+                <a:ea typeface="Calibri" pitchFamily="34" charset="-122"/>
+                <a:cs typeface="Calibri" pitchFamily="34" charset="-120"/>
+              </a:rPr>
+              <a:t>~12,000</a:t>
+            </a:r>
+            <a:endParaRPr lang="en-US" sz="3600" dirty="0"/>
+          </a:p>
+        </p:txBody>
+      </p:sp>
+      <p:sp>
+        <p:nvSpPr>
+          <p:cNvPr id="25" name="Text 23"/>
+          <p:cNvSpPr/>
+          <p:nvPr/>
+        </p:nvSpPr>
+        <p:spPr>
+          <a:xfrm>
+            <a:off x="6309360" y="3895344"/>
+            <a:ext cx="2468880" cy="512064"/>
+          </a:xfrm>
+          <a:prstGeom prst="rect">
+            <a:avLst/>
+          </a:prstGeom>
+          <a:noFill/>
+          <a:ln/>
+        </p:spPr>
+        <p:txBody>
+          <a:bodyPr wrap="square" rtlCol="0" anchor="ctr"/>
+          <a:lstStyle/>
+          <a:p>
+            <a:pPr algn="ctr" indent="0" marL="0">
+              <a:buNone/>
+            </a:pPr>
+            <a:r>
+              <a:rPr lang="en-US" sz="1100" dirty="0">
+                <a:solidFill>
+                  <a:srgbClr val="2D3E50"/>
+                </a:solidFill>
+                <a:latin typeface="Calibri" pitchFamily="34" charset="0"/>
+                <a:ea typeface="Calibri" pitchFamily="34" charset="-122"/>
+                <a:cs typeface="Calibri" pitchFamily="34" charset="-120"/>
+              </a:rPr>
+              <a:t>Black children in single-</a:t>
+            </a:r>
+            <a:endParaRPr lang="en-US" sz="1100" dirty="0"/>
+          </a:p>
+          <a:p>
+            <a:pPr algn="ctr" indent="0" marL="0">
+              <a:buNone/>
+            </a:pPr>
+            <a:r>
+              <a:rPr lang="en-US" sz="1100" dirty="0">
+                <a:solidFill>
+                  <a:srgbClr val="2D3E50"/>
+                </a:solidFill>
+                <a:latin typeface="Calibri" pitchFamily="34" charset="0"/>
+                <a:ea typeface="Calibri" pitchFamily="34" charset="-122"/>
+                <a:cs typeface="Calibri" pitchFamily="34" charset="-120"/>
+              </a:rPr>
+              <a:t>parent households</a:t>
+            </a:r>
+            <a:endParaRPr lang="en-US" sz="1100" dirty="0"/>
+          </a:p>
+        </p:txBody>
+      </p:sp>
+      <p:sp>
+        <p:nvSpPr>
+          <p:cNvPr id="26" name="Shape 24"/>
+          <p:cNvSpPr/>
+          <p:nvPr/>
+        </p:nvSpPr>
+        <p:spPr>
+          <a:xfrm>
+            <a:off x="9052560" y="3017520"/>
+            <a:ext cx="2651760" cy="1463040"/>
+          </a:xfrm>
+          <a:prstGeom prst="rect">
+            <a:avLst/>
+          </a:prstGeom>
+          <a:solidFill>
+            <a:srgbClr val="FFFFFF"/>
+          </a:solidFill>
+          <a:ln w="19050">
+            <a:solidFill>
+              <a:srgbClr val="D4A24C"/>
+            </a:solidFill>
+            <a:prstDash val="solid"/>
+          </a:ln>
+        </p:spPr>
+      </p:sp>
+      <p:sp>
+        <p:nvSpPr>
+          <p:cNvPr id="27" name="Text 25"/>
+          <p:cNvSpPr/>
+          <p:nvPr/>
+        </p:nvSpPr>
+        <p:spPr>
+          <a:xfrm>
+            <a:off x="9052560" y="3154680"/>
+            <a:ext cx="2651760" cy="804672"/>
+          </a:xfrm>
+          <a:prstGeom prst="rect">
+            <a:avLst/>
+          </a:prstGeom>
+          <a:noFill/>
+          <a:ln/>
+        </p:spPr>
+        <p:txBody>
+          <a:bodyPr wrap="square" rtlCol="0" anchor="ctr"/>
+          <a:lstStyle/>
+          <a:p>
+            <a:pPr algn="ctr" indent="0" marL="0">
+              <a:buNone/>
+            </a:pPr>
+            <a:r>
+              <a:rPr lang="en-US" sz="3600" b="1" dirty="0">
+                <a:solidFill>
+                  <a:srgbClr val="D4A24C"/>
+                </a:solidFill>
+                <a:latin typeface="Calibri" pitchFamily="34" charset="0"/>
+                <a:ea typeface="Calibri" pitchFamily="34" charset="-122"/>
+                <a:cs typeface="Calibri" pitchFamily="34" charset="-120"/>
+              </a:rPr>
+              <a:t>~1,500+</a:t>
+            </a:r>
+            <a:endParaRPr lang="en-US" sz="3600" dirty="0"/>
+          </a:p>
+        </p:txBody>
+      </p:sp>
+      <p:sp>
+        <p:nvSpPr>
+          <p:cNvPr id="28" name="Text 26"/>
+          <p:cNvSpPr/>
+          <p:nvPr/>
+        </p:nvSpPr>
+        <p:spPr>
+          <a:xfrm>
+            <a:off x="9144000" y="3895344"/>
+            <a:ext cx="2468880" cy="512064"/>
+          </a:xfrm>
+          <a:prstGeom prst="rect">
+            <a:avLst/>
+          </a:prstGeom>
+          <a:noFill/>
+          <a:ln/>
+        </p:spPr>
+        <p:txBody>
+          <a:bodyPr wrap="square" rtlCol="0" anchor="ctr"/>
+          <a:lstStyle/>
+          <a:p>
+            <a:pPr algn="ctr" indent="0" marL="0">
+              <a:buNone/>
+            </a:pPr>
+            <a:r>
+              <a:rPr lang="en-US" sz="1100" dirty="0">
+                <a:solidFill>
+                  <a:srgbClr val="2D3E50"/>
+                </a:solidFill>
+                <a:latin typeface="Calibri" pitchFamily="34" charset="0"/>
+                <a:ea typeface="Calibri" pitchFamily="34" charset="-122"/>
+                <a:cs typeface="Calibri" pitchFamily="34" charset="-120"/>
+              </a:rPr>
+              <a:t>Mentor gap (Black-male</a:t>
+            </a:r>
+            <a:endParaRPr lang="en-US" sz="1100" dirty="0"/>
+          </a:p>
+          <a:p>
+            <a:pPr algn="ctr" indent="0" marL="0">
+              <a:buNone/>
+            </a:pPr>
+            <a:r>
+              <a:rPr lang="en-US" sz="1100" dirty="0">
+                <a:solidFill>
+                  <a:srgbClr val="2D3E50"/>
+                </a:solidFill>
+                <a:latin typeface="Calibri" pitchFamily="34" charset="0"/>
+                <a:ea typeface="Calibri" pitchFamily="34" charset="-122"/>
+                <a:cs typeface="Calibri" pitchFamily="34" charset="-120"/>
+              </a:rPr>
+              <a:t>mentors needed)</a:t>
+            </a:r>
+            <a:endParaRPr lang="en-US" sz="1100" dirty="0"/>
+          </a:p>
+        </p:txBody>
+      </p:sp>
+      <p:sp>
+        <p:nvSpPr>
+          <p:cNvPr id="29" name="Text 27"/>
+          <p:cNvSpPr/>
+          <p:nvPr/>
+        </p:nvSpPr>
+        <p:spPr>
+          <a:xfrm>
+            <a:off x="548640" y="5029200"/>
+            <a:ext cx="11247120" cy="457200"/>
+          </a:xfrm>
+          <a:prstGeom prst="rect">
+            <a:avLst/>
+          </a:prstGeom>
+          <a:noFill/>
+          <a:ln/>
+        </p:spPr>
+        <p:txBody>
+          <a:bodyPr wrap="square" rtlCol="0" anchor="ctr"/>
+          <a:lstStyle/>
+          <a:p>
+            <a:pPr indent="0" marL="0">
+              <a:buNone/>
+            </a:pPr>
+            <a:r>
+              <a:rPr lang="en-US" sz="1000" i="1" dirty="0">
+                <a:solidFill>
+                  <a:srgbClr val="5A6470"/>
+                </a:solidFill>
+                <a:latin typeface="Calibri" pitchFamily="34" charset="0"/>
+                <a:ea typeface="Calibri" pitchFamily="34" charset="-122"/>
+                <a:cs typeface="Calibri" pitchFamily="34" charset="-120"/>
+              </a:rPr>
+              <a:t>Sources: ACS 2019–2023, AISD discipline reports, Travis County Juvenile Probation, BBBS Lone Star, Texas Demographic Center.</a:t>
+            </a:r>
+            <a:endParaRPr lang="en-US" sz="1000" dirty="0"/>
+          </a:p>
+        </p:txBody>
+      </p:sp>
+      <p:sp>
+        <p:nvSpPr>
+          <p:cNvPr id="30" name="Text 28"/>
+          <p:cNvSpPr/>
+          <p:nvPr/>
+        </p:nvSpPr>
+        <p:spPr>
+          <a:xfrm>
+            <a:off x="365760" y="6565392"/>
+            <a:ext cx="11457432" cy="228600"/>
+          </a:xfrm>
+          <a:prstGeom prst="rect">
+            <a:avLst/>
+          </a:prstGeom>
+          <a:noFill/>
+          <a:ln/>
+        </p:spPr>
+        <p:txBody>
+          <a:bodyPr wrap="square" rtlCol="0" anchor="ctr"/>
+          <a:lstStyle/>
+          <a:p>
+            <a:pPr indent="0" marL="0">
+              <a:buNone/>
+            </a:pPr>
+            <a:r>
+              <a:rPr lang="en-US" sz="900" dirty="0">
+                <a:solidFill>
+                  <a:srgbClr val="5A6470"/>
+                </a:solidFill>
+                <a:latin typeface="Calibri" pitchFamily="34" charset="0"/>
+                <a:ea typeface="Calibri" pitchFamily="34" charset="-122"/>
+                <a:cs typeface="Calibri" pitchFamily="34" charset="-120"/>
+              </a:rPr>
+              <a:t>TCAF · Austin · By the numbers · April 17, 2026</a:t>
+            </a:r>
+            <a:endParaRPr lang="en-US" sz="900" dirty="0"/>
+          </a:p>
+        </p:txBody>
+      </p:sp>
+    </p:spTree>
+  </p:cSld>
+  <p:clrMapOvr>
+    <a:masterClrMapping/>
+  </p:clrMapOvr>
+</p:sld>
+</file>
+
+<file path=ppt/slides/slide13.xml><?xml version="1.0" encoding="utf-8"?>
+<p:sld xmlns:a="http://schemas.openxmlformats.org/drawingml/2006/main" xmlns:r="http://schemas.openxmlformats.org/officeDocument/2006/relationships" xmlns:p="http://schemas.openxmlformats.org/presentationml/2006/main">
+  <p:cSld name="Slide 13">
+    <p:bg>
+      <p:bgPr>
+        <a:solidFill>
+          <a:srgbClr val="F7F2E7"/>
+        </a:solidFill>
+      </p:bgPr>
+    </p:bg>
+    <p:spTree>
+      <p:nvGrpSpPr>
+        <p:cNvPr id="1" name=""/>
+        <p:cNvGrpSpPr/>
+        <p:nvPr/>
+      </p:nvGrpSpPr>
+      <p:grpSpPr>
+        <a:xfrm>
+          <a:off x="0" y="0"/>
+          <a:ext cx="0" cy="0"/>
+          <a:chOff x="0" y="0"/>
+          <a:chExt cx="0" cy="0"/>
+        </a:xfrm>
+      </p:grpSpPr>
+      <p:sp>
+        <p:nvSpPr>
+          <p:cNvPr id="2" name="Shape 0"/>
+          <p:cNvSpPr/>
+          <p:nvPr/>
+        </p:nvSpPr>
+        <p:spPr>
+          <a:xfrm>
+            <a:off x="0" y="0"/>
+            <a:ext cx="12188952" cy="822960"/>
+          </a:xfrm>
+          <a:prstGeom prst="rect">
+            <a:avLst/>
+          </a:prstGeom>
+          <a:solidFill>
+            <a:srgbClr val="0B2545"/>
+          </a:solidFill>
+          <a:ln w="12700">
+            <a:solidFill>
+              <a:srgbClr val="0B2545"/>
+            </a:solidFill>
+            <a:prstDash val="solid"/>
+          </a:ln>
+        </p:spPr>
+      </p:sp>
+      <p:sp>
+        <p:nvSpPr>
+          <p:cNvPr id="3" name="Text 1"/>
+          <p:cNvSpPr/>
+          <p:nvPr/>
+        </p:nvSpPr>
+        <p:spPr>
+          <a:xfrm>
+            <a:off x="365760" y="109728"/>
+            <a:ext cx="11457432" cy="457200"/>
+          </a:xfrm>
+          <a:prstGeom prst="rect">
+            <a:avLst/>
+          </a:prstGeom>
+          <a:noFill/>
+          <a:ln/>
+        </p:spPr>
+        <p:txBody>
+          <a:bodyPr wrap="square" rtlCol="0" anchor="ctr"/>
+          <a:lstStyle/>
+          <a:p>
+            <a:pPr indent="0" marL="0">
+              <a:buNone/>
+            </a:pPr>
+            <a:r>
+              <a:rPr lang="en-US" sz="2400" b="1" dirty="0">
+                <a:solidFill>
+                  <a:srgbClr val="FFFFFF"/>
+                </a:solidFill>
+                <a:latin typeface="Calibri" pitchFamily="34" charset="0"/>
+                <a:ea typeface="Calibri" pitchFamily="34" charset="-122"/>
+                <a:cs typeface="Calibri" pitchFamily="34" charset="-120"/>
+              </a:rPr>
+              <a:t>Austin — who's already in the field</a:t>
+            </a:r>
+            <a:endParaRPr lang="en-US" sz="2400" dirty="0"/>
+          </a:p>
+        </p:txBody>
+      </p:sp>
+      <p:sp>
+        <p:nvSpPr>
+          <p:cNvPr id="4" name="Text 2"/>
+          <p:cNvSpPr/>
+          <p:nvPr/>
+        </p:nvSpPr>
+        <p:spPr>
+          <a:xfrm>
+            <a:off x="365760" y="457200"/>
+            <a:ext cx="11457432" cy="320040"/>
+          </a:xfrm>
+          <a:prstGeom prst="rect">
+            <a:avLst/>
+          </a:prstGeom>
+          <a:noFill/>
+          <a:ln/>
+        </p:spPr>
+        <p:txBody>
+          <a:bodyPr wrap="square" rtlCol="0" anchor="ctr"/>
+          <a:lstStyle/>
+          <a:p>
+            <a:pPr indent="0" marL="0">
+              <a:buNone/>
+            </a:pPr>
+            <a:r>
+              <a:rPr lang="en-US" sz="1200" i="1" dirty="0">
+                <a:solidFill>
+                  <a:srgbClr val="D4A24C"/>
+                </a:solidFill>
+                <a:latin typeface="Calibri" pitchFamily="34" charset="0"/>
+                <a:ea typeface="Calibri" pitchFamily="34" charset="-122"/>
+                <a:cs typeface="Calibri" pitchFamily="34" charset="-120"/>
+              </a:rPr>
               <a:t>Bigger ecosystem, more philanthropic capital, but coordination is fragmented.</a:t>
             </a:r>
             <a:endParaRPr lang="en-US" sz="1200" dirty="0"/>
@@ -7001,9 +7225,9 @@
 </p:sld>
 </file>
 
-<file path=ppt/slides/slide13.xml><?xml version="1.0" encoding="utf-8"?>
+<file path=ppt/slides/slide14.xml><?xml version="1.0" encoding="utf-8"?>
 <p:sld xmlns:a="http://schemas.openxmlformats.org/drawingml/2006/main" xmlns:r="http://schemas.openxmlformats.org/officeDocument/2006/relationships" xmlns:p="http://schemas.openxmlformats.org/presentationml/2006/main">
-  <p:cSld name="Slide 13">
+  <p:cSld name="Slide 14">
     <p:bg>
       <p:bgPr>
         <a:solidFill>
@@ -7125,328 +7349,6 @@
               <a:t>Two metros, one I-35 corridor, one shared playbook.</a:t>
             </a:r>
             <a:endParaRPr lang="en-US" sz="1800" dirty="0"/>
-          </a:p>
-        </p:txBody>
-      </p:sp>
-    </p:spTree>
-  </p:cSld>
-  <p:clrMapOvr>
-    <a:masterClrMapping/>
-  </p:clrMapOvr>
-</p:sld>
-</file>
-
-<file path=ppt/slides/slide14.xml><?xml version="1.0" encoding="utf-8"?>
-<p:sld xmlns:a="http://schemas.openxmlformats.org/drawingml/2006/main" xmlns:r="http://schemas.openxmlformats.org/officeDocument/2006/relationships" xmlns:p="http://schemas.openxmlformats.org/presentationml/2006/main">
-  <p:cSld name="Slide 14">
-    <p:bg>
-      <p:bgPr>
-        <a:solidFill>
-          <a:srgbClr val="F7F2E7"/>
-        </a:solidFill>
-      </p:bgPr>
-    </p:bg>
-    <p:spTree>
-      <p:nvGrpSpPr>
-        <p:cNvPr id="1" name=""/>
-        <p:cNvGrpSpPr/>
-        <p:nvPr/>
-      </p:nvGrpSpPr>
-      <p:grpSpPr>
-        <a:xfrm>
-          <a:off x="0" y="0"/>
-          <a:ext cx="0" cy="0"/>
-          <a:chOff x="0" y="0"/>
-          <a:chExt cx="0" cy="0"/>
-        </a:xfrm>
-      </p:grpSpPr>
-      <p:sp>
-        <p:nvSpPr>
-          <p:cNvPr id="2" name="Shape 0"/>
-          <p:cNvSpPr/>
-          <p:nvPr/>
-        </p:nvSpPr>
-        <p:spPr>
-          <a:xfrm>
-            <a:off x="0" y="0"/>
-            <a:ext cx="12188952" cy="822960"/>
-          </a:xfrm>
-          <a:prstGeom prst="rect">
-            <a:avLst/>
-          </a:prstGeom>
-          <a:solidFill>
-            <a:srgbClr val="0B2545"/>
-          </a:solidFill>
-          <a:ln w="12700">
-            <a:solidFill>
-              <a:srgbClr val="0B2545"/>
-            </a:solidFill>
-            <a:prstDash val="solid"/>
-          </a:ln>
-        </p:spPr>
-      </p:sp>
-      <p:sp>
-        <p:nvSpPr>
-          <p:cNvPr id="3" name="Text 1"/>
-          <p:cNvSpPr/>
-          <p:nvPr/>
-        </p:nvSpPr>
-        <p:spPr>
-          <a:xfrm>
-            <a:off x="365760" y="109728"/>
-            <a:ext cx="11457432" cy="457200"/>
-          </a:xfrm>
-          <a:prstGeom prst="rect">
-            <a:avLst/>
-          </a:prstGeom>
-          <a:noFill/>
-          <a:ln/>
-        </p:spPr>
-        <p:txBody>
-          <a:bodyPr wrap="square" rtlCol="0" anchor="ctr"/>
-          <a:lstStyle/>
-          <a:p>
-            <a:pPr indent="0" marL="0">
-              <a:buNone/>
-            </a:pPr>
-            <a:r>
-              <a:rPr lang="en-US" sz="2400" b="1" dirty="0">
-                <a:solidFill>
-                  <a:srgbClr val="FFFFFF"/>
-                </a:solidFill>
-                <a:latin typeface="Calibri" pitchFamily="34" charset="0"/>
-                <a:ea typeface="Calibri" pitchFamily="34" charset="-122"/>
-                <a:cs typeface="Calibri" pitchFamily="34" charset="-120"/>
-              </a:rPr>
-              <a:t>Symmetry — where Waco and Austin look identical</a:t>
-            </a:r>
-            <a:endParaRPr lang="en-US" sz="2400" dirty="0"/>
-          </a:p>
-        </p:txBody>
-      </p:sp>
-      <p:sp>
-        <p:nvSpPr>
-          <p:cNvPr id="4" name="Text 2"/>
-          <p:cNvSpPr/>
-          <p:nvPr/>
-        </p:nvSpPr>
-        <p:spPr>
-          <a:xfrm>
-            <a:off x="365760" y="457200"/>
-            <a:ext cx="11457432" cy="320040"/>
-          </a:xfrm>
-          <a:prstGeom prst="rect">
-            <a:avLst/>
-          </a:prstGeom>
-          <a:noFill/>
-          <a:ln/>
-        </p:spPr>
-        <p:txBody>
-          <a:bodyPr wrap="square" rtlCol="0" anchor="ctr"/>
-          <a:lstStyle/>
-          <a:p>
-            <a:pPr indent="0" marL="0">
-              <a:buNone/>
-            </a:pPr>
-            <a:r>
-              <a:rPr lang="en-US" sz="1200" i="1" dirty="0">
-                <a:solidFill>
-                  <a:srgbClr val="D4A24C"/>
-                </a:solidFill>
-                <a:latin typeface="Calibri" pitchFamily="34" charset="0"/>
-                <a:ea typeface="Calibri" pitchFamily="34" charset="-122"/>
-                <a:cs typeface="Calibri" pitchFamily="34" charset="-120"/>
-              </a:rPr>
-              <a:t>The mechanics of the pipeline don't care about metro size.</a:t>
-            </a:r>
-            <a:endParaRPr lang="en-US" sz="1200" dirty="0"/>
-          </a:p>
-        </p:txBody>
-      </p:sp>
-      <p:sp>
-        <p:nvSpPr>
-          <p:cNvPr id="5" name="Text 3"/>
-          <p:cNvSpPr/>
-          <p:nvPr/>
-        </p:nvSpPr>
-        <p:spPr>
-          <a:xfrm>
-            <a:off x="548640" y="1097280"/>
-            <a:ext cx="11091672" cy="5120640"/>
-          </a:xfrm>
-          <a:prstGeom prst="rect">
-            <a:avLst/>
-          </a:prstGeom>
-          <a:noFill/>
-          <a:ln/>
-        </p:spPr>
-        <p:txBody>
-          <a:bodyPr wrap="square" rtlCol="0" anchor="t"/>
-          <a:lstStyle/>
-          <a:p>
-            <a:pPr marL="342900" indent="-342900">
-              <a:spcAft>
-                <a:spcPts val="600"/>
-              </a:spcAft>
-              <a:buSzPct val="100000"/>
-              <a:buChar char="■"/>
-            </a:pPr>
-            <a:r>
-              <a:rPr lang="en-US" sz="1600" dirty="0">
-                <a:solidFill>
-                  <a:srgbClr val="1A1A1A"/>
-                </a:solidFill>
-                <a:latin typeface="Calibri" pitchFamily="34" charset="0"/>
-                <a:ea typeface="Calibri" pitchFamily="34" charset="-122"/>
-                <a:cs typeface="Calibri" pitchFamily="34" charset="-120"/>
-              </a:rPr>
-              <a:t>Same school-to-prison pipeline mechanics: Black students 3–3.5× more likely to be sent to DAEP / suspended than peers in both districts.</a:t>
-            </a:r>
-            <a:endParaRPr lang="en-US" sz="1600" dirty="0"/>
-          </a:p>
-          <a:p>
-            <a:pPr marL="342900" indent="-342900">
-              <a:spcAft>
-                <a:spcPts val="600"/>
-              </a:spcAft>
-              <a:buSzPct val="100000"/>
-              <a:buChar char="■"/>
-            </a:pPr>
-            <a:r>
-              <a:rPr lang="en-US" sz="1600" dirty="0">
-                <a:solidFill>
-                  <a:srgbClr val="1A1A1A"/>
-                </a:solidFill>
-                <a:latin typeface="Calibri" pitchFamily="34" charset="0"/>
-                <a:ea typeface="Calibri" pitchFamily="34" charset="-122"/>
-                <a:cs typeface="Calibri" pitchFamily="34" charset="-120"/>
-              </a:rPr>
-              <a:t>Same single-parent share: ~55–60% of Black children in both counties grow up without a residential father.</a:t>
-            </a:r>
-            <a:endParaRPr lang="en-US" sz="1600" dirty="0"/>
-          </a:p>
-          <a:p>
-            <a:pPr marL="342900" indent="-342900">
-              <a:spcAft>
-                <a:spcPts val="600"/>
-              </a:spcAft>
-              <a:buSzPct val="100000"/>
-              <a:buChar char="■"/>
-            </a:pPr>
-            <a:r>
-              <a:rPr lang="en-US" sz="1600" dirty="0">
-                <a:solidFill>
-                  <a:srgbClr val="1A1A1A"/>
-                </a:solidFill>
-                <a:latin typeface="Calibri" pitchFamily="34" charset="0"/>
-                <a:ea typeface="Calibri" pitchFamily="34" charset="-122"/>
-                <a:cs typeface="Calibri" pitchFamily="34" charset="-120"/>
-              </a:rPr>
-              <a:t>Same BBBS Black-male mentor crisis: boys wait ~2× as long as girls for a match in both chapters of the same network.</a:t>
-            </a:r>
-            <a:endParaRPr lang="en-US" sz="1600" dirty="0"/>
-          </a:p>
-          <a:p>
-            <a:pPr marL="342900" indent="-342900">
-              <a:spcAft>
-                <a:spcPts val="600"/>
-              </a:spcAft>
-              <a:buSzPct val="100000"/>
-              <a:buChar char="■"/>
-            </a:pPr>
-            <a:r>
-              <a:rPr lang="en-US" sz="1600" dirty="0">
-                <a:solidFill>
-                  <a:srgbClr val="1A1A1A"/>
-                </a:solidFill>
-                <a:latin typeface="Calibri" pitchFamily="34" charset="0"/>
-                <a:ea typeface="Calibri" pitchFamily="34" charset="-122"/>
-                <a:cs typeface="Calibri" pitchFamily="34" charset="-120"/>
-              </a:rPr>
-              <a:t>Same opportunity-youth ratio: Black 16–24 disconnection rate runs ~17–19% in both metros (vs ~11% overall).</a:t>
-            </a:r>
-            <a:endParaRPr lang="en-US" sz="1600" dirty="0"/>
-          </a:p>
-          <a:p>
-            <a:pPr marL="342900" indent="-342900">
-              <a:spcAft>
-                <a:spcPts val="600"/>
-              </a:spcAft>
-              <a:buSzPct val="100000"/>
-              <a:buChar char="■"/>
-            </a:pPr>
-            <a:r>
-              <a:rPr lang="en-US" sz="1600" dirty="0">
-                <a:solidFill>
-                  <a:srgbClr val="1A1A1A"/>
-                </a:solidFill>
-                <a:latin typeface="Calibri" pitchFamily="34" charset="0"/>
-                <a:ea typeface="Calibri" pitchFamily="34" charset="-122"/>
-                <a:cs typeface="Calibri" pitchFamily="34" charset="-120"/>
-              </a:rPr>
-              <a:t>Same SDOH stack in the historic Black ZIPs: food desert, transit gap, eviction concentration, life-expectancy gap of 8–12 years vs the wealthy ZIP.</a:t>
-            </a:r>
-            <a:endParaRPr lang="en-US" sz="1600" dirty="0"/>
-          </a:p>
-          <a:p>
-            <a:pPr marL="342900" indent="-342900">
-              <a:spcAft>
-                <a:spcPts val="600"/>
-              </a:spcAft>
-              <a:buSzPct val="100000"/>
-              <a:buChar char="■"/>
-            </a:pPr>
-            <a:r>
-              <a:rPr lang="en-US" sz="1600" dirty="0">
-                <a:solidFill>
-                  <a:srgbClr val="1A1A1A"/>
-                </a:solidFill>
-                <a:latin typeface="Calibri" pitchFamily="34" charset="0"/>
-                <a:ea typeface="Calibri" pitchFamily="34" charset="-122"/>
-                <a:cs typeface="Calibri" pitchFamily="34" charset="-120"/>
-              </a:rPr>
-              <a:t>Same federal/state funding pools: TX HHSC Fatherhood, TWC Workforce, HRSA RCORP, SAMHSA Statewide Family Network, DOJ OVW — all available to both.</a:t>
-            </a:r>
-            <a:endParaRPr lang="en-US" sz="1600" dirty="0"/>
-          </a:p>
-        </p:txBody>
-      </p:sp>
-      <p:sp>
-        <p:nvSpPr>
-          <p:cNvPr id="6" name="Text 4"/>
-          <p:cNvSpPr/>
-          <p:nvPr/>
-        </p:nvSpPr>
-        <p:spPr>
-          <a:xfrm>
-            <a:off x="365760" y="6565392"/>
-            <a:ext cx="11457432" cy="228600"/>
-          </a:xfrm>
-          <a:prstGeom prst="rect">
-            <a:avLst/>
-          </a:prstGeom>
-          <a:noFill/>
-          <a:ln/>
-        </p:spPr>
-        <p:txBody>
-          <a:bodyPr wrap="square" rtlCol="0" anchor="ctr"/>
-          <a:lstStyle/>
-          <a:p>
-            <a:pPr indent="0" marL="0">
-              <a:buNone/>
-            </a:pPr>
-            <a:r>
-              <a:rPr lang="en-US" sz="900" dirty="0">
-                <a:solidFill>
-                  <a:srgbClr val="5A6470"/>
-                </a:solidFill>
-                <a:latin typeface="Calibri" pitchFamily="34" charset="0"/>
-                <a:ea typeface="Calibri" pitchFamily="34" charset="-122"/>
-                <a:cs typeface="Calibri" pitchFamily="34" charset="-120"/>
-              </a:rPr>
-              <a:t>TCAF · Comparison · Symmetry · April 17, 2026</a:t>
-            </a:r>
-            <a:endParaRPr lang="en-US" sz="900" dirty="0"/>
           </a:p>
         </p:txBody>
       </p:sp>
@@ -7540,7 +7442,7 @@
                 <a:ea typeface="Calibri" pitchFamily="34" charset="-122"/>
                 <a:cs typeface="Calibri" pitchFamily="34" charset="-120"/>
               </a:rPr>
-              <a:t>Alignment — where the two ecosystems already meet</a:t>
+              <a:t>Symmetry — where Waco and Austin look identical</a:t>
             </a:r>
             <a:endParaRPr lang="en-US" sz="2400" dirty="0"/>
           </a:p>
@@ -7579,6 +7481,328 @@
                 <a:ea typeface="Calibri" pitchFamily="34" charset="-122"/>
                 <a:cs typeface="Calibri" pitchFamily="34" charset="-120"/>
               </a:rPr>
+              <a:t>The mechanics of the pipeline don't care about metro size.</a:t>
+            </a:r>
+            <a:endParaRPr lang="en-US" sz="1200" dirty="0"/>
+          </a:p>
+        </p:txBody>
+      </p:sp>
+      <p:sp>
+        <p:nvSpPr>
+          <p:cNvPr id="5" name="Text 3"/>
+          <p:cNvSpPr/>
+          <p:nvPr/>
+        </p:nvSpPr>
+        <p:spPr>
+          <a:xfrm>
+            <a:off x="548640" y="1097280"/>
+            <a:ext cx="11091672" cy="5120640"/>
+          </a:xfrm>
+          <a:prstGeom prst="rect">
+            <a:avLst/>
+          </a:prstGeom>
+          <a:noFill/>
+          <a:ln/>
+        </p:spPr>
+        <p:txBody>
+          <a:bodyPr wrap="square" rtlCol="0" anchor="t"/>
+          <a:lstStyle/>
+          <a:p>
+            <a:pPr marL="342900" indent="-342900">
+              <a:spcAft>
+                <a:spcPts val="600"/>
+              </a:spcAft>
+              <a:buSzPct val="100000"/>
+              <a:buChar char="■"/>
+            </a:pPr>
+            <a:r>
+              <a:rPr lang="en-US" sz="1600" dirty="0">
+                <a:solidFill>
+                  <a:srgbClr val="1A1A1A"/>
+                </a:solidFill>
+                <a:latin typeface="Calibri" pitchFamily="34" charset="0"/>
+                <a:ea typeface="Calibri" pitchFamily="34" charset="-122"/>
+                <a:cs typeface="Calibri" pitchFamily="34" charset="-120"/>
+              </a:rPr>
+              <a:t>Same school-to-prison pipeline mechanics: Black students 3–3.5× more likely to be sent to DAEP / suspended than peers in both districts.</a:t>
+            </a:r>
+            <a:endParaRPr lang="en-US" sz="1600" dirty="0"/>
+          </a:p>
+          <a:p>
+            <a:pPr marL="342900" indent="-342900">
+              <a:spcAft>
+                <a:spcPts val="600"/>
+              </a:spcAft>
+              <a:buSzPct val="100000"/>
+              <a:buChar char="■"/>
+            </a:pPr>
+            <a:r>
+              <a:rPr lang="en-US" sz="1600" dirty="0">
+                <a:solidFill>
+                  <a:srgbClr val="1A1A1A"/>
+                </a:solidFill>
+                <a:latin typeface="Calibri" pitchFamily="34" charset="0"/>
+                <a:ea typeface="Calibri" pitchFamily="34" charset="-122"/>
+                <a:cs typeface="Calibri" pitchFamily="34" charset="-120"/>
+              </a:rPr>
+              <a:t>Same single-parent share: ~55–60% of Black children in both counties grow up without a residential father.</a:t>
+            </a:r>
+            <a:endParaRPr lang="en-US" sz="1600" dirty="0"/>
+          </a:p>
+          <a:p>
+            <a:pPr marL="342900" indent="-342900">
+              <a:spcAft>
+                <a:spcPts val="600"/>
+              </a:spcAft>
+              <a:buSzPct val="100000"/>
+              <a:buChar char="■"/>
+            </a:pPr>
+            <a:r>
+              <a:rPr lang="en-US" sz="1600" dirty="0">
+                <a:solidFill>
+                  <a:srgbClr val="1A1A1A"/>
+                </a:solidFill>
+                <a:latin typeface="Calibri" pitchFamily="34" charset="0"/>
+                <a:ea typeface="Calibri" pitchFamily="34" charset="-122"/>
+                <a:cs typeface="Calibri" pitchFamily="34" charset="-120"/>
+              </a:rPr>
+              <a:t>Same BBBS Black-male mentor crisis: boys wait ~2× as long as girls for a match in both chapters of the same network.</a:t>
+            </a:r>
+            <a:endParaRPr lang="en-US" sz="1600" dirty="0"/>
+          </a:p>
+          <a:p>
+            <a:pPr marL="342900" indent="-342900">
+              <a:spcAft>
+                <a:spcPts val="600"/>
+              </a:spcAft>
+              <a:buSzPct val="100000"/>
+              <a:buChar char="■"/>
+            </a:pPr>
+            <a:r>
+              <a:rPr lang="en-US" sz="1600" dirty="0">
+                <a:solidFill>
+                  <a:srgbClr val="1A1A1A"/>
+                </a:solidFill>
+                <a:latin typeface="Calibri" pitchFamily="34" charset="0"/>
+                <a:ea typeface="Calibri" pitchFamily="34" charset="-122"/>
+                <a:cs typeface="Calibri" pitchFamily="34" charset="-120"/>
+              </a:rPr>
+              <a:t>Same opportunity-youth ratio: Black 16–24 disconnection rate runs ~17–19% in both metros (vs ~11% overall).</a:t>
+            </a:r>
+            <a:endParaRPr lang="en-US" sz="1600" dirty="0"/>
+          </a:p>
+          <a:p>
+            <a:pPr marL="342900" indent="-342900">
+              <a:spcAft>
+                <a:spcPts val="600"/>
+              </a:spcAft>
+              <a:buSzPct val="100000"/>
+              <a:buChar char="■"/>
+            </a:pPr>
+            <a:r>
+              <a:rPr lang="en-US" sz="1600" dirty="0">
+                <a:solidFill>
+                  <a:srgbClr val="1A1A1A"/>
+                </a:solidFill>
+                <a:latin typeface="Calibri" pitchFamily="34" charset="0"/>
+                <a:ea typeface="Calibri" pitchFamily="34" charset="-122"/>
+                <a:cs typeface="Calibri" pitchFamily="34" charset="-120"/>
+              </a:rPr>
+              <a:t>Same SDOH stack in the historic Black ZIPs: food desert, transit gap, eviction concentration, life-expectancy gap of 8–12 years vs the wealthy ZIP.</a:t>
+            </a:r>
+            <a:endParaRPr lang="en-US" sz="1600" dirty="0"/>
+          </a:p>
+          <a:p>
+            <a:pPr marL="342900" indent="-342900">
+              <a:spcAft>
+                <a:spcPts val="600"/>
+              </a:spcAft>
+              <a:buSzPct val="100000"/>
+              <a:buChar char="■"/>
+            </a:pPr>
+            <a:r>
+              <a:rPr lang="en-US" sz="1600" dirty="0">
+                <a:solidFill>
+                  <a:srgbClr val="1A1A1A"/>
+                </a:solidFill>
+                <a:latin typeface="Calibri" pitchFamily="34" charset="0"/>
+                <a:ea typeface="Calibri" pitchFamily="34" charset="-122"/>
+                <a:cs typeface="Calibri" pitchFamily="34" charset="-120"/>
+              </a:rPr>
+              <a:t>Same federal/state funding pools: TX HHSC Fatherhood, TWC Workforce, HRSA RCORP, SAMHSA Statewide Family Network, DOJ OVW — all available to both.</a:t>
+            </a:r>
+            <a:endParaRPr lang="en-US" sz="1600" dirty="0"/>
+          </a:p>
+        </p:txBody>
+      </p:sp>
+      <p:sp>
+        <p:nvSpPr>
+          <p:cNvPr id="6" name="Text 4"/>
+          <p:cNvSpPr/>
+          <p:nvPr/>
+        </p:nvSpPr>
+        <p:spPr>
+          <a:xfrm>
+            <a:off x="365760" y="6565392"/>
+            <a:ext cx="11457432" cy="228600"/>
+          </a:xfrm>
+          <a:prstGeom prst="rect">
+            <a:avLst/>
+          </a:prstGeom>
+          <a:noFill/>
+          <a:ln/>
+        </p:spPr>
+        <p:txBody>
+          <a:bodyPr wrap="square" rtlCol="0" anchor="ctr"/>
+          <a:lstStyle/>
+          <a:p>
+            <a:pPr indent="0" marL="0">
+              <a:buNone/>
+            </a:pPr>
+            <a:r>
+              <a:rPr lang="en-US" sz="900" dirty="0">
+                <a:solidFill>
+                  <a:srgbClr val="5A6470"/>
+                </a:solidFill>
+                <a:latin typeface="Calibri" pitchFamily="34" charset="0"/>
+                <a:ea typeface="Calibri" pitchFamily="34" charset="-122"/>
+                <a:cs typeface="Calibri" pitchFamily="34" charset="-120"/>
+              </a:rPr>
+              <a:t>TCAF · Comparison · Symmetry · April 17, 2026</a:t>
+            </a:r>
+            <a:endParaRPr lang="en-US" sz="900" dirty="0"/>
+          </a:p>
+        </p:txBody>
+      </p:sp>
+    </p:spTree>
+  </p:cSld>
+  <p:clrMapOvr>
+    <a:masterClrMapping/>
+  </p:clrMapOvr>
+</p:sld>
+</file>
+
+<file path=ppt/slides/slide16.xml><?xml version="1.0" encoding="utf-8"?>
+<p:sld xmlns:a="http://schemas.openxmlformats.org/drawingml/2006/main" xmlns:r="http://schemas.openxmlformats.org/officeDocument/2006/relationships" xmlns:p="http://schemas.openxmlformats.org/presentationml/2006/main">
+  <p:cSld name="Slide 16">
+    <p:bg>
+      <p:bgPr>
+        <a:solidFill>
+          <a:srgbClr val="F7F2E7"/>
+        </a:solidFill>
+      </p:bgPr>
+    </p:bg>
+    <p:spTree>
+      <p:nvGrpSpPr>
+        <p:cNvPr id="1" name=""/>
+        <p:cNvGrpSpPr/>
+        <p:nvPr/>
+      </p:nvGrpSpPr>
+      <p:grpSpPr>
+        <a:xfrm>
+          <a:off x="0" y="0"/>
+          <a:ext cx="0" cy="0"/>
+          <a:chOff x="0" y="0"/>
+          <a:chExt cx="0" cy="0"/>
+        </a:xfrm>
+      </p:grpSpPr>
+      <p:sp>
+        <p:nvSpPr>
+          <p:cNvPr id="2" name="Shape 0"/>
+          <p:cNvSpPr/>
+          <p:nvPr/>
+        </p:nvSpPr>
+        <p:spPr>
+          <a:xfrm>
+            <a:off x="0" y="0"/>
+            <a:ext cx="12188952" cy="822960"/>
+          </a:xfrm>
+          <a:prstGeom prst="rect">
+            <a:avLst/>
+          </a:prstGeom>
+          <a:solidFill>
+            <a:srgbClr val="0B2545"/>
+          </a:solidFill>
+          <a:ln w="12700">
+            <a:solidFill>
+              <a:srgbClr val="0B2545"/>
+            </a:solidFill>
+            <a:prstDash val="solid"/>
+          </a:ln>
+        </p:spPr>
+      </p:sp>
+      <p:sp>
+        <p:nvSpPr>
+          <p:cNvPr id="3" name="Text 1"/>
+          <p:cNvSpPr/>
+          <p:nvPr/>
+        </p:nvSpPr>
+        <p:spPr>
+          <a:xfrm>
+            <a:off x="365760" y="109728"/>
+            <a:ext cx="11457432" cy="457200"/>
+          </a:xfrm>
+          <a:prstGeom prst="rect">
+            <a:avLst/>
+          </a:prstGeom>
+          <a:noFill/>
+          <a:ln/>
+        </p:spPr>
+        <p:txBody>
+          <a:bodyPr wrap="square" rtlCol="0" anchor="ctr"/>
+          <a:lstStyle/>
+          <a:p>
+            <a:pPr indent="0" marL="0">
+              <a:buNone/>
+            </a:pPr>
+            <a:r>
+              <a:rPr lang="en-US" sz="2400" b="1" dirty="0">
+                <a:solidFill>
+                  <a:srgbClr val="FFFFFF"/>
+                </a:solidFill>
+                <a:latin typeface="Calibri" pitchFamily="34" charset="0"/>
+                <a:ea typeface="Calibri" pitchFamily="34" charset="-122"/>
+                <a:cs typeface="Calibri" pitchFamily="34" charset="-120"/>
+              </a:rPr>
+              <a:t>Alignment — where the two ecosystems already meet</a:t>
+            </a:r>
+            <a:endParaRPr lang="en-US" sz="2400" dirty="0"/>
+          </a:p>
+        </p:txBody>
+      </p:sp>
+      <p:sp>
+        <p:nvSpPr>
+          <p:cNvPr id="4" name="Text 2"/>
+          <p:cNvSpPr/>
+          <p:nvPr/>
+        </p:nvSpPr>
+        <p:spPr>
+          <a:xfrm>
+            <a:off x="365760" y="457200"/>
+            <a:ext cx="11457432" cy="320040"/>
+          </a:xfrm>
+          <a:prstGeom prst="rect">
+            <a:avLst/>
+          </a:prstGeom>
+          <a:noFill/>
+          <a:ln/>
+        </p:spPr>
+        <p:txBody>
+          <a:bodyPr wrap="square" rtlCol="0" anchor="ctr"/>
+          <a:lstStyle/>
+          <a:p>
+            <a:pPr indent="0" marL="0">
+              <a:buNone/>
+            </a:pPr>
+            <a:r>
+              <a:rPr lang="en-US" sz="1200" i="1" dirty="0">
+                <a:solidFill>
+                  <a:srgbClr val="D4A24C"/>
+                </a:solidFill>
+                <a:latin typeface="Calibri" pitchFamily="34" charset="0"/>
+                <a:ea typeface="Calibri" pitchFamily="34" charset="-122"/>
+                <a:cs typeface="Calibri" pitchFamily="34" charset="-120"/>
+              </a:rPr>
               <a:t>We don't have to build the bridges. We have to activate them.</a:t>
             </a:r>
             <a:endParaRPr lang="en-US" sz="1200" dirty="0"/>
@@ -7587,7 +7811,7 @@
       </p:sp>
       <p:graphicFrame>
         <p:nvGraphicFramePr>
-          <p:cNvPr id="16" name="Table 0"/>
+          <p:cNvPr id="17" name="Table 0"/>
           <p:cNvGraphicFramePr>
             <a:graphicFrameLocks noGrp="1"/>
           </p:cNvGraphicFramePr>
@@ -9856,9 +10080,9 @@
 </p:sld>
 </file>
 
-<file path=ppt/slides/slide16.xml><?xml version="1.0" encoding="utf-8"?>
+<file path=ppt/slides/slide17.xml><?xml version="1.0" encoding="utf-8"?>
 <p:sld xmlns:a="http://schemas.openxmlformats.org/drawingml/2006/main" xmlns:r="http://schemas.openxmlformats.org/officeDocument/2006/relationships" xmlns:p="http://schemas.openxmlformats.org/presentationml/2006/main">
-  <p:cSld name="Slide 16">
+  <p:cSld name="Slide 17">
     <p:bg>
       <p:bgPr>
         <a:solidFill>
@@ -10178,9 +10402,9 @@
 </p:sld>
 </file>
 
-<file path=ppt/slides/slide17.xml><?xml version="1.0" encoding="utf-8"?>
+<file path=ppt/slides/slide18.xml><?xml version="1.0" encoding="utf-8"?>
 <p:sld xmlns:a="http://schemas.openxmlformats.org/drawingml/2006/main" xmlns:r="http://schemas.openxmlformats.org/officeDocument/2006/relationships" xmlns:p="http://schemas.openxmlformats.org/presentationml/2006/main">
-  <p:cSld name="Slide 17">
+  <p:cSld name="Slide 18">
     <p:bg>
       <p:bgPr>
         <a:solidFill>
@@ -10313,9 +10537,9 @@
 </p:sld>
 </file>
 
-<file path=ppt/slides/slide18.xml><?xml version="1.0" encoding="utf-8"?>
+<file path=ppt/slides/slide19.xml><?xml version="1.0" encoding="utf-8"?>
 <p:sld xmlns:a="http://schemas.openxmlformats.org/drawingml/2006/main" xmlns:r="http://schemas.openxmlformats.org/officeDocument/2006/relationships" xmlns:p="http://schemas.openxmlformats.org/presentationml/2006/main">
-  <p:cSld name="Slide 18">
+  <p:cSld name="Slide 19">
     <p:bg>
       <p:bgPr>
         <a:solidFill>
@@ -10442,7 +10666,7 @@
       </p:sp>
       <p:graphicFrame>
         <p:nvGraphicFramePr>
-          <p:cNvPr id="19" name="Table 0"/>
+          <p:cNvPr id="20" name="Table 0"/>
           <p:cNvGraphicFramePr>
             <a:graphicFrameLocks noGrp="1"/>
           </p:cNvGraphicFramePr>
@@ -11754,328 +11978,6 @@
 </p:sld>
 </file>
 
-<file path=ppt/slides/slide19.xml><?xml version="1.0" encoding="utf-8"?>
-<p:sld xmlns:a="http://schemas.openxmlformats.org/drawingml/2006/main" xmlns:r="http://schemas.openxmlformats.org/officeDocument/2006/relationships" xmlns:p="http://schemas.openxmlformats.org/presentationml/2006/main">
-  <p:cSld name="Slide 19">
-    <p:bg>
-      <p:bgPr>
-        <a:solidFill>
-          <a:srgbClr val="F7F2E7"/>
-        </a:solidFill>
-      </p:bgPr>
-    </p:bg>
-    <p:spTree>
-      <p:nvGrpSpPr>
-        <p:cNvPr id="1" name=""/>
-        <p:cNvGrpSpPr/>
-        <p:nvPr/>
-      </p:nvGrpSpPr>
-      <p:grpSpPr>
-        <a:xfrm>
-          <a:off x="0" y="0"/>
-          <a:ext cx="0" cy="0"/>
-          <a:chOff x="0" y="0"/>
-          <a:chExt cx="0" cy="0"/>
-        </a:xfrm>
-      </p:grpSpPr>
-      <p:sp>
-        <p:nvSpPr>
-          <p:cNvPr id="2" name="Shape 0"/>
-          <p:cNvSpPr/>
-          <p:nvPr/>
-        </p:nvSpPr>
-        <p:spPr>
-          <a:xfrm>
-            <a:off x="0" y="0"/>
-            <a:ext cx="12188952" cy="822960"/>
-          </a:xfrm>
-          <a:prstGeom prst="rect">
-            <a:avLst/>
-          </a:prstGeom>
-          <a:solidFill>
-            <a:srgbClr val="0B2545"/>
-          </a:solidFill>
-          <a:ln w="12700">
-            <a:solidFill>
-              <a:srgbClr val="0B2545"/>
-            </a:solidFill>
-            <a:prstDash val="solid"/>
-          </a:ln>
-        </p:spPr>
-      </p:sp>
-      <p:sp>
-        <p:nvSpPr>
-          <p:cNvPr id="3" name="Text 1"/>
-          <p:cNvSpPr/>
-          <p:nvPr/>
-        </p:nvSpPr>
-        <p:spPr>
-          <a:xfrm>
-            <a:off x="365760" y="109728"/>
-            <a:ext cx="11457432" cy="457200"/>
-          </a:xfrm>
-          <a:prstGeom prst="rect">
-            <a:avLst/>
-          </a:prstGeom>
-          <a:noFill/>
-          <a:ln/>
-        </p:spPr>
-        <p:txBody>
-          <a:bodyPr wrap="square" rtlCol="0" anchor="ctr"/>
-          <a:lstStyle/>
-          <a:p>
-            <a:pPr indent="0" marL="0">
-              <a:buNone/>
-            </a:pPr>
-            <a:r>
-              <a:rPr lang="en-US" sz="2400" b="1" dirty="0">
-                <a:solidFill>
-                  <a:srgbClr val="FFFFFF"/>
-                </a:solidFill>
-                <a:latin typeface="Calibri" pitchFamily="34" charset="0"/>
-                <a:ea typeface="Calibri" pitchFamily="34" charset="-122"/>
-                <a:cs typeface="Calibri" pitchFamily="34" charset="-120"/>
-              </a:rPr>
-              <a:t>RPLICE — the real-time bus that connects every partner</a:t>
-            </a:r>
-            <a:endParaRPr lang="en-US" sz="2400" dirty="0"/>
-          </a:p>
-        </p:txBody>
-      </p:sp>
-      <p:sp>
-        <p:nvSpPr>
-          <p:cNvPr id="4" name="Text 2"/>
-          <p:cNvSpPr/>
-          <p:nvPr/>
-        </p:nvSpPr>
-        <p:spPr>
-          <a:xfrm>
-            <a:off x="365760" y="457200"/>
-            <a:ext cx="11457432" cy="320040"/>
-          </a:xfrm>
-          <a:prstGeom prst="rect">
-            <a:avLst/>
-          </a:prstGeom>
-          <a:noFill/>
-          <a:ln/>
-        </p:spPr>
-        <p:txBody>
-          <a:bodyPr wrap="square" rtlCol="0" anchor="ctr"/>
-          <a:lstStyle/>
-          <a:p>
-            <a:pPr indent="0" marL="0">
-              <a:buNone/>
-            </a:pPr>
-            <a:r>
-              <a:rPr lang="en-US" sz="1200" i="1" dirty="0">
-                <a:solidFill>
-                  <a:srgbClr val="D4A24C"/>
-                </a:solidFill>
-                <a:latin typeface="Calibri" pitchFamily="34" charset="0"/>
-                <a:ea typeface="Calibri" pitchFamily="34" charset="-122"/>
-                <a:cs typeface="Calibri" pitchFamily="34" charset="-120"/>
-              </a:rPr>
-              <a:t>The coordination layer Austin's fragmented ecosystem has been waiting for.</a:t>
-            </a:r>
-            <a:endParaRPr lang="en-US" sz="1200" dirty="0"/>
-          </a:p>
-        </p:txBody>
-      </p:sp>
-      <p:sp>
-        <p:nvSpPr>
-          <p:cNvPr id="5" name="Text 3"/>
-          <p:cNvSpPr/>
-          <p:nvPr/>
-        </p:nvSpPr>
-        <p:spPr>
-          <a:xfrm>
-            <a:off x="548640" y="1097280"/>
-            <a:ext cx="11091672" cy="5120640"/>
-          </a:xfrm>
-          <a:prstGeom prst="rect">
-            <a:avLst/>
-          </a:prstGeom>
-          <a:noFill/>
-          <a:ln/>
-        </p:spPr>
-        <p:txBody>
-          <a:bodyPr wrap="square" rtlCol="0" anchor="t"/>
-          <a:lstStyle/>
-          <a:p>
-            <a:pPr marL="342900" indent="-342900">
-              <a:spcAft>
-                <a:spcPts val="600"/>
-              </a:spcAft>
-              <a:buSzPct val="100000"/>
-              <a:buChar char="■"/>
-            </a:pPr>
-            <a:r>
-              <a:rPr lang="en-US" sz="1600" dirty="0">
-                <a:solidFill>
-                  <a:srgbClr val="1A1A1A"/>
-                </a:solidFill>
-                <a:latin typeface="Calibri" pitchFamily="34" charset="0"/>
-                <a:ea typeface="Calibri" pitchFamily="34" charset="-122"/>
-                <a:cs typeface="Calibri" pitchFamily="34" charset="-120"/>
-              </a:rPr>
-              <a:t>RPLICE = Real-time Population Linkage and Information Coordination Engine — TCAF's event bus.</a:t>
-            </a:r>
-            <a:endParaRPr lang="en-US" sz="1600" dirty="0"/>
-          </a:p>
-          <a:p>
-            <a:pPr marL="342900" indent="-342900">
-              <a:spcAft>
-                <a:spcPts val="600"/>
-              </a:spcAft>
-              <a:buSzPct val="100000"/>
-              <a:buChar char="■"/>
-            </a:pPr>
-            <a:r>
-              <a:rPr lang="en-US" sz="1600" dirty="0">
-                <a:solidFill>
-                  <a:srgbClr val="1A1A1A"/>
-                </a:solidFill>
-                <a:latin typeface="Calibri" pitchFamily="34" charset="0"/>
-                <a:ea typeface="Calibri" pitchFamily="34" charset="-122"/>
-                <a:cs typeface="Calibri" pitchFamily="34" charset="-120"/>
-              </a:rPr>
-              <a:t>Every partner emits events: 'youth.flagged', 'mentor.matched', 'family.enrolled', 'father.engaged', 'crisis.triaged', 'outcome.achieved'.</a:t>
-            </a:r>
-            <a:endParaRPr lang="en-US" sz="1600" dirty="0"/>
-          </a:p>
-          <a:p>
-            <a:pPr marL="342900" indent="-342900">
-              <a:spcAft>
-                <a:spcPts val="600"/>
-              </a:spcAft>
-              <a:buSzPct val="100000"/>
-              <a:buChar char="■"/>
-            </a:pPr>
-            <a:r>
-              <a:rPr lang="en-US" sz="1600" dirty="0">
-                <a:solidFill>
-                  <a:srgbClr val="1A1A1A"/>
-                </a:solidFill>
-                <a:latin typeface="Calibri" pitchFamily="34" charset="0"/>
-                <a:ea typeface="Calibri" pitchFamily="34" charset="-122"/>
-                <a:cs typeface="Calibri" pitchFamily="34" charset="-120"/>
-              </a:rPr>
-              <a:t>Subscribed partners receive only what they're authorized to see — privacy-preserving by design (FERPA, HIPAA, 42 CFR Part 2 aware).</a:t>
-            </a:r>
-            <a:endParaRPr lang="en-US" sz="1600" dirty="0"/>
-          </a:p>
-          <a:p>
-            <a:pPr marL="342900" indent="-342900">
-              <a:spcAft>
-                <a:spcPts val="600"/>
-              </a:spcAft>
-              <a:buSzPct val="100000"/>
-              <a:buChar char="■"/>
-            </a:pPr>
-            <a:r>
-              <a:rPr lang="en-US" sz="1600" dirty="0">
-                <a:solidFill>
-                  <a:srgbClr val="1A1A1A"/>
-                </a:solidFill>
-                <a:latin typeface="Calibri" pitchFamily="34" charset="0"/>
-                <a:ea typeface="Calibri" pitchFamily="34" charset="-122"/>
-                <a:cs typeface="Calibri" pitchFamily="34" charset="-120"/>
-              </a:rPr>
-              <a:t>STARRY in Waco and AAUL in Austin can see the same boy's mentor match in real time — no 90-day intake delay.</a:t>
-            </a:r>
-            <a:endParaRPr lang="en-US" sz="1600" dirty="0"/>
-          </a:p>
-          <a:p>
-            <a:pPr marL="342900" indent="-342900">
-              <a:spcAft>
-                <a:spcPts val="600"/>
-              </a:spcAft>
-              <a:buSzPct val="100000"/>
-              <a:buChar char="■"/>
-            </a:pPr>
-            <a:r>
-              <a:rPr lang="en-US" sz="1600" dirty="0">
-                <a:solidFill>
-                  <a:srgbClr val="1A1A1A"/>
-                </a:solidFill>
-                <a:latin typeface="Calibri" pitchFamily="34" charset="0"/>
-                <a:ea typeface="Calibri" pitchFamily="34" charset="-122"/>
-                <a:cs typeface="Calibri" pitchFamily="34" charset="-120"/>
-              </a:rPr>
-              <a:t>Funders (United Way, St. David's, Cooper, Dell) get a unified outcomes dashboard across all grantees instead of 12 different PDFs.</a:t>
-            </a:r>
-            <a:endParaRPr lang="en-US" sz="1600" dirty="0"/>
-          </a:p>
-          <a:p>
-            <a:pPr marL="342900" indent="-342900">
-              <a:spcAft>
-                <a:spcPts val="600"/>
-              </a:spcAft>
-              <a:buSzPct val="100000"/>
-              <a:buChar char="■"/>
-            </a:pPr>
-            <a:r>
-              <a:rPr lang="en-US" sz="1600" dirty="0">
-                <a:solidFill>
-                  <a:srgbClr val="1A1A1A"/>
-                </a:solidFill>
-                <a:latin typeface="Calibri" pitchFamily="34" charset="0"/>
-                <a:ea typeface="Calibri" pitchFamily="34" charset="-122"/>
-                <a:cs typeface="Calibri" pitchFamily="34" charset="-120"/>
-              </a:rPr>
-              <a:t>We've already shipped /api/rplice/sync (handshake + batch + peer-network mirror) — it's live and ready to onboard partners today.</a:t>
-            </a:r>
-            <a:endParaRPr lang="en-US" sz="1600" dirty="0"/>
-          </a:p>
-        </p:txBody>
-      </p:sp>
-      <p:sp>
-        <p:nvSpPr>
-          <p:cNvPr id="6" name="Text 4"/>
-          <p:cNvSpPr/>
-          <p:nvPr/>
-        </p:nvSpPr>
-        <p:spPr>
-          <a:xfrm>
-            <a:off x="365760" y="6565392"/>
-            <a:ext cx="11457432" cy="228600"/>
-          </a:xfrm>
-          <a:prstGeom prst="rect">
-            <a:avLst/>
-          </a:prstGeom>
-          <a:noFill/>
-          <a:ln/>
-        </p:spPr>
-        <p:txBody>
-          <a:bodyPr wrap="square" rtlCol="0" anchor="ctr"/>
-          <a:lstStyle/>
-          <a:p>
-            <a:pPr indent="0" marL="0">
-              <a:buNone/>
-            </a:pPr>
-            <a:r>
-              <a:rPr lang="en-US" sz="900" dirty="0">
-                <a:solidFill>
-                  <a:srgbClr val="5A6470"/>
-                </a:solidFill>
-                <a:latin typeface="Calibri" pitchFamily="34" charset="0"/>
-                <a:ea typeface="Calibri" pitchFamily="34" charset="-122"/>
-                <a:cs typeface="Calibri" pitchFamily="34" charset="-120"/>
-              </a:rPr>
-              <a:t>TCAF · Solution · RPLICE · April 17, 2026</a:t>
-            </a:r>
-            <a:endParaRPr lang="en-US" sz="900" dirty="0"/>
-          </a:p>
-        </p:txBody>
-      </p:sp>
-    </p:spTree>
-  </p:cSld>
-  <p:clrMapOvr>
-    <a:masterClrMapping/>
-  </p:clrMapOvr>
-</p:sld>
-</file>
-
 <file path=ppt/slides/slide2.xml><?xml version="1.0" encoding="utf-8"?>
 <p:sld xmlns:a="http://schemas.openxmlformats.org/drawingml/2006/main" xmlns:r="http://schemas.openxmlformats.org/officeDocument/2006/relationships" xmlns:p="http://schemas.openxmlformats.org/presentationml/2006/main">
   <p:cSld name="Slide 2">
@@ -12158,7 +12060,7 @@
                 <a:ea typeface="Calibri" pitchFamily="34" charset="-122"/>
                 <a:cs typeface="Calibri" pitchFamily="34" charset="-120"/>
               </a:rPr>
-              <a:t>Why this picture matters now</a:t>
+              <a:t>Live data snapshot</a:t>
             </a:r>
             <a:endParaRPr lang="en-US" sz="2400" dirty="0"/>
           </a:p>
@@ -12197,7 +12099,7 @@
                 <a:ea typeface="Calibri" pitchFamily="34" charset="-122"/>
                 <a:cs typeface="Calibri" pitchFamily="34" charset="-120"/>
               </a:rPr>
-              <a:t>Three fatherless boys in 76704 today are next year's headlines if no one intervenes.</a:t>
+              <a:t>Pulled from /api/corridor/story · 2026-04-17</a:t>
             </a:r>
             <a:endParaRPr lang="en-US" sz="1200" dirty="0"/>
           </a:p>
@@ -12211,8 +12113,8 @@
         </p:nvSpPr>
         <p:spPr>
           <a:xfrm>
-            <a:off x="548640" y="1097280"/>
-            <a:ext cx="11091672" cy="5120640"/>
+            <a:off x="365760" y="914400"/>
+            <a:ext cx="5486400" cy="365760"/>
           </a:xfrm>
           <a:prstGeom prst="rect">
             <a:avLst/>
@@ -12221,18 +12123,57 @@
           <a:ln/>
         </p:spPr>
         <p:txBody>
-          <a:bodyPr wrap="square" rtlCol="0" anchor="t"/>
+          <a:bodyPr wrap="square" rtlCol="0" anchor="ctr"/>
+          <a:lstStyle/>
+          <a:p>
+            <a:pPr indent="0" marL="0">
+              <a:buNone/>
+            </a:pPr>
+            <a:r>
+              <a:rPr lang="en-US" sz="1400" b="1" dirty="0">
+                <a:solidFill>
+                  <a:srgbClr val="9B1C2E"/>
+                </a:solidFill>
+                <a:latin typeface="Calibri" pitchFamily="34" charset="0"/>
+                <a:ea typeface="Calibri" pitchFamily="34" charset="-122"/>
+                <a:cs typeface="Calibri" pitchFamily="34" charset="-120"/>
+              </a:rPr>
+              <a:t>WACO / MCLENNAN — LIVE</a:t>
+            </a:r>
+            <a:endParaRPr lang="en-US" sz="1400" dirty="0"/>
+          </a:p>
+        </p:txBody>
+      </p:sp>
+      <p:sp>
+        <p:nvSpPr>
+          <p:cNvPr id="6" name="Text 4"/>
+          <p:cNvSpPr/>
+          <p:nvPr/>
+        </p:nvSpPr>
+        <p:spPr>
+          <a:xfrm>
+            <a:off x="365760" y="1280160"/>
+            <a:ext cx="5669280" cy="4572000"/>
+          </a:xfrm>
+          <a:prstGeom prst="rect">
+            <a:avLst/>
+          </a:prstGeom>
+          <a:noFill/>
+          <a:ln/>
+        </p:spPr>
+        <p:txBody>
+          <a:bodyPr wrap="square" rtlCol="0" anchor="ctr"/>
           <a:lstStyle/>
           <a:p>
             <a:pPr marL="342900" indent="-342900">
               <a:spcAft>
-                <a:spcPts val="600"/>
+                <a:spcPts val="400"/>
               </a:spcAft>
               <a:buSzPct val="100000"/>
               <a:buChar char="■"/>
             </a:pPr>
             <a:r>
-              <a:rPr lang="en-US" sz="1600" dirty="0">
+              <a:rPr lang="en-US" sz="1100" dirty="0">
                 <a:solidFill>
                   <a:srgbClr val="1A1A1A"/>
                 </a:solidFill>
@@ -12240,20 +12181,20 @@
                 <a:ea typeface="Calibri" pitchFamily="34" charset="-122"/>
                 <a:cs typeface="Calibri" pitchFamily="34" charset="-120"/>
               </a:rPr>
-              <a:t>In Waco's 76704 ZIP, the violent crime index runs ~2.8× the U.S. average. Most of the boys involved have one common thread: no consistent father figure.</a:t>
-            </a:r>
-            <a:endParaRPr lang="en-US" sz="1600" dirty="0"/>
+              <a:t>Black poverty rate: 35.71 % · U.S. Census Bureau ACS 5-year (2018–2022) — Table B17001B — Poverty Status by Sex by Age — Black or African American Alone · 2022-12-31 [verified]</a:t>
+            </a:r>
+            <a:endParaRPr lang="en-US" sz="1100" dirty="0"/>
           </a:p>
           <a:p>
             <a:pPr marL="342900" indent="-342900">
               <a:spcAft>
-                <a:spcPts val="600"/>
+                <a:spcPts val="400"/>
               </a:spcAft>
               <a:buSzPct val="100000"/>
               <a:buChar char="■"/>
             </a:pPr>
             <a:r>
-              <a:rPr lang="en-US" sz="1600" dirty="0">
+              <a:rPr lang="en-US" sz="1100" dirty="0">
                 <a:solidFill>
                   <a:srgbClr val="1A1A1A"/>
                 </a:solidFill>
@@ -12261,20 +12202,20 @@
                 <a:ea typeface="Calibri" pitchFamily="34" charset="-122"/>
                 <a:cs typeface="Calibri" pitchFamily="34" charset="-120"/>
               </a:rPr>
-              <a:t>Waco ISD was just placed at TEA Stage 4 — the most severe discipline rating in Texas — for sending Black students to alternative ed at 3× the rate of their peers.</a:t>
-            </a:r>
-            <a:endParaRPr lang="en-US" sz="1600" dirty="0"/>
+              <a:t>Black families single-parent share: 59.85 % · U.S. Census Bureau ACS 5-year (2018–2022) — Table B11001B — Household Type — Black Alone · 2022-12-31 [verified]</a:t>
+            </a:r>
+            <a:endParaRPr lang="en-US" sz="1100" dirty="0"/>
           </a:p>
           <a:p>
             <a:pPr marL="342900" indent="-342900">
               <a:spcAft>
-                <a:spcPts val="600"/>
+                <a:spcPts val="400"/>
               </a:spcAft>
               <a:buSzPct val="100000"/>
               <a:buChar char="■"/>
             </a:pPr>
             <a:r>
-              <a:rPr lang="en-US" sz="1600" dirty="0">
+              <a:rPr lang="en-US" sz="1100" dirty="0">
                 <a:solidFill>
                   <a:srgbClr val="1A1A1A"/>
                 </a:solidFill>
@@ -12282,20 +12223,20 @@
                 <a:ea typeface="Calibri" pitchFamily="34" charset="-122"/>
                 <a:cs typeface="Calibri" pitchFamily="34" charset="-120"/>
               </a:rPr>
-              <a:t>Across the I-35 corridor in Austin, the same mechanics play out at a larger scale, accelerated by gentrification displacing Black families from East Austin to Manor, Pflugerville, and Del Valle.</a:t>
-            </a:r>
-            <a:endParaRPr lang="en-US" sz="1600" dirty="0"/>
+              <a:t>Black adults without HS diploma: 13.47 % · U.S. Census Bureau ACS 5-year (2018–2022) — Table C15002B — Sex by Educational Attainment — Black Alone, 25+ · 2022-12-31 [verified]</a:t>
+            </a:r>
+            <a:endParaRPr lang="en-US" sz="1100" dirty="0"/>
           </a:p>
           <a:p>
             <a:pPr marL="342900" indent="-342900">
               <a:spcAft>
-                <a:spcPts val="600"/>
+                <a:spcPts val="400"/>
               </a:spcAft>
               <a:buSzPct val="100000"/>
               <a:buChar char="■"/>
             </a:pPr>
             <a:r>
-              <a:rPr lang="en-US" sz="1600" dirty="0">
+              <a:rPr lang="en-US" sz="1100" dirty="0">
                 <a:solidFill>
                   <a:srgbClr val="1A1A1A"/>
                 </a:solidFill>
@@ -12303,20 +12244,20 @@
                 <a:ea typeface="Calibri" pitchFamily="34" charset="-122"/>
                 <a:cs typeface="Calibri" pitchFamily="34" charset="-120"/>
               </a:rPr>
-              <a:t>In both metros, Big Brothers Big Sisters has a publicly acknowledged Black-male-mentor crisis: boys wait roughly twice as long as girls for a match.</a:t>
-            </a:r>
-            <a:endParaRPr lang="en-US" sz="1600" dirty="0"/>
+              <a:t>Depression prevalence: 23.65 % · CDC PLACES — Local Data for Better Health — Measure DEPRESSION (county-tract avg) · 2022-12-31 [verified]</a:t>
+            </a:r>
+            <a:endParaRPr lang="en-US" sz="1100" dirty="0"/>
           </a:p>
           <a:p>
             <a:pPr marL="342900" indent="-342900">
               <a:spcAft>
-                <a:spcPts val="600"/>
+                <a:spcPts val="400"/>
               </a:spcAft>
               <a:buSzPct val="100000"/>
               <a:buChar char="■"/>
             </a:pPr>
             <a:r>
-              <a:rPr lang="en-US" sz="1600" dirty="0">
+              <a:rPr lang="en-US" sz="1100" dirty="0">
                 <a:solidFill>
                   <a:srgbClr val="1A1A1A"/>
                 </a:solidFill>
@@ -12324,15 +12265,262 @@
                 <a:ea typeface="Calibri" pitchFamily="34" charset="-122"/>
                 <a:cs typeface="Calibri" pitchFamily="34" charset="-120"/>
               </a:rPr>
-              <a:t>We have a 24-platform AI operating system, a real-time event bus (RPLICE), and a Sankofa Men program ready to deploy. What we need is the partnership table.</a:t>
-            </a:r>
-            <a:endParaRPr lang="en-US" sz="1600" dirty="0"/>
+              <a:t>Adults without health insurance: 16.95 % · CDC PLACES — Local Data for Better Health — Measure ACCESS2 (county-tract avg) · 2022-12-31 [verified]</a:t>
+            </a:r>
+            <a:endParaRPr lang="en-US" sz="1100" dirty="0"/>
+          </a:p>
+          <a:p>
+            <a:pPr marL="342900" indent="-342900">
+              <a:spcAft>
+                <a:spcPts val="400"/>
+              </a:spcAft>
+              <a:buSzPct val="100000"/>
+              <a:buChar char="■"/>
+            </a:pPr>
+            <a:r>
+              <a:rPr lang="en-US" sz="1100" dirty="0">
+                <a:solidFill>
+                  <a:srgbClr val="1A1A1A"/>
+                </a:solidFill>
+                <a:latin typeface="Calibri" pitchFamily="34" charset="0"/>
+                <a:ea typeface="Calibri" pitchFamily="34" charset="-122"/>
+                <a:cs typeface="Calibri" pitchFamily="34" charset="-120"/>
+              </a:rPr>
+              <a:t>Violent crime (TX) (static — live API unavailable)</a:t>
+            </a:r>
+            <a:endParaRPr lang="en-US" sz="1100" dirty="0"/>
           </a:p>
         </p:txBody>
       </p:sp>
       <p:sp>
         <p:nvSpPr>
-          <p:cNvPr id="6" name="Text 4"/>
+          <p:cNvPr id="7" name="Text 5"/>
+          <p:cNvSpPr/>
+          <p:nvPr/>
+        </p:nvSpPr>
+        <p:spPr>
+          <a:xfrm>
+            <a:off x="6217920" y="914400"/>
+            <a:ext cx="5486400" cy="365760"/>
+          </a:xfrm>
+          <a:prstGeom prst="rect">
+            <a:avLst/>
+          </a:prstGeom>
+          <a:noFill/>
+          <a:ln/>
+        </p:spPr>
+        <p:txBody>
+          <a:bodyPr wrap="square" rtlCol="0" anchor="ctr"/>
+          <a:lstStyle/>
+          <a:p>
+            <a:pPr indent="0" marL="0">
+              <a:buNone/>
+            </a:pPr>
+            <a:r>
+              <a:rPr lang="en-US" sz="1400" b="1" dirty="0">
+                <a:solidFill>
+                  <a:srgbClr val="9B1C2E"/>
+                </a:solidFill>
+                <a:latin typeface="Calibri" pitchFamily="34" charset="0"/>
+                <a:ea typeface="Calibri" pitchFamily="34" charset="-122"/>
+                <a:cs typeface="Calibri" pitchFamily="34" charset="-120"/>
+              </a:rPr>
+              <a:t>AUSTIN / TRAVIS — LIVE</a:t>
+            </a:r>
+            <a:endParaRPr lang="en-US" sz="1400" dirty="0"/>
+          </a:p>
+        </p:txBody>
+      </p:sp>
+      <p:sp>
+        <p:nvSpPr>
+          <p:cNvPr id="8" name="Text 6"/>
+          <p:cNvSpPr/>
+          <p:nvPr/>
+        </p:nvSpPr>
+        <p:spPr>
+          <a:xfrm>
+            <a:off x="6217920" y="1280160"/>
+            <a:ext cx="5669280" cy="4572000"/>
+          </a:xfrm>
+          <a:prstGeom prst="rect">
+            <a:avLst/>
+          </a:prstGeom>
+          <a:noFill/>
+          <a:ln/>
+        </p:spPr>
+        <p:txBody>
+          <a:bodyPr wrap="square" rtlCol="0" anchor="ctr"/>
+          <a:lstStyle/>
+          <a:p>
+            <a:pPr marL="342900" indent="-342900">
+              <a:spcAft>
+                <a:spcPts val="400"/>
+              </a:spcAft>
+              <a:buSzPct val="100000"/>
+              <a:buChar char="■"/>
+            </a:pPr>
+            <a:r>
+              <a:rPr lang="en-US" sz="1100" dirty="0">
+                <a:solidFill>
+                  <a:srgbClr val="1A1A1A"/>
+                </a:solidFill>
+                <a:latin typeface="Calibri" pitchFamily="34" charset="0"/>
+                <a:ea typeface="Calibri" pitchFamily="34" charset="-122"/>
+                <a:cs typeface="Calibri" pitchFamily="34" charset="-120"/>
+              </a:rPr>
+              <a:t>Black poverty rate: 16.94 % · U.S. Census Bureau ACS 5-year (2018–2022) — Table B17001B — Poverty Status by Sex by Age — Black or African American Alone · 2022-12-31 [verified]</a:t>
+            </a:r>
+            <a:endParaRPr lang="en-US" sz="1100" dirty="0"/>
+          </a:p>
+          <a:p>
+            <a:pPr marL="342900" indent="-342900">
+              <a:spcAft>
+                <a:spcPts val="400"/>
+              </a:spcAft>
+              <a:buSzPct val="100000"/>
+              <a:buChar char="■"/>
+            </a:pPr>
+            <a:r>
+              <a:rPr lang="en-US" sz="1100" dirty="0">
+                <a:solidFill>
+                  <a:srgbClr val="1A1A1A"/>
+                </a:solidFill>
+                <a:latin typeface="Calibri" pitchFamily="34" charset="0"/>
+                <a:ea typeface="Calibri" pitchFamily="34" charset="-122"/>
+                <a:cs typeface="Calibri" pitchFamily="34" charset="-120"/>
+              </a:rPr>
+              <a:t>Black families single-parent share: 46.01 % · U.S. Census Bureau ACS 5-year (2018–2022) — Table B11001B — Household Type — Black Alone · 2022-12-31 [verified]</a:t>
+            </a:r>
+            <a:endParaRPr lang="en-US" sz="1100" dirty="0"/>
+          </a:p>
+          <a:p>
+            <a:pPr marL="342900" indent="-342900">
+              <a:spcAft>
+                <a:spcPts val="400"/>
+              </a:spcAft>
+              <a:buSzPct val="100000"/>
+              <a:buChar char="■"/>
+            </a:pPr>
+            <a:r>
+              <a:rPr lang="en-US" sz="1100" dirty="0">
+                <a:solidFill>
+                  <a:srgbClr val="1A1A1A"/>
+                </a:solidFill>
+                <a:latin typeface="Calibri" pitchFamily="34" charset="0"/>
+                <a:ea typeface="Calibri" pitchFamily="34" charset="-122"/>
+                <a:cs typeface="Calibri" pitchFamily="34" charset="-120"/>
+              </a:rPr>
+              <a:t>Black adults without HS diploma: 8.47 % · U.S. Census Bureau ACS 5-year (2018–2022) — Table C15002B — Sex by Educational Attainment — Black Alone, 25+ · 2022-12-31 [verified]</a:t>
+            </a:r>
+            <a:endParaRPr lang="en-US" sz="1100" dirty="0"/>
+          </a:p>
+          <a:p>
+            <a:pPr marL="342900" indent="-342900">
+              <a:spcAft>
+                <a:spcPts val="400"/>
+              </a:spcAft>
+              <a:buSzPct val="100000"/>
+              <a:buChar char="■"/>
+            </a:pPr>
+            <a:r>
+              <a:rPr lang="en-US" sz="1100" dirty="0">
+                <a:solidFill>
+                  <a:srgbClr val="1A1A1A"/>
+                </a:solidFill>
+                <a:latin typeface="Calibri" pitchFamily="34" charset="0"/>
+                <a:ea typeface="Calibri" pitchFamily="34" charset="-122"/>
+                <a:cs typeface="Calibri" pitchFamily="34" charset="-120"/>
+              </a:rPr>
+              <a:t>Depression prevalence: 21.85 % · CDC PLACES — Local Data for Better Health — Measure DEPRESSION (county-tract avg) · 2022-12-31 [verified]</a:t>
+            </a:r>
+            <a:endParaRPr lang="en-US" sz="1100" dirty="0"/>
+          </a:p>
+          <a:p>
+            <a:pPr marL="342900" indent="-342900">
+              <a:spcAft>
+                <a:spcPts val="400"/>
+              </a:spcAft>
+              <a:buSzPct val="100000"/>
+              <a:buChar char="■"/>
+            </a:pPr>
+            <a:r>
+              <a:rPr lang="en-US" sz="1100" dirty="0">
+                <a:solidFill>
+                  <a:srgbClr val="1A1A1A"/>
+                </a:solidFill>
+                <a:latin typeface="Calibri" pitchFamily="34" charset="0"/>
+                <a:ea typeface="Calibri" pitchFamily="34" charset="-122"/>
+                <a:cs typeface="Calibri" pitchFamily="34" charset="-120"/>
+              </a:rPr>
+              <a:t>Adults without health insurance: 13.75 % · CDC PLACES — Local Data for Better Health — Measure ACCESS2 (county-tract avg) · 2022-12-31 [verified]</a:t>
+            </a:r>
+            <a:endParaRPr lang="en-US" sz="1100" dirty="0"/>
+          </a:p>
+          <a:p>
+            <a:pPr marL="342900" indent="-342900">
+              <a:spcAft>
+                <a:spcPts val="400"/>
+              </a:spcAft>
+              <a:buSzPct val="100000"/>
+              <a:buChar char="■"/>
+            </a:pPr>
+            <a:r>
+              <a:rPr lang="en-US" sz="1100" dirty="0">
+                <a:solidFill>
+                  <a:srgbClr val="1A1A1A"/>
+                </a:solidFill>
+                <a:latin typeface="Calibri" pitchFamily="34" charset="0"/>
+                <a:ea typeface="Calibri" pitchFamily="34" charset="-122"/>
+                <a:cs typeface="Calibri" pitchFamily="34" charset="-120"/>
+              </a:rPr>
+              <a:t>Violent crime (TX) (static — live API unavailable)</a:t>
+            </a:r>
+            <a:endParaRPr lang="en-US" sz="1100" dirty="0"/>
+          </a:p>
+        </p:txBody>
+      </p:sp>
+      <p:sp>
+        <p:nvSpPr>
+          <p:cNvPr id="9" name="Text 7"/>
+          <p:cNvSpPr/>
+          <p:nvPr/>
+        </p:nvSpPr>
+        <p:spPr>
+          <a:xfrm>
+            <a:off x="365760" y="5943600"/>
+            <a:ext cx="11457432" cy="365760"/>
+          </a:xfrm>
+          <a:prstGeom prst="rect">
+            <a:avLst/>
+          </a:prstGeom>
+          <a:noFill/>
+          <a:ln/>
+        </p:spPr>
+        <p:txBody>
+          <a:bodyPr wrap="square" rtlCol="0" anchor="ctr"/>
+          <a:lstStyle/>
+          <a:p>
+            <a:pPr indent="0" marL="0">
+              <a:buNone/>
+            </a:pPr>
+            <a:r>
+              <a:rPr lang="en-US" sz="1000" i="1" dirty="0">
+                <a:solidFill>
+                  <a:srgbClr val="2E7D32"/>
+                </a:solidFill>
+                <a:latin typeface="Calibri" pitchFamily="34" charset="0"/>
+                <a:ea typeface="Calibri" pitchFamily="34" charset="-122"/>
+                <a:cs typeface="Calibri" pitchFamily="34" charset="-120"/>
+              </a:rPr>
+              <a:t>Every line above is the current value in the chain-web. Re-run the deck to refresh.</a:t>
+            </a:r>
+            <a:endParaRPr lang="en-US" sz="1000" dirty="0"/>
+          </a:p>
+        </p:txBody>
+      </p:sp>
+      <p:sp>
+        <p:nvSpPr>
+          <p:cNvPr id="10" name="Text 8"/>
           <p:cNvSpPr/>
           <p:nvPr/>
         </p:nvSpPr>
@@ -12363,7 +12551,7 @@
                 <a:ea typeface="Calibri" pitchFamily="34" charset="-122"/>
                 <a:cs typeface="Calibri" pitchFamily="34" charset="-120"/>
               </a:rPr>
-              <a:t>TCAF · Executive Summary · April 17, 2026</a:t>
+              <a:t>TCAF · Live — connected to /api/corridor/story · April 17, 2026</a:t>
             </a:r>
             <a:endParaRPr lang="en-US" sz="900" dirty="0"/>
           </a:p>
@@ -12459,7 +12647,7 @@
                 <a:ea typeface="Calibri" pitchFamily="34" charset="-122"/>
                 <a:cs typeface="Calibri" pitchFamily="34" charset="-120"/>
               </a:rPr>
-              <a:t>12-month pilot — Waco Fatherhood Pod + Austin Fatherhood Pod</a:t>
+              <a:t>RPLICE — the real-time bus that connects every partner</a:t>
             </a:r>
             <a:endParaRPr lang="en-US" sz="2400" dirty="0"/>
           </a:p>
@@ -12498,7 +12686,7 @@
                 <a:ea typeface="Calibri" pitchFamily="34" charset="-122"/>
                 <a:cs typeface="Calibri" pitchFamily="34" charset="-120"/>
               </a:rPr>
-              <a:t>Twin pods, shared learning loop, one P&amp;L.</a:t>
+              <a:t>The coordination layer Austin's fragmented ecosystem has been waiting for.</a:t>
             </a:r>
             <a:endParaRPr lang="en-US" sz="1200" dirty="0"/>
           </a:p>
@@ -12541,7 +12729,7 @@
                 <a:ea typeface="Calibri" pitchFamily="34" charset="-122"/>
                 <a:cs typeface="Calibri" pitchFamily="34" charset="-120"/>
               </a:rPr>
-              <a:t>Waco pod: anchor in 76704. Recruit + match 250 Black-male mentors to 250 fatherless boys (ages 8–17). Co-run with STARRY + Prosper Waco + Waco ISD + Baylor.</a:t>
+              <a:t>RPLICE = Real-time Population Linkage and Information Coordination Engine — TCAF's event bus.</a:t>
             </a:r>
             <a:endParaRPr lang="en-US" sz="1600" dirty="0"/>
           </a:p>
@@ -12562,7 +12750,7 @@
                 <a:ea typeface="Calibri" pitchFamily="34" charset="-122"/>
                 <a:cs typeface="Calibri" pitchFamily="34" charset="-120"/>
               </a:rPr>
-              <a:t>Austin pod: anchor in 78721 / 78724 with a Manor satellite. Recruit + match 500 mentors to 500 boys. Co-run with 100 BMCT + AAUL + Foundation Communities + AISD/Manor/Del Valle.</a:t>
+              <a:t>Every partner emits events: 'youth.flagged', 'mentor.matched', 'family.enrolled', 'father.engaged', 'crisis.triaged', 'outcome.achieved'.</a:t>
             </a:r>
             <a:endParaRPr lang="en-US" sz="1600" dirty="0"/>
           </a:p>
@@ -12583,7 +12771,7 @@
                 <a:ea typeface="Calibri" pitchFamily="34" charset="-122"/>
                 <a:cs typeface="Calibri" pitchFamily="34" charset="-120"/>
               </a:rPr>
-              <a:t>Both pods feed RPLICE. Quarterly cross-pod learning sessions. Shared mentor training curriculum. Shared evaluation by Dell Med School + UT SSW + Baylor SSW.</a:t>
+              <a:t>Subscribed partners receive only what they're authorized to see — privacy-preserving by design (FERPA, HIPAA, 42 CFR Part 2 aware).</a:t>
             </a:r>
             <a:endParaRPr lang="en-US" sz="1600" dirty="0"/>
           </a:p>
@@ -12604,7 +12792,7 @@
                 <a:ea typeface="Calibri" pitchFamily="34" charset="-122"/>
                 <a:cs typeface="Calibri" pitchFamily="34" charset="-120"/>
               </a:rPr>
-              <a:t>Year-1 outcome targets: 750 mentor matches, 1,200 fathers re-engaged, 35% reduction in DAEP placements among matched youth, 90% mentor retention at 12 months.</a:t>
+              <a:t>STARRY in Waco and AAUL in Austin can see the same boy's mentor match in real time — no 90-day intake delay.</a:t>
             </a:r>
             <a:endParaRPr lang="en-US" sz="1600" dirty="0"/>
           </a:p>
@@ -12625,7 +12813,28 @@
                 <a:ea typeface="Calibri" pitchFamily="34" charset="-122"/>
                 <a:cs typeface="Calibri" pitchFamily="34" charset="-120"/>
               </a:rPr>
-              <a:t>Total Y1 budget envelope: ~$2.4M ($800K Waco + $1.6M Austin) — backloaded against funder commitments below.</a:t>
+              <a:t>Funders (United Way, St. David's, Cooper, Dell) get a unified outcomes dashboard across all grantees instead of 12 different PDFs.</a:t>
+            </a:r>
+            <a:endParaRPr lang="en-US" sz="1600" dirty="0"/>
+          </a:p>
+          <a:p>
+            <a:pPr marL="342900" indent="-342900">
+              <a:spcAft>
+                <a:spcPts val="600"/>
+              </a:spcAft>
+              <a:buSzPct val="100000"/>
+              <a:buChar char="■"/>
+            </a:pPr>
+            <a:r>
+              <a:rPr lang="en-US" sz="1600" dirty="0">
+                <a:solidFill>
+                  <a:srgbClr val="1A1A1A"/>
+                </a:solidFill>
+                <a:latin typeface="Calibri" pitchFamily="34" charset="0"/>
+                <a:ea typeface="Calibri" pitchFamily="34" charset="-122"/>
+                <a:cs typeface="Calibri" pitchFamily="34" charset="-120"/>
+              </a:rPr>
+              <a:t>We've already shipped /api/rplice/sync (handshake + batch + peer-network mirror) — it's live and ready to onboard partners today.</a:t>
             </a:r>
             <a:endParaRPr lang="en-US" sz="1600" dirty="0"/>
           </a:p>
@@ -12664,7 +12873,7 @@
                 <a:ea typeface="Calibri" pitchFamily="34" charset="-122"/>
                 <a:cs typeface="Calibri" pitchFamily="34" charset="-120"/>
               </a:rPr>
-              <a:t>TCAF · Solution · Pilot · April 17, 2026</a:t>
+              <a:t>TCAF · Solution · RPLICE · April 17, 2026</a:t>
             </a:r>
             <a:endParaRPr lang="en-US" sz="900" dirty="0"/>
           </a:p>
@@ -12760,7 +12969,7 @@
                 <a:ea typeface="Calibri" pitchFamily="34" charset="-122"/>
                 <a:cs typeface="Calibri" pitchFamily="34" charset="-120"/>
               </a:rPr>
-              <a:t>Funding strategy — corporate + philanthropic + public</a:t>
+              <a:t>12-month pilot — Waco Fatherhood Pod + Austin Fatherhood Pod</a:t>
             </a:r>
             <a:endParaRPr lang="en-US" sz="2400" dirty="0"/>
           </a:p>
@@ -12799,6 +13008,307 @@
                 <a:ea typeface="Calibri" pitchFamily="34" charset="-122"/>
                 <a:cs typeface="Calibri" pitchFamily="34" charset="-120"/>
               </a:rPr>
+              <a:t>Twin pods, shared learning loop, one P&amp;L.</a:t>
+            </a:r>
+            <a:endParaRPr lang="en-US" sz="1200" dirty="0"/>
+          </a:p>
+        </p:txBody>
+      </p:sp>
+      <p:sp>
+        <p:nvSpPr>
+          <p:cNvPr id="5" name="Text 3"/>
+          <p:cNvSpPr/>
+          <p:nvPr/>
+        </p:nvSpPr>
+        <p:spPr>
+          <a:xfrm>
+            <a:off x="548640" y="1097280"/>
+            <a:ext cx="11091672" cy="5120640"/>
+          </a:xfrm>
+          <a:prstGeom prst="rect">
+            <a:avLst/>
+          </a:prstGeom>
+          <a:noFill/>
+          <a:ln/>
+        </p:spPr>
+        <p:txBody>
+          <a:bodyPr wrap="square" rtlCol="0" anchor="t"/>
+          <a:lstStyle/>
+          <a:p>
+            <a:pPr marL="342900" indent="-342900">
+              <a:spcAft>
+                <a:spcPts val="600"/>
+              </a:spcAft>
+              <a:buSzPct val="100000"/>
+              <a:buChar char="■"/>
+            </a:pPr>
+            <a:r>
+              <a:rPr lang="en-US" sz="1600" dirty="0">
+                <a:solidFill>
+                  <a:srgbClr val="1A1A1A"/>
+                </a:solidFill>
+                <a:latin typeface="Calibri" pitchFamily="34" charset="0"/>
+                <a:ea typeface="Calibri" pitchFamily="34" charset="-122"/>
+                <a:cs typeface="Calibri" pitchFamily="34" charset="-120"/>
+              </a:rPr>
+              <a:t>Waco pod: anchor in 76704. Recruit + match 250 Black-male mentors to 250 fatherless boys (ages 8–17). Co-run with STARRY + Prosper Waco + Waco ISD + Baylor.</a:t>
+            </a:r>
+            <a:endParaRPr lang="en-US" sz="1600" dirty="0"/>
+          </a:p>
+          <a:p>
+            <a:pPr marL="342900" indent="-342900">
+              <a:spcAft>
+                <a:spcPts val="600"/>
+              </a:spcAft>
+              <a:buSzPct val="100000"/>
+              <a:buChar char="■"/>
+            </a:pPr>
+            <a:r>
+              <a:rPr lang="en-US" sz="1600" dirty="0">
+                <a:solidFill>
+                  <a:srgbClr val="1A1A1A"/>
+                </a:solidFill>
+                <a:latin typeface="Calibri" pitchFamily="34" charset="0"/>
+                <a:ea typeface="Calibri" pitchFamily="34" charset="-122"/>
+                <a:cs typeface="Calibri" pitchFamily="34" charset="-120"/>
+              </a:rPr>
+              <a:t>Austin pod: anchor in 78721 / 78724 with a Manor satellite. Recruit + match 500 mentors to 500 boys. Co-run with 100 BMCT + AAUL + Foundation Communities + AISD/Manor/Del Valle.</a:t>
+            </a:r>
+            <a:endParaRPr lang="en-US" sz="1600" dirty="0"/>
+          </a:p>
+          <a:p>
+            <a:pPr marL="342900" indent="-342900">
+              <a:spcAft>
+                <a:spcPts val="600"/>
+              </a:spcAft>
+              <a:buSzPct val="100000"/>
+              <a:buChar char="■"/>
+            </a:pPr>
+            <a:r>
+              <a:rPr lang="en-US" sz="1600" dirty="0">
+                <a:solidFill>
+                  <a:srgbClr val="1A1A1A"/>
+                </a:solidFill>
+                <a:latin typeface="Calibri" pitchFamily="34" charset="0"/>
+                <a:ea typeface="Calibri" pitchFamily="34" charset="-122"/>
+                <a:cs typeface="Calibri" pitchFamily="34" charset="-120"/>
+              </a:rPr>
+              <a:t>Both pods feed RPLICE. Quarterly cross-pod learning sessions. Shared mentor training curriculum. Shared evaluation by Dell Med School + UT SSW + Baylor SSW.</a:t>
+            </a:r>
+            <a:endParaRPr lang="en-US" sz="1600" dirty="0"/>
+          </a:p>
+          <a:p>
+            <a:pPr marL="342900" indent="-342900">
+              <a:spcAft>
+                <a:spcPts val="600"/>
+              </a:spcAft>
+              <a:buSzPct val="100000"/>
+              <a:buChar char="■"/>
+            </a:pPr>
+            <a:r>
+              <a:rPr lang="en-US" sz="1600" dirty="0">
+                <a:solidFill>
+                  <a:srgbClr val="1A1A1A"/>
+                </a:solidFill>
+                <a:latin typeface="Calibri" pitchFamily="34" charset="0"/>
+                <a:ea typeface="Calibri" pitchFamily="34" charset="-122"/>
+                <a:cs typeface="Calibri" pitchFamily="34" charset="-120"/>
+              </a:rPr>
+              <a:t>Year-1 outcome targets: 750 mentor matches, 1,200 fathers re-engaged, 35% reduction in DAEP placements among matched youth, 90% mentor retention at 12 months.</a:t>
+            </a:r>
+            <a:endParaRPr lang="en-US" sz="1600" dirty="0"/>
+          </a:p>
+          <a:p>
+            <a:pPr marL="342900" indent="-342900">
+              <a:spcAft>
+                <a:spcPts val="600"/>
+              </a:spcAft>
+              <a:buSzPct val="100000"/>
+              <a:buChar char="■"/>
+            </a:pPr>
+            <a:r>
+              <a:rPr lang="en-US" sz="1600" dirty="0">
+                <a:solidFill>
+                  <a:srgbClr val="1A1A1A"/>
+                </a:solidFill>
+                <a:latin typeface="Calibri" pitchFamily="34" charset="0"/>
+                <a:ea typeface="Calibri" pitchFamily="34" charset="-122"/>
+                <a:cs typeface="Calibri" pitchFamily="34" charset="-120"/>
+              </a:rPr>
+              <a:t>Total Y1 budget envelope: ~$2.4M ($800K Waco + $1.6M Austin) — backloaded against funder commitments below.</a:t>
+            </a:r>
+            <a:endParaRPr lang="en-US" sz="1600" dirty="0"/>
+          </a:p>
+        </p:txBody>
+      </p:sp>
+      <p:sp>
+        <p:nvSpPr>
+          <p:cNvPr id="6" name="Text 4"/>
+          <p:cNvSpPr/>
+          <p:nvPr/>
+        </p:nvSpPr>
+        <p:spPr>
+          <a:xfrm>
+            <a:off x="365760" y="6565392"/>
+            <a:ext cx="11457432" cy="228600"/>
+          </a:xfrm>
+          <a:prstGeom prst="rect">
+            <a:avLst/>
+          </a:prstGeom>
+          <a:noFill/>
+          <a:ln/>
+        </p:spPr>
+        <p:txBody>
+          <a:bodyPr wrap="square" rtlCol="0" anchor="ctr"/>
+          <a:lstStyle/>
+          <a:p>
+            <a:pPr indent="0" marL="0">
+              <a:buNone/>
+            </a:pPr>
+            <a:r>
+              <a:rPr lang="en-US" sz="900" dirty="0">
+                <a:solidFill>
+                  <a:srgbClr val="5A6470"/>
+                </a:solidFill>
+                <a:latin typeface="Calibri" pitchFamily="34" charset="0"/>
+                <a:ea typeface="Calibri" pitchFamily="34" charset="-122"/>
+                <a:cs typeface="Calibri" pitchFamily="34" charset="-120"/>
+              </a:rPr>
+              <a:t>TCAF · Solution · Pilot · April 17, 2026</a:t>
+            </a:r>
+            <a:endParaRPr lang="en-US" sz="900" dirty="0"/>
+          </a:p>
+        </p:txBody>
+      </p:sp>
+    </p:spTree>
+  </p:cSld>
+  <p:clrMapOvr>
+    <a:masterClrMapping/>
+  </p:clrMapOvr>
+</p:sld>
+</file>
+
+<file path=ppt/slides/slide22.xml><?xml version="1.0" encoding="utf-8"?>
+<p:sld xmlns:a="http://schemas.openxmlformats.org/drawingml/2006/main" xmlns:r="http://schemas.openxmlformats.org/officeDocument/2006/relationships" xmlns:p="http://schemas.openxmlformats.org/presentationml/2006/main">
+  <p:cSld name="Slide 22">
+    <p:bg>
+      <p:bgPr>
+        <a:solidFill>
+          <a:srgbClr val="F7F2E7"/>
+        </a:solidFill>
+      </p:bgPr>
+    </p:bg>
+    <p:spTree>
+      <p:nvGrpSpPr>
+        <p:cNvPr id="1" name=""/>
+        <p:cNvGrpSpPr/>
+        <p:nvPr/>
+      </p:nvGrpSpPr>
+      <p:grpSpPr>
+        <a:xfrm>
+          <a:off x="0" y="0"/>
+          <a:ext cx="0" cy="0"/>
+          <a:chOff x="0" y="0"/>
+          <a:chExt cx="0" cy="0"/>
+        </a:xfrm>
+      </p:grpSpPr>
+      <p:sp>
+        <p:nvSpPr>
+          <p:cNvPr id="2" name="Shape 0"/>
+          <p:cNvSpPr/>
+          <p:nvPr/>
+        </p:nvSpPr>
+        <p:spPr>
+          <a:xfrm>
+            <a:off x="0" y="0"/>
+            <a:ext cx="12188952" cy="822960"/>
+          </a:xfrm>
+          <a:prstGeom prst="rect">
+            <a:avLst/>
+          </a:prstGeom>
+          <a:solidFill>
+            <a:srgbClr val="0B2545"/>
+          </a:solidFill>
+          <a:ln w="12700">
+            <a:solidFill>
+              <a:srgbClr val="0B2545"/>
+            </a:solidFill>
+            <a:prstDash val="solid"/>
+          </a:ln>
+        </p:spPr>
+      </p:sp>
+      <p:sp>
+        <p:nvSpPr>
+          <p:cNvPr id="3" name="Text 1"/>
+          <p:cNvSpPr/>
+          <p:nvPr/>
+        </p:nvSpPr>
+        <p:spPr>
+          <a:xfrm>
+            <a:off x="365760" y="109728"/>
+            <a:ext cx="11457432" cy="457200"/>
+          </a:xfrm>
+          <a:prstGeom prst="rect">
+            <a:avLst/>
+          </a:prstGeom>
+          <a:noFill/>
+          <a:ln/>
+        </p:spPr>
+        <p:txBody>
+          <a:bodyPr wrap="square" rtlCol="0" anchor="ctr"/>
+          <a:lstStyle/>
+          <a:p>
+            <a:pPr indent="0" marL="0">
+              <a:buNone/>
+            </a:pPr>
+            <a:r>
+              <a:rPr lang="en-US" sz="2400" b="1" dirty="0">
+                <a:solidFill>
+                  <a:srgbClr val="FFFFFF"/>
+                </a:solidFill>
+                <a:latin typeface="Calibri" pitchFamily="34" charset="0"/>
+                <a:ea typeface="Calibri" pitchFamily="34" charset="-122"/>
+                <a:cs typeface="Calibri" pitchFamily="34" charset="-120"/>
+              </a:rPr>
+              <a:t>Funding strategy — corporate + philanthropic + public</a:t>
+            </a:r>
+            <a:endParaRPr lang="en-US" sz="2400" dirty="0"/>
+          </a:p>
+        </p:txBody>
+      </p:sp>
+      <p:sp>
+        <p:nvSpPr>
+          <p:cNvPr id="4" name="Text 2"/>
+          <p:cNvSpPr/>
+          <p:nvPr/>
+        </p:nvSpPr>
+        <p:spPr>
+          <a:xfrm>
+            <a:off x="365760" y="457200"/>
+            <a:ext cx="11457432" cy="320040"/>
+          </a:xfrm>
+          <a:prstGeom prst="rect">
+            <a:avLst/>
+          </a:prstGeom>
+          <a:noFill/>
+          <a:ln/>
+        </p:spPr>
+        <p:txBody>
+          <a:bodyPr wrap="square" rtlCol="0" anchor="ctr"/>
+          <a:lstStyle/>
+          <a:p>
+            <a:pPr indent="0" marL="0">
+              <a:buNone/>
+            </a:pPr>
+            <a:r>
+              <a:rPr lang="en-US" sz="1200" i="1" dirty="0">
+                <a:solidFill>
+                  <a:srgbClr val="D4A24C"/>
+                </a:solidFill>
+                <a:latin typeface="Calibri" pitchFamily="34" charset="0"/>
+                <a:ea typeface="Calibri" pitchFamily="34" charset="-122"/>
+                <a:cs typeface="Calibri" pitchFamily="34" charset="-120"/>
+              </a:rPr>
               <a:t>Diversified across both metros.</a:t>
             </a:r>
             <a:endParaRPr lang="en-US" sz="1200" dirty="0"/>
@@ -12807,7 +13317,7 @@
       </p:sp>
       <p:graphicFrame>
         <p:nvGraphicFramePr>
-          <p:cNvPr id="22" name="Table 0"/>
+          <p:cNvPr id="23" name="Table 0"/>
           <p:cNvGraphicFramePr>
             <a:graphicFrameLocks noGrp="1"/>
           </p:cNvGraphicFramePr>
@@ -14802,349 +15312,6 @@
 </p:sld>
 </file>
 
-<file path=ppt/slides/slide22.xml><?xml version="1.0" encoding="utf-8"?>
-<p:sld xmlns:a="http://schemas.openxmlformats.org/drawingml/2006/main" xmlns:r="http://schemas.openxmlformats.org/officeDocument/2006/relationships" xmlns:p="http://schemas.openxmlformats.org/presentationml/2006/main">
-  <p:cSld name="Slide 22">
-    <p:bg>
-      <p:bgPr>
-        <a:solidFill>
-          <a:srgbClr val="F7F2E7"/>
-        </a:solidFill>
-      </p:bgPr>
-    </p:bg>
-    <p:spTree>
-      <p:nvGrpSpPr>
-        <p:cNvPr id="1" name=""/>
-        <p:cNvGrpSpPr/>
-        <p:nvPr/>
-      </p:nvGrpSpPr>
-      <p:grpSpPr>
-        <a:xfrm>
-          <a:off x="0" y="0"/>
-          <a:ext cx="0" cy="0"/>
-          <a:chOff x="0" y="0"/>
-          <a:chExt cx="0" cy="0"/>
-        </a:xfrm>
-      </p:grpSpPr>
-      <p:sp>
-        <p:nvSpPr>
-          <p:cNvPr id="2" name="Shape 0"/>
-          <p:cNvSpPr/>
-          <p:nvPr/>
-        </p:nvSpPr>
-        <p:spPr>
-          <a:xfrm>
-            <a:off x="0" y="0"/>
-            <a:ext cx="12188952" cy="822960"/>
-          </a:xfrm>
-          <a:prstGeom prst="rect">
-            <a:avLst/>
-          </a:prstGeom>
-          <a:solidFill>
-            <a:srgbClr val="0B2545"/>
-          </a:solidFill>
-          <a:ln w="12700">
-            <a:solidFill>
-              <a:srgbClr val="0B2545"/>
-            </a:solidFill>
-            <a:prstDash val="solid"/>
-          </a:ln>
-        </p:spPr>
-      </p:sp>
-      <p:sp>
-        <p:nvSpPr>
-          <p:cNvPr id="3" name="Text 1"/>
-          <p:cNvSpPr/>
-          <p:nvPr/>
-        </p:nvSpPr>
-        <p:spPr>
-          <a:xfrm>
-            <a:off x="365760" y="109728"/>
-            <a:ext cx="11457432" cy="457200"/>
-          </a:xfrm>
-          <a:prstGeom prst="rect">
-            <a:avLst/>
-          </a:prstGeom>
-          <a:noFill/>
-          <a:ln/>
-        </p:spPr>
-        <p:txBody>
-          <a:bodyPr wrap="square" rtlCol="0" anchor="ctr"/>
-          <a:lstStyle/>
-          <a:p>
-            <a:pPr indent="0" marL="0">
-              <a:buNone/>
-            </a:pPr>
-            <a:r>
-              <a:rPr lang="en-US" sz="2400" b="1" dirty="0">
-                <a:solidFill>
-                  <a:srgbClr val="FFFFFF"/>
-                </a:solidFill>
-                <a:latin typeface="Calibri" pitchFamily="34" charset="0"/>
-                <a:ea typeface="Calibri" pitchFamily="34" charset="-122"/>
-                <a:cs typeface="Calibri" pitchFamily="34" charset="-120"/>
-              </a:rPr>
-              <a:t>What we're asking each partner type to do</a:t>
-            </a:r>
-            <a:endParaRPr lang="en-US" sz="2400" dirty="0"/>
-          </a:p>
-        </p:txBody>
-      </p:sp>
-      <p:sp>
-        <p:nvSpPr>
-          <p:cNvPr id="4" name="Text 2"/>
-          <p:cNvSpPr/>
-          <p:nvPr/>
-        </p:nvSpPr>
-        <p:spPr>
-          <a:xfrm>
-            <a:off x="365760" y="457200"/>
-            <a:ext cx="11457432" cy="320040"/>
-          </a:xfrm>
-          <a:prstGeom prst="rect">
-            <a:avLst/>
-          </a:prstGeom>
-          <a:noFill/>
-          <a:ln/>
-        </p:spPr>
-        <p:txBody>
-          <a:bodyPr wrap="square" rtlCol="0" anchor="ctr"/>
-          <a:lstStyle/>
-          <a:p>
-            <a:pPr indent="0" marL="0">
-              <a:buNone/>
-            </a:pPr>
-            <a:r>
-              <a:rPr lang="en-US" sz="1200" i="1" dirty="0">
-                <a:solidFill>
-                  <a:srgbClr val="D4A24C"/>
-                </a:solidFill>
-                <a:latin typeface="Calibri" pitchFamily="34" charset="0"/>
-                <a:ea typeface="Calibri" pitchFamily="34" charset="-122"/>
-                <a:cs typeface="Calibri" pitchFamily="34" charset="-120"/>
-              </a:rPr>
-              <a:t>Specific, named, sized.</a:t>
-            </a:r>
-            <a:endParaRPr lang="en-US" sz="1200" dirty="0"/>
-          </a:p>
-        </p:txBody>
-      </p:sp>
-      <p:sp>
-        <p:nvSpPr>
-          <p:cNvPr id="5" name="Text 3"/>
-          <p:cNvSpPr/>
-          <p:nvPr/>
-        </p:nvSpPr>
-        <p:spPr>
-          <a:xfrm>
-            <a:off x="548640" y="1097280"/>
-            <a:ext cx="11091672" cy="5120640"/>
-          </a:xfrm>
-          <a:prstGeom prst="rect">
-            <a:avLst/>
-          </a:prstGeom>
-          <a:noFill/>
-          <a:ln/>
-        </p:spPr>
-        <p:txBody>
-          <a:bodyPr wrap="square" rtlCol="0" anchor="t"/>
-          <a:lstStyle/>
-          <a:p>
-            <a:pPr marL="342900" indent="-342900">
-              <a:spcAft>
-                <a:spcPts val="600"/>
-              </a:spcAft>
-              <a:buSzPct val="100000"/>
-              <a:buChar char="■"/>
-            </a:pPr>
-            <a:r>
-              <a:rPr lang="en-US" sz="1600" dirty="0">
-                <a:solidFill>
-                  <a:srgbClr val="1A1A1A"/>
-                </a:solidFill>
-                <a:latin typeface="Calibri" pitchFamily="34" charset="0"/>
-                <a:ea typeface="Calibri" pitchFamily="34" charset="-122"/>
-                <a:cs typeface="Calibri" pitchFamily="34" charset="-120"/>
-              </a:rPr>
-              <a:t>United Way (Waco-McLennan + Greater Austin): convene the corridor table; co-fund the backbone coordinator FTE in each pod (~$120K each).</a:t>
-            </a:r>
-            <a:endParaRPr lang="en-US" sz="1600" dirty="0"/>
-          </a:p>
-          <a:p>
-            <a:pPr marL="342900" indent="-342900">
-              <a:spcAft>
-                <a:spcPts val="600"/>
-              </a:spcAft>
-              <a:buSzPct val="100000"/>
-              <a:buChar char="■"/>
-            </a:pPr>
-            <a:r>
-              <a:rPr lang="en-US" sz="1600" dirty="0">
-                <a:solidFill>
-                  <a:srgbClr val="1A1A1A"/>
-                </a:solidFill>
-                <a:latin typeface="Calibri" pitchFamily="34" charset="0"/>
-                <a:ea typeface="Calibri" pitchFamily="34" charset="-122"/>
-                <a:cs typeface="Calibri" pitchFamily="34" charset="-120"/>
-              </a:rPr>
-              <a:t>STARRY + 100 BMCT + AAUL: become the lead direct-service operators. Receive Sankofa Men toolkit + RPLICE access + co-branded recruitment.</a:t>
-            </a:r>
-            <a:endParaRPr lang="en-US" sz="1600" dirty="0"/>
-          </a:p>
-          <a:p>
-            <a:pPr marL="342900" indent="-342900">
-              <a:spcAft>
-                <a:spcPts val="600"/>
-              </a:spcAft>
-              <a:buSzPct val="100000"/>
-              <a:buChar char="■"/>
-            </a:pPr>
-            <a:r>
-              <a:rPr lang="en-US" sz="1600" dirty="0">
-                <a:solidFill>
-                  <a:srgbClr val="1A1A1A"/>
-                </a:solidFill>
-                <a:latin typeface="Calibri" pitchFamily="34" charset="0"/>
-                <a:ea typeface="Calibri" pitchFamily="34" charset="-122"/>
-                <a:cs typeface="Calibri" pitchFamily="34" charset="-120"/>
-              </a:rPr>
-              <a:t>BBBS Lone Star: open the existing waitlist to a coordinated Black-male recruitment campaign anchored by Sankofa Men + 100 BMCT.</a:t>
-            </a:r>
-            <a:endParaRPr lang="en-US" sz="1600" dirty="0"/>
-          </a:p>
-          <a:p>
-            <a:pPr marL="342900" indent="-342900">
-              <a:spcAft>
-                <a:spcPts val="600"/>
-              </a:spcAft>
-              <a:buSzPct val="100000"/>
-              <a:buChar char="■"/>
-            </a:pPr>
-            <a:r>
-              <a:rPr lang="en-US" sz="1600" dirty="0">
-                <a:solidFill>
-                  <a:srgbClr val="1A1A1A"/>
-                </a:solidFill>
-                <a:latin typeface="Calibri" pitchFamily="34" charset="0"/>
-                <a:ea typeface="Calibri" pitchFamily="34" charset="-122"/>
-                <a:cs typeface="Calibri" pitchFamily="34" charset="-120"/>
-              </a:rPr>
-              <a:t>Waco ISD + AISD + Manor + Del Valle + Pflugerville: campus-level data-sharing MOU; mentor access during the school day; behavior-incident referrals via RPLICE.</a:t>
-            </a:r>
-            <a:endParaRPr lang="en-US" sz="1600" dirty="0"/>
-          </a:p>
-          <a:p>
-            <a:pPr marL="342900" indent="-342900">
-              <a:spcAft>
-                <a:spcPts val="600"/>
-              </a:spcAft>
-              <a:buSzPct val="100000"/>
-              <a:buChar char="■"/>
-            </a:pPr>
-            <a:r>
-              <a:rPr lang="en-US" sz="1600" dirty="0">
-                <a:solidFill>
-                  <a:srgbClr val="1A1A1A"/>
-                </a:solidFill>
-                <a:latin typeface="Calibri" pitchFamily="34" charset="0"/>
-                <a:ea typeface="Calibri" pitchFamily="34" charset="-122"/>
-                <a:cs typeface="Calibri" pitchFamily="34" charset="-120"/>
-              </a:rPr>
-              <a:t>Baylor + UT Austin + Huston-Tillotson + MCC + ACC: mentor pipeline (work-study + service-learning), evaluation partnership.</a:t>
-            </a:r>
-            <a:endParaRPr lang="en-US" sz="1600" dirty="0"/>
-          </a:p>
-          <a:p>
-            <a:pPr marL="342900" indent="-342900">
-              <a:spcAft>
-                <a:spcPts val="600"/>
-              </a:spcAft>
-              <a:buSzPct val="100000"/>
-              <a:buChar char="■"/>
-            </a:pPr>
-            <a:r>
-              <a:rPr lang="en-US" sz="1600" dirty="0">
-                <a:solidFill>
-                  <a:srgbClr val="1A1A1A"/>
-                </a:solidFill>
-                <a:latin typeface="Calibri" pitchFamily="34" charset="0"/>
-                <a:ea typeface="Calibri" pitchFamily="34" charset="-122"/>
-                <a:cs typeface="Calibri" pitchFamily="34" charset="-120"/>
-              </a:rPr>
-              <a:t>Corporate (H-E-B, Dell, USAA, Tito's, McLane, Baylor Healthcare, Indeed, Google): paid mentor release time + cash sponsorship + employee-resource-group activation.</a:t>
-            </a:r>
-            <a:endParaRPr lang="en-US" sz="1600" dirty="0"/>
-          </a:p>
-          <a:p>
-            <a:pPr marL="342900" indent="-342900">
-              <a:spcAft>
-                <a:spcPts val="600"/>
-              </a:spcAft>
-              <a:buSzPct val="100000"/>
-              <a:buChar char="■"/>
-            </a:pPr>
-            <a:r>
-              <a:rPr lang="en-US" sz="1600" dirty="0">
-                <a:solidFill>
-                  <a:srgbClr val="1A1A1A"/>
-                </a:solidFill>
-                <a:latin typeface="Calibri" pitchFamily="34" charset="0"/>
-                <a:ea typeface="Calibri" pitchFamily="34" charset="-122"/>
-                <a:cs typeface="Calibri" pitchFamily="34" charset="-120"/>
-              </a:rPr>
-              <a:t>Faith leaders: pulpit recruitment of Black men 25–55 willing to commit 4 hrs/month for 24 months.</a:t>
-            </a:r>
-            <a:endParaRPr lang="en-US" sz="1600" dirty="0"/>
-          </a:p>
-        </p:txBody>
-      </p:sp>
-      <p:sp>
-        <p:nvSpPr>
-          <p:cNvPr id="6" name="Text 4"/>
-          <p:cNvSpPr/>
-          <p:nvPr/>
-        </p:nvSpPr>
-        <p:spPr>
-          <a:xfrm>
-            <a:off x="365760" y="6565392"/>
-            <a:ext cx="11457432" cy="228600"/>
-          </a:xfrm>
-          <a:prstGeom prst="rect">
-            <a:avLst/>
-          </a:prstGeom>
-          <a:noFill/>
-          <a:ln/>
-        </p:spPr>
-        <p:txBody>
-          <a:bodyPr wrap="square" rtlCol="0" anchor="ctr"/>
-          <a:lstStyle/>
-          <a:p>
-            <a:pPr indent="0" marL="0">
-              <a:buNone/>
-            </a:pPr>
-            <a:r>
-              <a:rPr lang="en-US" sz="900" dirty="0">
-                <a:solidFill>
-                  <a:srgbClr val="5A6470"/>
-                </a:solidFill>
-                <a:latin typeface="Calibri" pitchFamily="34" charset="0"/>
-                <a:ea typeface="Calibri" pitchFamily="34" charset="-122"/>
-                <a:cs typeface="Calibri" pitchFamily="34" charset="-120"/>
-              </a:rPr>
-              <a:t>TCAF · Solution · Partner asks · April 17, 2026</a:t>
-            </a:r>
-            <a:endParaRPr lang="en-US" sz="900" dirty="0"/>
-          </a:p>
-        </p:txBody>
-      </p:sp>
-    </p:spTree>
-  </p:cSld>
-  <p:clrMapOvr>
-    <a:masterClrMapping/>
-  </p:clrMapOvr>
-</p:sld>
-</file>
-
 <file path=ppt/slides/slide23.xml><?xml version="1.0" encoding="utf-8"?>
 <p:sld xmlns:a="http://schemas.openxmlformats.org/drawingml/2006/main" xmlns:r="http://schemas.openxmlformats.org/officeDocument/2006/relationships" xmlns:p="http://schemas.openxmlformats.org/presentationml/2006/main">
   <p:cSld name="Slide 23">
@@ -15227,7 +15394,7 @@
                 <a:ea typeface="Calibri" pitchFamily="34" charset="-122"/>
                 <a:cs typeface="Calibri" pitchFamily="34" charset="-120"/>
               </a:rPr>
-              <a:t>Next 30 / 60 / 90 days</a:t>
+              <a:t>What we're asking each partner type to do</a:t>
             </a:r>
             <a:endParaRPr lang="en-US" sz="2400" dirty="0"/>
           </a:p>
@@ -15266,6 +15433,349 @@
                 <a:ea typeface="Calibri" pitchFamily="34" charset="-122"/>
                 <a:cs typeface="Calibri" pitchFamily="34" charset="-120"/>
               </a:rPr>
+              <a:t>Specific, named, sized.</a:t>
+            </a:r>
+            <a:endParaRPr lang="en-US" sz="1200" dirty="0"/>
+          </a:p>
+        </p:txBody>
+      </p:sp>
+      <p:sp>
+        <p:nvSpPr>
+          <p:cNvPr id="5" name="Text 3"/>
+          <p:cNvSpPr/>
+          <p:nvPr/>
+        </p:nvSpPr>
+        <p:spPr>
+          <a:xfrm>
+            <a:off x="548640" y="1097280"/>
+            <a:ext cx="11091672" cy="5120640"/>
+          </a:xfrm>
+          <a:prstGeom prst="rect">
+            <a:avLst/>
+          </a:prstGeom>
+          <a:noFill/>
+          <a:ln/>
+        </p:spPr>
+        <p:txBody>
+          <a:bodyPr wrap="square" rtlCol="0" anchor="t"/>
+          <a:lstStyle/>
+          <a:p>
+            <a:pPr marL="342900" indent="-342900">
+              <a:spcAft>
+                <a:spcPts val="600"/>
+              </a:spcAft>
+              <a:buSzPct val="100000"/>
+              <a:buChar char="■"/>
+            </a:pPr>
+            <a:r>
+              <a:rPr lang="en-US" sz="1600" dirty="0">
+                <a:solidFill>
+                  <a:srgbClr val="1A1A1A"/>
+                </a:solidFill>
+                <a:latin typeface="Calibri" pitchFamily="34" charset="0"/>
+                <a:ea typeface="Calibri" pitchFamily="34" charset="-122"/>
+                <a:cs typeface="Calibri" pitchFamily="34" charset="-120"/>
+              </a:rPr>
+              <a:t>United Way (Waco-McLennan + Greater Austin): convene the corridor table; co-fund the backbone coordinator FTE in each pod (~$120K each).</a:t>
+            </a:r>
+            <a:endParaRPr lang="en-US" sz="1600" dirty="0"/>
+          </a:p>
+          <a:p>
+            <a:pPr marL="342900" indent="-342900">
+              <a:spcAft>
+                <a:spcPts val="600"/>
+              </a:spcAft>
+              <a:buSzPct val="100000"/>
+              <a:buChar char="■"/>
+            </a:pPr>
+            <a:r>
+              <a:rPr lang="en-US" sz="1600" dirty="0">
+                <a:solidFill>
+                  <a:srgbClr val="1A1A1A"/>
+                </a:solidFill>
+                <a:latin typeface="Calibri" pitchFamily="34" charset="0"/>
+                <a:ea typeface="Calibri" pitchFamily="34" charset="-122"/>
+                <a:cs typeface="Calibri" pitchFamily="34" charset="-120"/>
+              </a:rPr>
+              <a:t>STARRY + 100 BMCT + AAUL: become the lead direct-service operators. Receive Sankofa Men toolkit + RPLICE access + co-branded recruitment.</a:t>
+            </a:r>
+            <a:endParaRPr lang="en-US" sz="1600" dirty="0"/>
+          </a:p>
+          <a:p>
+            <a:pPr marL="342900" indent="-342900">
+              <a:spcAft>
+                <a:spcPts val="600"/>
+              </a:spcAft>
+              <a:buSzPct val="100000"/>
+              <a:buChar char="■"/>
+            </a:pPr>
+            <a:r>
+              <a:rPr lang="en-US" sz="1600" dirty="0">
+                <a:solidFill>
+                  <a:srgbClr val="1A1A1A"/>
+                </a:solidFill>
+                <a:latin typeface="Calibri" pitchFamily="34" charset="0"/>
+                <a:ea typeface="Calibri" pitchFamily="34" charset="-122"/>
+                <a:cs typeface="Calibri" pitchFamily="34" charset="-120"/>
+              </a:rPr>
+              <a:t>BBBS Lone Star: open the existing waitlist to a coordinated Black-male recruitment campaign anchored by Sankofa Men + 100 BMCT.</a:t>
+            </a:r>
+            <a:endParaRPr lang="en-US" sz="1600" dirty="0"/>
+          </a:p>
+          <a:p>
+            <a:pPr marL="342900" indent="-342900">
+              <a:spcAft>
+                <a:spcPts val="600"/>
+              </a:spcAft>
+              <a:buSzPct val="100000"/>
+              <a:buChar char="■"/>
+            </a:pPr>
+            <a:r>
+              <a:rPr lang="en-US" sz="1600" dirty="0">
+                <a:solidFill>
+                  <a:srgbClr val="1A1A1A"/>
+                </a:solidFill>
+                <a:latin typeface="Calibri" pitchFamily="34" charset="0"/>
+                <a:ea typeface="Calibri" pitchFamily="34" charset="-122"/>
+                <a:cs typeface="Calibri" pitchFamily="34" charset="-120"/>
+              </a:rPr>
+              <a:t>Waco ISD + AISD + Manor + Del Valle + Pflugerville: campus-level data-sharing MOU; mentor access during the school day; behavior-incident referrals via RPLICE.</a:t>
+            </a:r>
+            <a:endParaRPr lang="en-US" sz="1600" dirty="0"/>
+          </a:p>
+          <a:p>
+            <a:pPr marL="342900" indent="-342900">
+              <a:spcAft>
+                <a:spcPts val="600"/>
+              </a:spcAft>
+              <a:buSzPct val="100000"/>
+              <a:buChar char="■"/>
+            </a:pPr>
+            <a:r>
+              <a:rPr lang="en-US" sz="1600" dirty="0">
+                <a:solidFill>
+                  <a:srgbClr val="1A1A1A"/>
+                </a:solidFill>
+                <a:latin typeface="Calibri" pitchFamily="34" charset="0"/>
+                <a:ea typeface="Calibri" pitchFamily="34" charset="-122"/>
+                <a:cs typeface="Calibri" pitchFamily="34" charset="-120"/>
+              </a:rPr>
+              <a:t>Baylor + UT Austin + Huston-Tillotson + MCC + ACC: mentor pipeline (work-study + service-learning), evaluation partnership.</a:t>
+            </a:r>
+            <a:endParaRPr lang="en-US" sz="1600" dirty="0"/>
+          </a:p>
+          <a:p>
+            <a:pPr marL="342900" indent="-342900">
+              <a:spcAft>
+                <a:spcPts val="600"/>
+              </a:spcAft>
+              <a:buSzPct val="100000"/>
+              <a:buChar char="■"/>
+            </a:pPr>
+            <a:r>
+              <a:rPr lang="en-US" sz="1600" dirty="0">
+                <a:solidFill>
+                  <a:srgbClr val="1A1A1A"/>
+                </a:solidFill>
+                <a:latin typeface="Calibri" pitchFamily="34" charset="0"/>
+                <a:ea typeface="Calibri" pitchFamily="34" charset="-122"/>
+                <a:cs typeface="Calibri" pitchFamily="34" charset="-120"/>
+              </a:rPr>
+              <a:t>Corporate (H-E-B, Dell, USAA, Tito's, McLane, Baylor Healthcare, Indeed, Google): paid mentor release time + cash sponsorship + employee-resource-group activation.</a:t>
+            </a:r>
+            <a:endParaRPr lang="en-US" sz="1600" dirty="0"/>
+          </a:p>
+          <a:p>
+            <a:pPr marL="342900" indent="-342900">
+              <a:spcAft>
+                <a:spcPts val="600"/>
+              </a:spcAft>
+              <a:buSzPct val="100000"/>
+              <a:buChar char="■"/>
+            </a:pPr>
+            <a:r>
+              <a:rPr lang="en-US" sz="1600" dirty="0">
+                <a:solidFill>
+                  <a:srgbClr val="1A1A1A"/>
+                </a:solidFill>
+                <a:latin typeface="Calibri" pitchFamily="34" charset="0"/>
+                <a:ea typeface="Calibri" pitchFamily="34" charset="-122"/>
+                <a:cs typeface="Calibri" pitchFamily="34" charset="-120"/>
+              </a:rPr>
+              <a:t>Faith leaders: pulpit recruitment of Black men 25–55 willing to commit 4 hrs/month for 24 months.</a:t>
+            </a:r>
+            <a:endParaRPr lang="en-US" sz="1600" dirty="0"/>
+          </a:p>
+        </p:txBody>
+      </p:sp>
+      <p:sp>
+        <p:nvSpPr>
+          <p:cNvPr id="6" name="Text 4"/>
+          <p:cNvSpPr/>
+          <p:nvPr/>
+        </p:nvSpPr>
+        <p:spPr>
+          <a:xfrm>
+            <a:off x="365760" y="6565392"/>
+            <a:ext cx="11457432" cy="228600"/>
+          </a:xfrm>
+          <a:prstGeom prst="rect">
+            <a:avLst/>
+          </a:prstGeom>
+          <a:noFill/>
+          <a:ln/>
+        </p:spPr>
+        <p:txBody>
+          <a:bodyPr wrap="square" rtlCol="0" anchor="ctr"/>
+          <a:lstStyle/>
+          <a:p>
+            <a:pPr indent="0" marL="0">
+              <a:buNone/>
+            </a:pPr>
+            <a:r>
+              <a:rPr lang="en-US" sz="900" dirty="0">
+                <a:solidFill>
+                  <a:srgbClr val="5A6470"/>
+                </a:solidFill>
+                <a:latin typeface="Calibri" pitchFamily="34" charset="0"/>
+                <a:ea typeface="Calibri" pitchFamily="34" charset="-122"/>
+                <a:cs typeface="Calibri" pitchFamily="34" charset="-120"/>
+              </a:rPr>
+              <a:t>TCAF · Solution · Partner asks · April 17, 2026</a:t>
+            </a:r>
+            <a:endParaRPr lang="en-US" sz="900" dirty="0"/>
+          </a:p>
+        </p:txBody>
+      </p:sp>
+    </p:spTree>
+  </p:cSld>
+  <p:clrMapOvr>
+    <a:masterClrMapping/>
+  </p:clrMapOvr>
+</p:sld>
+</file>
+
+<file path=ppt/slides/slide24.xml><?xml version="1.0" encoding="utf-8"?>
+<p:sld xmlns:a="http://schemas.openxmlformats.org/drawingml/2006/main" xmlns:r="http://schemas.openxmlformats.org/officeDocument/2006/relationships" xmlns:p="http://schemas.openxmlformats.org/presentationml/2006/main">
+  <p:cSld name="Slide 24">
+    <p:bg>
+      <p:bgPr>
+        <a:solidFill>
+          <a:srgbClr val="F7F2E7"/>
+        </a:solidFill>
+      </p:bgPr>
+    </p:bg>
+    <p:spTree>
+      <p:nvGrpSpPr>
+        <p:cNvPr id="1" name=""/>
+        <p:cNvGrpSpPr/>
+        <p:nvPr/>
+      </p:nvGrpSpPr>
+      <p:grpSpPr>
+        <a:xfrm>
+          <a:off x="0" y="0"/>
+          <a:ext cx="0" cy="0"/>
+          <a:chOff x="0" y="0"/>
+          <a:chExt cx="0" cy="0"/>
+        </a:xfrm>
+      </p:grpSpPr>
+      <p:sp>
+        <p:nvSpPr>
+          <p:cNvPr id="2" name="Shape 0"/>
+          <p:cNvSpPr/>
+          <p:nvPr/>
+        </p:nvSpPr>
+        <p:spPr>
+          <a:xfrm>
+            <a:off x="0" y="0"/>
+            <a:ext cx="12188952" cy="822960"/>
+          </a:xfrm>
+          <a:prstGeom prst="rect">
+            <a:avLst/>
+          </a:prstGeom>
+          <a:solidFill>
+            <a:srgbClr val="0B2545"/>
+          </a:solidFill>
+          <a:ln w="12700">
+            <a:solidFill>
+              <a:srgbClr val="0B2545"/>
+            </a:solidFill>
+            <a:prstDash val="solid"/>
+          </a:ln>
+        </p:spPr>
+      </p:sp>
+      <p:sp>
+        <p:nvSpPr>
+          <p:cNvPr id="3" name="Text 1"/>
+          <p:cNvSpPr/>
+          <p:nvPr/>
+        </p:nvSpPr>
+        <p:spPr>
+          <a:xfrm>
+            <a:off x="365760" y="109728"/>
+            <a:ext cx="11457432" cy="457200"/>
+          </a:xfrm>
+          <a:prstGeom prst="rect">
+            <a:avLst/>
+          </a:prstGeom>
+          <a:noFill/>
+          <a:ln/>
+        </p:spPr>
+        <p:txBody>
+          <a:bodyPr wrap="square" rtlCol="0" anchor="ctr"/>
+          <a:lstStyle/>
+          <a:p>
+            <a:pPr indent="0" marL="0">
+              <a:buNone/>
+            </a:pPr>
+            <a:r>
+              <a:rPr lang="en-US" sz="2400" b="1" dirty="0">
+                <a:solidFill>
+                  <a:srgbClr val="FFFFFF"/>
+                </a:solidFill>
+                <a:latin typeface="Calibri" pitchFamily="34" charset="0"/>
+                <a:ea typeface="Calibri" pitchFamily="34" charset="-122"/>
+                <a:cs typeface="Calibri" pitchFamily="34" charset="-120"/>
+              </a:rPr>
+              <a:t>Next 30 / 60 / 90 days</a:t>
+            </a:r>
+            <a:endParaRPr lang="en-US" sz="2400" dirty="0"/>
+          </a:p>
+        </p:txBody>
+      </p:sp>
+      <p:sp>
+        <p:nvSpPr>
+          <p:cNvPr id="4" name="Text 2"/>
+          <p:cNvSpPr/>
+          <p:nvPr/>
+        </p:nvSpPr>
+        <p:spPr>
+          <a:xfrm>
+            <a:off x="365760" y="457200"/>
+            <a:ext cx="11457432" cy="320040"/>
+          </a:xfrm>
+          <a:prstGeom prst="rect">
+            <a:avLst/>
+          </a:prstGeom>
+          <a:noFill/>
+          <a:ln/>
+        </p:spPr>
+        <p:txBody>
+          <a:bodyPr wrap="square" rtlCol="0" anchor="ctr"/>
+          <a:lstStyle/>
+          <a:p>
+            <a:pPr indent="0" marL="0">
+              <a:buNone/>
+            </a:pPr>
+            <a:r>
+              <a:rPr lang="en-US" sz="1200" i="1" dirty="0">
+                <a:solidFill>
+                  <a:srgbClr val="D4A24C"/>
+                </a:solidFill>
+                <a:latin typeface="Calibri" pitchFamily="34" charset="0"/>
+                <a:ea typeface="Calibri" pitchFamily="34" charset="-122"/>
+                <a:cs typeface="Calibri" pitchFamily="34" charset="-120"/>
+              </a:rPr>
               <a:t>Concrete milestones.</a:t>
             </a:r>
             <a:endParaRPr lang="en-US" sz="1200" dirty="0"/>
@@ -15274,7 +15784,7 @@
       </p:sp>
       <p:graphicFrame>
         <p:nvGraphicFramePr>
-          <p:cNvPr id="24" name="Table 0"/>
+          <p:cNvPr id="25" name="Table 0"/>
           <p:cNvGraphicFramePr>
             <a:graphicFrameLocks noGrp="1"/>
           </p:cNvGraphicFramePr>
@@ -16447,9 +16957,9 @@
 </p:sld>
 </file>
 
-<file path=ppt/slides/slide24.xml><?xml version="1.0" encoding="utf-8"?>
+<file path=ppt/slides/slide25.xml><?xml version="1.0" encoding="utf-8"?>
 <p:sld xmlns:a="http://schemas.openxmlformats.org/drawingml/2006/main" xmlns:r="http://schemas.openxmlformats.org/officeDocument/2006/relationships" xmlns:p="http://schemas.openxmlformats.org/presentationml/2006/main">
-  <p:cSld name="Slide 24">
+  <p:cSld name="Slide 25">
     <p:bg>
       <p:bgPr>
         <a:solidFill>
@@ -16661,6 +17171,307 @@
     <p:bg>
       <p:bgPr>
         <a:solidFill>
+          <a:srgbClr val="F7F2E7"/>
+        </a:solidFill>
+      </p:bgPr>
+    </p:bg>
+    <p:spTree>
+      <p:nvGrpSpPr>
+        <p:cNvPr id="1" name=""/>
+        <p:cNvGrpSpPr/>
+        <p:nvPr/>
+      </p:nvGrpSpPr>
+      <p:grpSpPr>
+        <a:xfrm>
+          <a:off x="0" y="0"/>
+          <a:ext cx="0" cy="0"/>
+          <a:chOff x="0" y="0"/>
+          <a:chExt cx="0" cy="0"/>
+        </a:xfrm>
+      </p:grpSpPr>
+      <p:sp>
+        <p:nvSpPr>
+          <p:cNvPr id="2" name="Shape 0"/>
+          <p:cNvSpPr/>
+          <p:nvPr/>
+        </p:nvSpPr>
+        <p:spPr>
+          <a:xfrm>
+            <a:off x="0" y="0"/>
+            <a:ext cx="12188952" cy="822960"/>
+          </a:xfrm>
+          <a:prstGeom prst="rect">
+            <a:avLst/>
+          </a:prstGeom>
+          <a:solidFill>
+            <a:srgbClr val="0B2545"/>
+          </a:solidFill>
+          <a:ln w="12700">
+            <a:solidFill>
+              <a:srgbClr val="0B2545"/>
+            </a:solidFill>
+            <a:prstDash val="solid"/>
+          </a:ln>
+        </p:spPr>
+      </p:sp>
+      <p:sp>
+        <p:nvSpPr>
+          <p:cNvPr id="3" name="Text 1"/>
+          <p:cNvSpPr/>
+          <p:nvPr/>
+        </p:nvSpPr>
+        <p:spPr>
+          <a:xfrm>
+            <a:off x="365760" y="109728"/>
+            <a:ext cx="11457432" cy="457200"/>
+          </a:xfrm>
+          <a:prstGeom prst="rect">
+            <a:avLst/>
+          </a:prstGeom>
+          <a:noFill/>
+          <a:ln/>
+        </p:spPr>
+        <p:txBody>
+          <a:bodyPr wrap="square" rtlCol="0" anchor="ctr"/>
+          <a:lstStyle/>
+          <a:p>
+            <a:pPr indent="0" marL="0">
+              <a:buNone/>
+            </a:pPr>
+            <a:r>
+              <a:rPr lang="en-US" sz="2400" b="1" dirty="0">
+                <a:solidFill>
+                  <a:srgbClr val="FFFFFF"/>
+                </a:solidFill>
+                <a:latin typeface="Calibri" pitchFamily="34" charset="0"/>
+                <a:ea typeface="Calibri" pitchFamily="34" charset="-122"/>
+                <a:cs typeface="Calibri" pitchFamily="34" charset="-120"/>
+              </a:rPr>
+              <a:t>Why this picture matters now</a:t>
+            </a:r>
+            <a:endParaRPr lang="en-US" sz="2400" dirty="0"/>
+          </a:p>
+        </p:txBody>
+      </p:sp>
+      <p:sp>
+        <p:nvSpPr>
+          <p:cNvPr id="4" name="Text 2"/>
+          <p:cNvSpPr/>
+          <p:nvPr/>
+        </p:nvSpPr>
+        <p:spPr>
+          <a:xfrm>
+            <a:off x="365760" y="457200"/>
+            <a:ext cx="11457432" cy="320040"/>
+          </a:xfrm>
+          <a:prstGeom prst="rect">
+            <a:avLst/>
+          </a:prstGeom>
+          <a:noFill/>
+          <a:ln/>
+        </p:spPr>
+        <p:txBody>
+          <a:bodyPr wrap="square" rtlCol="0" anchor="ctr"/>
+          <a:lstStyle/>
+          <a:p>
+            <a:pPr indent="0" marL="0">
+              <a:buNone/>
+            </a:pPr>
+            <a:r>
+              <a:rPr lang="en-US" sz="1200" i="1" dirty="0">
+                <a:solidFill>
+                  <a:srgbClr val="D4A24C"/>
+                </a:solidFill>
+                <a:latin typeface="Calibri" pitchFamily="34" charset="0"/>
+                <a:ea typeface="Calibri" pitchFamily="34" charset="-122"/>
+                <a:cs typeface="Calibri" pitchFamily="34" charset="-120"/>
+              </a:rPr>
+              <a:t>Three fatherless boys in 76704 today are next year's headlines if no one intervenes.</a:t>
+            </a:r>
+            <a:endParaRPr lang="en-US" sz="1200" dirty="0"/>
+          </a:p>
+        </p:txBody>
+      </p:sp>
+      <p:sp>
+        <p:nvSpPr>
+          <p:cNvPr id="5" name="Text 3"/>
+          <p:cNvSpPr/>
+          <p:nvPr/>
+        </p:nvSpPr>
+        <p:spPr>
+          <a:xfrm>
+            <a:off x="548640" y="1097280"/>
+            <a:ext cx="11091672" cy="5120640"/>
+          </a:xfrm>
+          <a:prstGeom prst="rect">
+            <a:avLst/>
+          </a:prstGeom>
+          <a:noFill/>
+          <a:ln/>
+        </p:spPr>
+        <p:txBody>
+          <a:bodyPr wrap="square" rtlCol="0" anchor="t"/>
+          <a:lstStyle/>
+          <a:p>
+            <a:pPr marL="342900" indent="-342900">
+              <a:spcAft>
+                <a:spcPts val="600"/>
+              </a:spcAft>
+              <a:buSzPct val="100000"/>
+              <a:buChar char="■"/>
+            </a:pPr>
+            <a:r>
+              <a:rPr lang="en-US" sz="1600" dirty="0">
+                <a:solidFill>
+                  <a:srgbClr val="1A1A1A"/>
+                </a:solidFill>
+                <a:latin typeface="Calibri" pitchFamily="34" charset="0"/>
+                <a:ea typeface="Calibri" pitchFamily="34" charset="-122"/>
+                <a:cs typeface="Calibri" pitchFamily="34" charset="-120"/>
+              </a:rPr>
+              <a:t>In Waco's 76704 ZIP, the violent crime index runs ~2.8× the U.S. average. Most of the boys involved have one common thread: no consistent father figure.</a:t>
+            </a:r>
+            <a:endParaRPr lang="en-US" sz="1600" dirty="0"/>
+          </a:p>
+          <a:p>
+            <a:pPr marL="342900" indent="-342900">
+              <a:spcAft>
+                <a:spcPts val="600"/>
+              </a:spcAft>
+              <a:buSzPct val="100000"/>
+              <a:buChar char="■"/>
+            </a:pPr>
+            <a:r>
+              <a:rPr lang="en-US" sz="1600" dirty="0">
+                <a:solidFill>
+                  <a:srgbClr val="1A1A1A"/>
+                </a:solidFill>
+                <a:latin typeface="Calibri" pitchFamily="34" charset="0"/>
+                <a:ea typeface="Calibri" pitchFamily="34" charset="-122"/>
+                <a:cs typeface="Calibri" pitchFamily="34" charset="-120"/>
+              </a:rPr>
+              <a:t>Waco ISD was just placed at TEA Stage 4 — the most severe discipline rating in Texas — for sending Black students to alternative ed at 3× the rate of their peers.</a:t>
+            </a:r>
+            <a:endParaRPr lang="en-US" sz="1600" dirty="0"/>
+          </a:p>
+          <a:p>
+            <a:pPr marL="342900" indent="-342900">
+              <a:spcAft>
+                <a:spcPts val="600"/>
+              </a:spcAft>
+              <a:buSzPct val="100000"/>
+              <a:buChar char="■"/>
+            </a:pPr>
+            <a:r>
+              <a:rPr lang="en-US" sz="1600" dirty="0">
+                <a:solidFill>
+                  <a:srgbClr val="1A1A1A"/>
+                </a:solidFill>
+                <a:latin typeface="Calibri" pitchFamily="34" charset="0"/>
+                <a:ea typeface="Calibri" pitchFamily="34" charset="-122"/>
+                <a:cs typeface="Calibri" pitchFamily="34" charset="-120"/>
+              </a:rPr>
+              <a:t>Across the I-35 corridor in Austin, the same mechanics play out at a larger scale, accelerated by gentrification displacing Black families from East Austin to Manor, Pflugerville, and Del Valle.</a:t>
+            </a:r>
+            <a:endParaRPr lang="en-US" sz="1600" dirty="0"/>
+          </a:p>
+          <a:p>
+            <a:pPr marL="342900" indent="-342900">
+              <a:spcAft>
+                <a:spcPts val="600"/>
+              </a:spcAft>
+              <a:buSzPct val="100000"/>
+              <a:buChar char="■"/>
+            </a:pPr>
+            <a:r>
+              <a:rPr lang="en-US" sz="1600" dirty="0">
+                <a:solidFill>
+                  <a:srgbClr val="1A1A1A"/>
+                </a:solidFill>
+                <a:latin typeface="Calibri" pitchFamily="34" charset="0"/>
+                <a:ea typeface="Calibri" pitchFamily="34" charset="-122"/>
+                <a:cs typeface="Calibri" pitchFamily="34" charset="-120"/>
+              </a:rPr>
+              <a:t>In both metros, Big Brothers Big Sisters has a publicly acknowledged Black-male-mentor crisis: boys wait roughly twice as long as girls for a match.</a:t>
+            </a:r>
+            <a:endParaRPr lang="en-US" sz="1600" dirty="0"/>
+          </a:p>
+          <a:p>
+            <a:pPr marL="342900" indent="-342900">
+              <a:spcAft>
+                <a:spcPts val="600"/>
+              </a:spcAft>
+              <a:buSzPct val="100000"/>
+              <a:buChar char="■"/>
+            </a:pPr>
+            <a:r>
+              <a:rPr lang="en-US" sz="1600" dirty="0">
+                <a:solidFill>
+                  <a:srgbClr val="1A1A1A"/>
+                </a:solidFill>
+                <a:latin typeface="Calibri" pitchFamily="34" charset="0"/>
+                <a:ea typeface="Calibri" pitchFamily="34" charset="-122"/>
+                <a:cs typeface="Calibri" pitchFamily="34" charset="-120"/>
+              </a:rPr>
+              <a:t>We have a 24-platform AI operating system, a real-time event bus (RPLICE), and a Sankofa Men program ready to deploy. What we need is the partnership table.</a:t>
+            </a:r>
+            <a:endParaRPr lang="en-US" sz="1600" dirty="0"/>
+          </a:p>
+        </p:txBody>
+      </p:sp>
+      <p:sp>
+        <p:nvSpPr>
+          <p:cNvPr id="6" name="Text 4"/>
+          <p:cNvSpPr/>
+          <p:nvPr/>
+        </p:nvSpPr>
+        <p:spPr>
+          <a:xfrm>
+            <a:off x="365760" y="6565392"/>
+            <a:ext cx="11457432" cy="228600"/>
+          </a:xfrm>
+          <a:prstGeom prst="rect">
+            <a:avLst/>
+          </a:prstGeom>
+          <a:noFill/>
+          <a:ln/>
+        </p:spPr>
+        <p:txBody>
+          <a:bodyPr wrap="square" rtlCol="0" anchor="ctr"/>
+          <a:lstStyle/>
+          <a:p>
+            <a:pPr indent="0" marL="0">
+              <a:buNone/>
+            </a:pPr>
+            <a:r>
+              <a:rPr lang="en-US" sz="900" dirty="0">
+                <a:solidFill>
+                  <a:srgbClr val="5A6470"/>
+                </a:solidFill>
+                <a:latin typeface="Calibri" pitchFamily="34" charset="0"/>
+                <a:ea typeface="Calibri" pitchFamily="34" charset="-122"/>
+                <a:cs typeface="Calibri" pitchFamily="34" charset="-120"/>
+              </a:rPr>
+              <a:t>TCAF · Executive Summary · April 17, 2026</a:t>
+            </a:r>
+            <a:endParaRPr lang="en-US" sz="900" dirty="0"/>
+          </a:p>
+        </p:txBody>
+      </p:sp>
+    </p:spTree>
+  </p:cSld>
+  <p:clrMapOvr>
+    <a:masterClrMapping/>
+  </p:clrMapOvr>
+</p:sld>
+</file>
+
+<file path=ppt/slides/slide4.xml><?xml version="1.0" encoding="utf-8"?>
+<p:sld xmlns:a="http://schemas.openxmlformats.org/drawingml/2006/main" xmlns:r="http://schemas.openxmlformats.org/officeDocument/2006/relationships" xmlns:p="http://schemas.openxmlformats.org/presentationml/2006/main">
+  <p:cSld name="Slide 4">
+    <p:bg>
+      <p:bgPr>
+        <a:solidFill>
           <a:srgbClr val="0B2545"/>
         </a:solidFill>
       </p:bgPr>
@@ -16790,9 +17601,9 @@
 </p:sld>
 </file>
 
-<file path=ppt/slides/slide4.xml><?xml version="1.0" encoding="utf-8"?>
+<file path=ppt/slides/slide5.xml><?xml version="1.0" encoding="utf-8"?>
 <p:sld xmlns:a="http://schemas.openxmlformats.org/drawingml/2006/main" xmlns:r="http://schemas.openxmlformats.org/officeDocument/2006/relationships" xmlns:p="http://schemas.openxmlformats.org/presentationml/2006/main">
-  <p:cSld name="Slide 4">
+  <p:cSld name="Slide 5">
     <p:bg>
       <p:bgPr>
         <a:solidFill>
@@ -16919,7 +17730,7 @@
       </p:sp>
       <p:graphicFrame>
         <p:nvGraphicFramePr>
-          <p:cNvPr id="5" name="Table 0"/>
+          <p:cNvPr id="6" name="Table 0"/>
           <p:cNvGraphicFramePr>
             <a:graphicFrameLocks noGrp="1"/>
           </p:cNvGraphicFramePr>
@@ -18746,1179 +19557,6 @@
 </p:sld>
 </file>
 
-<file path=ppt/slides/slide5.xml><?xml version="1.0" encoding="utf-8"?>
-<p:sld xmlns:a="http://schemas.openxmlformats.org/drawingml/2006/main" xmlns:r="http://schemas.openxmlformats.org/officeDocument/2006/relationships" xmlns:p="http://schemas.openxmlformats.org/presentationml/2006/main">
-  <p:cSld name="Slide 5">
-    <p:bg>
-      <p:bgPr>
-        <a:solidFill>
-          <a:srgbClr val="F7F2E7"/>
-        </a:solidFill>
-      </p:bgPr>
-    </p:bg>
-    <p:spTree>
-      <p:nvGrpSpPr>
-        <p:cNvPr id="1" name=""/>
-        <p:cNvGrpSpPr/>
-        <p:nvPr/>
-      </p:nvGrpSpPr>
-      <p:grpSpPr>
-        <a:xfrm>
-          <a:off x="0" y="0"/>
-          <a:ext cx="0" cy="0"/>
-          <a:chOff x="0" y="0"/>
-          <a:chExt cx="0" cy="0"/>
-        </a:xfrm>
-      </p:grpSpPr>
-      <p:sp>
-        <p:nvSpPr>
-          <p:cNvPr id="2" name="Shape 0"/>
-          <p:cNvSpPr/>
-          <p:nvPr/>
-        </p:nvSpPr>
-        <p:spPr>
-          <a:xfrm>
-            <a:off x="0" y="0"/>
-            <a:ext cx="12188952" cy="822960"/>
-          </a:xfrm>
-          <a:prstGeom prst="rect">
-            <a:avLst/>
-          </a:prstGeom>
-          <a:solidFill>
-            <a:srgbClr val="0B2545"/>
-          </a:solidFill>
-          <a:ln w="12700">
-            <a:solidFill>
-              <a:srgbClr val="0B2545"/>
-            </a:solidFill>
-            <a:prstDash val="solid"/>
-          </a:ln>
-        </p:spPr>
-      </p:sp>
-      <p:sp>
-        <p:nvSpPr>
-          <p:cNvPr id="3" name="Text 1"/>
-          <p:cNvSpPr/>
-          <p:nvPr/>
-        </p:nvSpPr>
-        <p:spPr>
-          <a:xfrm>
-            <a:off x="365760" y="109728"/>
-            <a:ext cx="11457432" cy="457200"/>
-          </a:xfrm>
-          <a:prstGeom prst="rect">
-            <a:avLst/>
-          </a:prstGeom>
-          <a:noFill/>
-          <a:ln/>
-        </p:spPr>
-        <p:txBody>
-          <a:bodyPr wrap="square" rtlCol="0" anchor="ctr"/>
-          <a:lstStyle/>
-          <a:p>
-            <a:pPr indent="0" marL="0">
-              <a:buNone/>
-            </a:pPr>
-            <a:r>
-              <a:rPr lang="en-US" sz="2400" b="1" dirty="0">
-                <a:solidFill>
-                  <a:srgbClr val="FFFFFF"/>
-                </a:solidFill>
-                <a:latin typeface="Calibri" pitchFamily="34" charset="0"/>
-                <a:ea typeface="Calibri" pitchFamily="34" charset="-122"/>
-                <a:cs typeface="Calibri" pitchFamily="34" charset="-120"/>
-              </a:rPr>
-              <a:t>The numbers behind the alarm</a:t>
-            </a:r>
-            <a:endParaRPr lang="en-US" sz="2400" dirty="0"/>
-          </a:p>
-        </p:txBody>
-      </p:sp>
-      <p:sp>
-        <p:nvSpPr>
-          <p:cNvPr id="4" name="Text 2"/>
-          <p:cNvSpPr/>
-          <p:nvPr/>
-        </p:nvSpPr>
-        <p:spPr>
-          <a:xfrm>
-            <a:off x="365760" y="457200"/>
-            <a:ext cx="11457432" cy="320040"/>
-          </a:xfrm>
-          <a:prstGeom prst="rect">
-            <a:avLst/>
-          </a:prstGeom>
-          <a:noFill/>
-          <a:ln/>
-        </p:spPr>
-        <p:txBody>
-          <a:bodyPr wrap="square" rtlCol="0" anchor="ctr"/>
-          <a:lstStyle/>
-          <a:p>
-            <a:pPr indent="0" marL="0">
-              <a:buNone/>
-            </a:pPr>
-            <a:r>
-              <a:rPr lang="en-US" sz="1200" i="1" dirty="0">
-                <a:solidFill>
-                  <a:srgbClr val="D4A24C"/>
-                </a:solidFill>
-                <a:latin typeface="Calibri" pitchFamily="34" charset="0"/>
-                <a:ea typeface="Calibri" pitchFamily="34" charset="-122"/>
-                <a:cs typeface="Calibri" pitchFamily="34" charset="-120"/>
-              </a:rPr>
-              <a:t>Waco / McLennan — verified from BLS, ACS, TEA, BestPlaces, USAFacts, TJJD</a:t>
-            </a:r>
-            <a:endParaRPr lang="en-US" sz="1200" dirty="0"/>
-          </a:p>
-        </p:txBody>
-      </p:sp>
-      <p:sp>
-        <p:nvSpPr>
-          <p:cNvPr id="5" name="Shape 3"/>
-          <p:cNvSpPr/>
-          <p:nvPr/>
-        </p:nvSpPr>
-        <p:spPr>
-          <a:xfrm>
-            <a:off x="548640" y="1280160"/>
-            <a:ext cx="2651760" cy="1463040"/>
-          </a:xfrm>
-          <a:prstGeom prst="rect">
-            <a:avLst/>
-          </a:prstGeom>
-          <a:solidFill>
-            <a:srgbClr val="FFFFFF"/>
-          </a:solidFill>
-          <a:ln w="19050">
-            <a:solidFill>
-              <a:srgbClr val="9B1C2E"/>
-            </a:solidFill>
-            <a:prstDash val="solid"/>
-          </a:ln>
-        </p:spPr>
-      </p:sp>
-      <p:sp>
-        <p:nvSpPr>
-          <p:cNvPr id="6" name="Text 4"/>
-          <p:cNvSpPr/>
-          <p:nvPr/>
-        </p:nvSpPr>
-        <p:spPr>
-          <a:xfrm>
-            <a:off x="548640" y="1417320"/>
-            <a:ext cx="2651760" cy="804672"/>
-          </a:xfrm>
-          <a:prstGeom prst="rect">
-            <a:avLst/>
-          </a:prstGeom>
-          <a:noFill/>
-          <a:ln/>
-        </p:spPr>
-        <p:txBody>
-          <a:bodyPr wrap="square" rtlCol="0" anchor="ctr"/>
-          <a:lstStyle/>
-          <a:p>
-            <a:pPr algn="ctr" indent="0" marL="0">
-              <a:buNone/>
-            </a:pPr>
-            <a:r>
-              <a:rPr lang="en-US" sz="3600" b="1" dirty="0">
-                <a:solidFill>
-                  <a:srgbClr val="9B1C2E"/>
-                </a:solidFill>
-                <a:latin typeface="Calibri" pitchFamily="34" charset="0"/>
-                <a:ea typeface="Calibri" pitchFamily="34" charset="-122"/>
-                <a:cs typeface="Calibri" pitchFamily="34" charset="-120"/>
-              </a:rPr>
-              <a:t>2.8×</a:t>
-            </a:r>
-            <a:endParaRPr lang="en-US" sz="3600" dirty="0"/>
-          </a:p>
-        </p:txBody>
-      </p:sp>
-      <p:sp>
-        <p:nvSpPr>
-          <p:cNvPr id="7" name="Text 5"/>
-          <p:cNvSpPr/>
-          <p:nvPr/>
-        </p:nvSpPr>
-        <p:spPr>
-          <a:xfrm>
-            <a:off x="640080" y="2157984"/>
-            <a:ext cx="2468880" cy="512064"/>
-          </a:xfrm>
-          <a:prstGeom prst="rect">
-            <a:avLst/>
-          </a:prstGeom>
-          <a:noFill/>
-          <a:ln/>
-        </p:spPr>
-        <p:txBody>
-          <a:bodyPr wrap="square" rtlCol="0" anchor="ctr"/>
-          <a:lstStyle/>
-          <a:p>
-            <a:pPr algn="ctr" indent="0" marL="0">
-              <a:buNone/>
-            </a:pPr>
-            <a:r>
-              <a:rPr lang="en-US" sz="1100" dirty="0">
-                <a:solidFill>
-                  <a:srgbClr val="2D3E50"/>
-                </a:solidFill>
-                <a:latin typeface="Calibri" pitchFamily="34" charset="0"/>
-                <a:ea typeface="Calibri" pitchFamily="34" charset="-122"/>
-                <a:cs typeface="Calibri" pitchFamily="34" charset="-120"/>
-              </a:rPr>
-              <a:t>76704 violent crime</a:t>
-            </a:r>
-            <a:endParaRPr lang="en-US" sz="1100" dirty="0"/>
-          </a:p>
-          <a:p>
-            <a:pPr algn="ctr" indent="0" marL="0">
-              <a:buNone/>
-            </a:pPr>
-            <a:r>
-              <a:rPr lang="en-US" sz="1100" dirty="0">
-                <a:solidFill>
-                  <a:srgbClr val="2D3E50"/>
-                </a:solidFill>
-                <a:latin typeface="Calibri" pitchFamily="34" charset="0"/>
-                <a:ea typeface="Calibri" pitchFamily="34" charset="-122"/>
-                <a:cs typeface="Calibri" pitchFamily="34" charset="-120"/>
-              </a:rPr>
-              <a:t>vs U.S. average</a:t>
-            </a:r>
-            <a:endParaRPr lang="en-US" sz="1100" dirty="0"/>
-          </a:p>
-        </p:txBody>
-      </p:sp>
-      <p:sp>
-        <p:nvSpPr>
-          <p:cNvPr id="8" name="Shape 6"/>
-          <p:cNvSpPr/>
-          <p:nvPr/>
-        </p:nvSpPr>
-        <p:spPr>
-          <a:xfrm>
-            <a:off x="3383280" y="1280160"/>
-            <a:ext cx="2651760" cy="1463040"/>
-          </a:xfrm>
-          <a:prstGeom prst="rect">
-            <a:avLst/>
-          </a:prstGeom>
-          <a:solidFill>
-            <a:srgbClr val="FFFFFF"/>
-          </a:solidFill>
-          <a:ln w="19050">
-            <a:solidFill>
-              <a:srgbClr val="9B1C2E"/>
-            </a:solidFill>
-            <a:prstDash val="solid"/>
-          </a:ln>
-        </p:spPr>
-      </p:sp>
-      <p:sp>
-        <p:nvSpPr>
-          <p:cNvPr id="9" name="Text 7"/>
-          <p:cNvSpPr/>
-          <p:nvPr/>
-        </p:nvSpPr>
-        <p:spPr>
-          <a:xfrm>
-            <a:off x="3383280" y="1417320"/>
-            <a:ext cx="2651760" cy="804672"/>
-          </a:xfrm>
-          <a:prstGeom prst="rect">
-            <a:avLst/>
-          </a:prstGeom>
-          <a:noFill/>
-          <a:ln/>
-        </p:spPr>
-        <p:txBody>
-          <a:bodyPr wrap="square" rtlCol="0" anchor="ctr"/>
-          <a:lstStyle/>
-          <a:p>
-            <a:pPr algn="ctr" indent="0" marL="0">
-              <a:buNone/>
-            </a:pPr>
-            <a:r>
-              <a:rPr lang="en-US" sz="3600" b="1" dirty="0">
-                <a:solidFill>
-                  <a:srgbClr val="9B1C2E"/>
-                </a:solidFill>
-                <a:latin typeface="Calibri" pitchFamily="34" charset="0"/>
-                <a:ea typeface="Calibri" pitchFamily="34" charset="-122"/>
-                <a:cs typeface="Calibri" pitchFamily="34" charset="-120"/>
-              </a:rPr>
-              <a:t>3×</a:t>
-            </a:r>
-            <a:endParaRPr lang="en-US" sz="3600" dirty="0"/>
-          </a:p>
-        </p:txBody>
-      </p:sp>
-      <p:sp>
-        <p:nvSpPr>
-          <p:cNvPr id="10" name="Text 8"/>
-          <p:cNvSpPr/>
-          <p:nvPr/>
-        </p:nvSpPr>
-        <p:spPr>
-          <a:xfrm>
-            <a:off x="3474720" y="2157984"/>
-            <a:ext cx="2468880" cy="512064"/>
-          </a:xfrm>
-          <a:prstGeom prst="rect">
-            <a:avLst/>
-          </a:prstGeom>
-          <a:noFill/>
-          <a:ln/>
-        </p:spPr>
-        <p:txBody>
-          <a:bodyPr wrap="square" rtlCol="0" anchor="ctr"/>
-          <a:lstStyle/>
-          <a:p>
-            <a:pPr algn="ctr" indent="0" marL="0">
-              <a:buNone/>
-            </a:pPr>
-            <a:r>
-              <a:rPr lang="en-US" sz="1100" dirty="0">
-                <a:solidFill>
-                  <a:srgbClr val="2D3E50"/>
-                </a:solidFill>
-                <a:latin typeface="Calibri" pitchFamily="34" charset="0"/>
-                <a:ea typeface="Calibri" pitchFamily="34" charset="-122"/>
-                <a:cs typeface="Calibri" pitchFamily="34" charset="-120"/>
-              </a:rPr>
-              <a:t>Black students sent to</a:t>
-            </a:r>
-            <a:endParaRPr lang="en-US" sz="1100" dirty="0"/>
-          </a:p>
-          <a:p>
-            <a:pPr algn="ctr" indent="0" marL="0">
-              <a:buNone/>
-            </a:pPr>
-            <a:r>
-              <a:rPr lang="en-US" sz="1100" dirty="0">
-                <a:solidFill>
-                  <a:srgbClr val="2D3E50"/>
-                </a:solidFill>
-                <a:latin typeface="Calibri" pitchFamily="34" charset="0"/>
-                <a:ea typeface="Calibri" pitchFamily="34" charset="-122"/>
-                <a:cs typeface="Calibri" pitchFamily="34" charset="-120"/>
-              </a:rPr>
-              <a:t>alt ed vs peers (TEA)</a:t>
-            </a:r>
-            <a:endParaRPr lang="en-US" sz="1100" dirty="0"/>
-          </a:p>
-        </p:txBody>
-      </p:sp>
-      <p:sp>
-        <p:nvSpPr>
-          <p:cNvPr id="11" name="Shape 9"/>
-          <p:cNvSpPr/>
-          <p:nvPr/>
-        </p:nvSpPr>
-        <p:spPr>
-          <a:xfrm>
-            <a:off x="6217920" y="1280160"/>
-            <a:ext cx="2651760" cy="1463040"/>
-          </a:xfrm>
-          <a:prstGeom prst="rect">
-            <a:avLst/>
-          </a:prstGeom>
-          <a:solidFill>
-            <a:srgbClr val="FFFFFF"/>
-          </a:solidFill>
-          <a:ln w="19050">
-            <a:solidFill>
-              <a:srgbClr val="9B1C2E"/>
-            </a:solidFill>
-            <a:prstDash val="solid"/>
-          </a:ln>
-        </p:spPr>
-      </p:sp>
-      <p:sp>
-        <p:nvSpPr>
-          <p:cNvPr id="12" name="Text 10"/>
-          <p:cNvSpPr/>
-          <p:nvPr/>
-        </p:nvSpPr>
-        <p:spPr>
-          <a:xfrm>
-            <a:off x="6217920" y="1417320"/>
-            <a:ext cx="2651760" cy="804672"/>
-          </a:xfrm>
-          <a:prstGeom prst="rect">
-            <a:avLst/>
-          </a:prstGeom>
-          <a:noFill/>
-          <a:ln/>
-        </p:spPr>
-        <p:txBody>
-          <a:bodyPr wrap="square" rtlCol="0" anchor="ctr"/>
-          <a:lstStyle/>
-          <a:p>
-            <a:pPr algn="ctr" indent="0" marL="0">
-              <a:buNone/>
-            </a:pPr>
-            <a:r>
-              <a:rPr lang="en-US" sz="3600" b="1" dirty="0">
-                <a:solidFill>
-                  <a:srgbClr val="9B1C2E"/>
-                </a:solidFill>
-                <a:latin typeface="Calibri" pitchFamily="34" charset="0"/>
-                <a:ea typeface="Calibri" pitchFamily="34" charset="-122"/>
-                <a:cs typeface="Calibri" pitchFamily="34" charset="-120"/>
-              </a:rPr>
-              <a:t>60%</a:t>
-            </a:r>
-            <a:endParaRPr lang="en-US" sz="3600" dirty="0"/>
-          </a:p>
-        </p:txBody>
-      </p:sp>
-      <p:sp>
-        <p:nvSpPr>
-          <p:cNvPr id="13" name="Text 11"/>
-          <p:cNvSpPr/>
-          <p:nvPr/>
-        </p:nvSpPr>
-        <p:spPr>
-          <a:xfrm>
-            <a:off x="6309360" y="2157984"/>
-            <a:ext cx="2468880" cy="512064"/>
-          </a:xfrm>
-          <a:prstGeom prst="rect">
-            <a:avLst/>
-          </a:prstGeom>
-          <a:noFill/>
-          <a:ln/>
-        </p:spPr>
-        <p:txBody>
-          <a:bodyPr wrap="square" rtlCol="0" anchor="ctr"/>
-          <a:lstStyle/>
-          <a:p>
-            <a:pPr algn="ctr" indent="0" marL="0">
-              <a:buNone/>
-            </a:pPr>
-            <a:r>
-              <a:rPr lang="en-US" sz="1100" dirty="0">
-                <a:solidFill>
-                  <a:srgbClr val="2D3E50"/>
-                </a:solidFill>
-                <a:latin typeface="Calibri" pitchFamily="34" charset="0"/>
-                <a:ea typeface="Calibri" pitchFamily="34" charset="-122"/>
-                <a:cs typeface="Calibri" pitchFamily="34" charset="-120"/>
-              </a:rPr>
-              <a:t>of discretionary DAEP</a:t>
-            </a:r>
-            <a:endParaRPr lang="en-US" sz="1100" dirty="0"/>
-          </a:p>
-          <a:p>
-            <a:pPr algn="ctr" indent="0" marL="0">
-              <a:buNone/>
-            </a:pPr>
-            <a:r>
-              <a:rPr lang="en-US" sz="1100" dirty="0">
-                <a:solidFill>
-                  <a:srgbClr val="2D3E50"/>
-                </a:solidFill>
-                <a:latin typeface="Calibri" pitchFamily="34" charset="0"/>
-                <a:ea typeface="Calibri" pitchFamily="34" charset="-122"/>
-                <a:cs typeface="Calibri" pitchFamily="34" charset="-120"/>
-              </a:rPr>
-              <a:t> placements are Black</a:t>
-            </a:r>
-            <a:endParaRPr lang="en-US" sz="1100" dirty="0"/>
-          </a:p>
-        </p:txBody>
-      </p:sp>
-      <p:sp>
-        <p:nvSpPr>
-          <p:cNvPr id="14" name="Shape 12"/>
-          <p:cNvSpPr/>
-          <p:nvPr/>
-        </p:nvSpPr>
-        <p:spPr>
-          <a:xfrm>
-            <a:off x="9052560" y="1280160"/>
-            <a:ext cx="2651760" cy="1463040"/>
-          </a:xfrm>
-          <a:prstGeom prst="rect">
-            <a:avLst/>
-          </a:prstGeom>
-          <a:solidFill>
-            <a:srgbClr val="FFFFFF"/>
-          </a:solidFill>
-          <a:ln w="19050">
-            <a:solidFill>
-              <a:srgbClr val="9B1C2E"/>
-            </a:solidFill>
-            <a:prstDash val="solid"/>
-          </a:ln>
-        </p:spPr>
-      </p:sp>
-      <p:sp>
-        <p:nvSpPr>
-          <p:cNvPr id="15" name="Text 13"/>
-          <p:cNvSpPr/>
-          <p:nvPr/>
-        </p:nvSpPr>
-        <p:spPr>
-          <a:xfrm>
-            <a:off x="9052560" y="1417320"/>
-            <a:ext cx="2651760" cy="804672"/>
-          </a:xfrm>
-          <a:prstGeom prst="rect">
-            <a:avLst/>
-          </a:prstGeom>
-          <a:noFill/>
-          <a:ln/>
-        </p:spPr>
-        <p:txBody>
-          <a:bodyPr wrap="square" rtlCol="0" anchor="ctr"/>
-          <a:lstStyle/>
-          <a:p>
-            <a:pPr algn="ctr" indent="0" marL="0">
-              <a:buNone/>
-            </a:pPr>
-            <a:r>
-              <a:rPr lang="en-US" sz="3600" b="1" dirty="0">
-                <a:solidFill>
-                  <a:srgbClr val="9B1C2E"/>
-                </a:solidFill>
-                <a:latin typeface="Calibri" pitchFamily="34" charset="0"/>
-                <a:ea typeface="Calibri" pitchFamily="34" charset="-122"/>
-                <a:cs typeface="Calibri" pitchFamily="34" charset="-120"/>
-              </a:rPr>
-              <a:t>Stage 4</a:t>
-            </a:r>
-            <a:endParaRPr lang="en-US" sz="3600" dirty="0"/>
-          </a:p>
-        </p:txBody>
-      </p:sp>
-      <p:sp>
-        <p:nvSpPr>
-          <p:cNvPr id="16" name="Text 14"/>
-          <p:cNvSpPr/>
-          <p:nvPr/>
-        </p:nvSpPr>
-        <p:spPr>
-          <a:xfrm>
-            <a:off x="9144000" y="2157984"/>
-            <a:ext cx="2468880" cy="512064"/>
-          </a:xfrm>
-          <a:prstGeom prst="rect">
-            <a:avLst/>
-          </a:prstGeom>
-          <a:noFill/>
-          <a:ln/>
-        </p:spPr>
-        <p:txBody>
-          <a:bodyPr wrap="square" rtlCol="0" anchor="ctr"/>
-          <a:lstStyle/>
-          <a:p>
-            <a:pPr algn="ctr" indent="0" marL="0">
-              <a:buNone/>
-            </a:pPr>
-            <a:r>
-              <a:rPr lang="en-US" sz="1100" dirty="0">
-                <a:solidFill>
-                  <a:srgbClr val="2D3E50"/>
-                </a:solidFill>
-                <a:latin typeface="Calibri" pitchFamily="34" charset="0"/>
-                <a:ea typeface="Calibri" pitchFamily="34" charset="-122"/>
-                <a:cs typeface="Calibri" pitchFamily="34" charset="-120"/>
-              </a:rPr>
-              <a:t>TEA discipline reprimand</a:t>
-            </a:r>
-            <a:endParaRPr lang="en-US" sz="1100" dirty="0"/>
-          </a:p>
-          <a:p>
-            <a:pPr algn="ctr" indent="0" marL="0">
-              <a:buNone/>
-            </a:pPr>
-            <a:r>
-              <a:rPr lang="en-US" sz="1100" dirty="0">
-                <a:solidFill>
-                  <a:srgbClr val="2D3E50"/>
-                </a:solidFill>
-                <a:latin typeface="Calibri" pitchFamily="34" charset="0"/>
-                <a:ea typeface="Calibri" pitchFamily="34" charset="-122"/>
-                <a:cs typeface="Calibri" pitchFamily="34" charset="-120"/>
-              </a:rPr>
-              <a:t>(most severe rating)</a:t>
-            </a:r>
-            <a:endParaRPr lang="en-US" sz="1100" dirty="0"/>
-          </a:p>
-        </p:txBody>
-      </p:sp>
-      <p:sp>
-        <p:nvSpPr>
-          <p:cNvPr id="17" name="Shape 15"/>
-          <p:cNvSpPr/>
-          <p:nvPr/>
-        </p:nvSpPr>
-        <p:spPr>
-          <a:xfrm>
-            <a:off x="548640" y="3017520"/>
-            <a:ext cx="2651760" cy="1463040"/>
-          </a:xfrm>
-          <a:prstGeom prst="rect">
-            <a:avLst/>
-          </a:prstGeom>
-          <a:solidFill>
-            <a:srgbClr val="FFFFFF"/>
-          </a:solidFill>
-          <a:ln w="19050">
-            <a:solidFill>
-              <a:srgbClr val="2D3E50"/>
-            </a:solidFill>
-            <a:prstDash val="solid"/>
-          </a:ln>
-        </p:spPr>
-      </p:sp>
-      <p:sp>
-        <p:nvSpPr>
-          <p:cNvPr id="18" name="Text 16"/>
-          <p:cNvSpPr/>
-          <p:nvPr/>
-        </p:nvSpPr>
-        <p:spPr>
-          <a:xfrm>
-            <a:off x="548640" y="3154680"/>
-            <a:ext cx="2651760" cy="804672"/>
-          </a:xfrm>
-          <a:prstGeom prst="rect">
-            <a:avLst/>
-          </a:prstGeom>
-          <a:noFill/>
-          <a:ln/>
-        </p:spPr>
-        <p:txBody>
-          <a:bodyPr wrap="square" rtlCol="0" anchor="ctr"/>
-          <a:lstStyle/>
-          <a:p>
-            <a:pPr algn="ctr" indent="0" marL="0">
-              <a:buNone/>
-            </a:pPr>
-            <a:r>
-              <a:rPr lang="en-US" sz="3600" b="1" dirty="0">
-                <a:solidFill>
-                  <a:srgbClr val="2D3E50"/>
-                </a:solidFill>
-                <a:latin typeface="Calibri" pitchFamily="34" charset="0"/>
-                <a:ea typeface="Calibri" pitchFamily="34" charset="-122"/>
-                <a:cs typeface="Calibri" pitchFamily="34" charset="-120"/>
-              </a:rPr>
-              <a:t>76.4%</a:t>
-            </a:r>
-            <a:endParaRPr lang="en-US" sz="3600" dirty="0"/>
-          </a:p>
-        </p:txBody>
-      </p:sp>
-      <p:sp>
-        <p:nvSpPr>
-          <p:cNvPr id="19" name="Text 17"/>
-          <p:cNvSpPr/>
-          <p:nvPr/>
-        </p:nvSpPr>
-        <p:spPr>
-          <a:xfrm>
-            <a:off x="640080" y="3895344"/>
-            <a:ext cx="2468880" cy="512064"/>
-          </a:xfrm>
-          <a:prstGeom prst="rect">
-            <a:avLst/>
-          </a:prstGeom>
-          <a:noFill/>
-          <a:ln/>
-        </p:spPr>
-        <p:txBody>
-          <a:bodyPr wrap="square" rtlCol="0" anchor="ctr"/>
-          <a:lstStyle/>
-          <a:p>
-            <a:pPr algn="ctr" indent="0" marL="0">
-              <a:buNone/>
-            </a:pPr>
-            <a:r>
-              <a:rPr lang="en-US" sz="1100" dirty="0">
-                <a:solidFill>
-                  <a:srgbClr val="2D3E50"/>
-                </a:solidFill>
-                <a:latin typeface="Calibri" pitchFamily="34" charset="0"/>
-                <a:ea typeface="Calibri" pitchFamily="34" charset="-122"/>
-                <a:cs typeface="Calibri" pitchFamily="34" charset="-120"/>
-              </a:rPr>
-              <a:t>Waco ISD students</a:t>
-            </a:r>
-            <a:endParaRPr lang="en-US" sz="1100" dirty="0"/>
-          </a:p>
-          <a:p>
-            <a:pPr algn="ctr" indent="0" marL="0">
-              <a:buNone/>
-            </a:pPr>
-            <a:r>
-              <a:rPr lang="en-US" sz="1100" dirty="0">
-                <a:solidFill>
-                  <a:srgbClr val="2D3E50"/>
-                </a:solidFill>
-                <a:latin typeface="Calibri" pitchFamily="34" charset="0"/>
-                <a:ea typeface="Calibri" pitchFamily="34" charset="-122"/>
-                <a:cs typeface="Calibri" pitchFamily="34" charset="-120"/>
-              </a:rPr>
-              <a:t>flagged at-risk</a:t>
-            </a:r>
-            <a:endParaRPr lang="en-US" sz="1100" dirty="0"/>
-          </a:p>
-        </p:txBody>
-      </p:sp>
-      <p:sp>
-        <p:nvSpPr>
-          <p:cNvPr id="20" name="Shape 18"/>
-          <p:cNvSpPr/>
-          <p:nvPr/>
-        </p:nvSpPr>
-        <p:spPr>
-          <a:xfrm>
-            <a:off x="3383280" y="3017520"/>
-            <a:ext cx="2651760" cy="1463040"/>
-          </a:xfrm>
-          <a:prstGeom prst="rect">
-            <a:avLst/>
-          </a:prstGeom>
-          <a:solidFill>
-            <a:srgbClr val="FFFFFF"/>
-          </a:solidFill>
-          <a:ln w="19050">
-            <a:solidFill>
-              <a:srgbClr val="2D3E50"/>
-            </a:solidFill>
-            <a:prstDash val="solid"/>
-          </a:ln>
-        </p:spPr>
-      </p:sp>
-      <p:sp>
-        <p:nvSpPr>
-          <p:cNvPr id="21" name="Text 19"/>
-          <p:cNvSpPr/>
-          <p:nvPr/>
-        </p:nvSpPr>
-        <p:spPr>
-          <a:xfrm>
-            <a:off x="3383280" y="3154680"/>
-            <a:ext cx="2651760" cy="804672"/>
-          </a:xfrm>
-          <a:prstGeom prst="rect">
-            <a:avLst/>
-          </a:prstGeom>
-          <a:noFill/>
-          <a:ln/>
-        </p:spPr>
-        <p:txBody>
-          <a:bodyPr wrap="square" rtlCol="0" anchor="ctr"/>
-          <a:lstStyle/>
-          <a:p>
-            <a:pPr algn="ctr" indent="0" marL="0">
-              <a:buNone/>
-            </a:pPr>
-            <a:r>
-              <a:rPr lang="en-US" sz="3600" b="1" dirty="0">
-                <a:solidFill>
-                  <a:srgbClr val="2D3E50"/>
-                </a:solidFill>
-                <a:latin typeface="Calibri" pitchFamily="34" charset="0"/>
-                <a:ea typeface="Calibri" pitchFamily="34" charset="-122"/>
-                <a:cs typeface="Calibri" pitchFamily="34" charset="-120"/>
-              </a:rPr>
-              <a:t>~1,300</a:t>
-            </a:r>
-            <a:endParaRPr lang="en-US" sz="3600" dirty="0"/>
-          </a:p>
-        </p:txBody>
-      </p:sp>
-      <p:sp>
-        <p:nvSpPr>
-          <p:cNvPr id="22" name="Text 20"/>
-          <p:cNvSpPr/>
-          <p:nvPr/>
-        </p:nvSpPr>
-        <p:spPr>
-          <a:xfrm>
-            <a:off x="3474720" y="3895344"/>
-            <a:ext cx="2468880" cy="512064"/>
-          </a:xfrm>
-          <a:prstGeom prst="rect">
-            <a:avLst/>
-          </a:prstGeom>
-          <a:noFill/>
-          <a:ln/>
-        </p:spPr>
-        <p:txBody>
-          <a:bodyPr wrap="square" rtlCol="0" anchor="ctr"/>
-          <a:lstStyle/>
-          <a:p>
-            <a:pPr algn="ctr" indent="0" marL="0">
-              <a:buNone/>
-            </a:pPr>
-            <a:r>
-              <a:rPr lang="en-US" sz="1100" dirty="0">
-                <a:solidFill>
-                  <a:srgbClr val="2D3E50"/>
-                </a:solidFill>
-                <a:latin typeface="Calibri" pitchFamily="34" charset="0"/>
-                <a:ea typeface="Calibri" pitchFamily="34" charset="-122"/>
-                <a:cs typeface="Calibri" pitchFamily="34" charset="-120"/>
-              </a:rPr>
-              <a:t>Est. disconnected Black</a:t>
-            </a:r>
-            <a:endParaRPr lang="en-US" sz="1100" dirty="0"/>
-          </a:p>
-          <a:p>
-            <a:pPr algn="ctr" indent="0" marL="0">
-              <a:buNone/>
-            </a:pPr>
-            <a:r>
-              <a:rPr lang="en-US" sz="1100" dirty="0">
-                <a:solidFill>
-                  <a:srgbClr val="2D3E50"/>
-                </a:solidFill>
-                <a:latin typeface="Calibri" pitchFamily="34" charset="0"/>
-                <a:ea typeface="Calibri" pitchFamily="34" charset="-122"/>
-                <a:cs typeface="Calibri" pitchFamily="34" charset="-120"/>
-              </a:rPr>
-              <a:t>youth 16–24 county-wide</a:t>
-            </a:r>
-            <a:endParaRPr lang="en-US" sz="1100" dirty="0"/>
-          </a:p>
-        </p:txBody>
-      </p:sp>
-      <p:sp>
-        <p:nvSpPr>
-          <p:cNvPr id="23" name="Shape 21"/>
-          <p:cNvSpPr/>
-          <p:nvPr/>
-        </p:nvSpPr>
-        <p:spPr>
-          <a:xfrm>
-            <a:off x="6217920" y="3017520"/>
-            <a:ext cx="2651760" cy="1463040"/>
-          </a:xfrm>
-          <a:prstGeom prst="rect">
-            <a:avLst/>
-          </a:prstGeom>
-          <a:solidFill>
-            <a:srgbClr val="FFFFFF"/>
-          </a:solidFill>
-          <a:ln w="19050">
-            <a:solidFill>
-              <a:srgbClr val="2D3E50"/>
-            </a:solidFill>
-            <a:prstDash val="solid"/>
-          </a:ln>
-        </p:spPr>
-      </p:sp>
-      <p:sp>
-        <p:nvSpPr>
-          <p:cNvPr id="24" name="Text 22"/>
-          <p:cNvSpPr/>
-          <p:nvPr/>
-        </p:nvSpPr>
-        <p:spPr>
-          <a:xfrm>
-            <a:off x="6217920" y="3154680"/>
-            <a:ext cx="2651760" cy="804672"/>
-          </a:xfrm>
-          <a:prstGeom prst="rect">
-            <a:avLst/>
-          </a:prstGeom>
-          <a:noFill/>
-          <a:ln/>
-        </p:spPr>
-        <p:txBody>
-          <a:bodyPr wrap="square" rtlCol="0" anchor="ctr"/>
-          <a:lstStyle/>
-          <a:p>
-            <a:pPr algn="ctr" indent="0" marL="0">
-              <a:buNone/>
-            </a:pPr>
-            <a:r>
-              <a:rPr lang="en-US" sz="3600" b="1" dirty="0">
-                <a:solidFill>
-                  <a:srgbClr val="2D3E50"/>
-                </a:solidFill>
-                <a:latin typeface="Calibri" pitchFamily="34" charset="0"/>
-                <a:ea typeface="Calibri" pitchFamily="34" charset="-122"/>
-                <a:cs typeface="Calibri" pitchFamily="34" charset="-120"/>
-              </a:rPr>
-              <a:t>~3,200</a:t>
-            </a:r>
-            <a:endParaRPr lang="en-US" sz="3600" dirty="0"/>
-          </a:p>
-        </p:txBody>
-      </p:sp>
-      <p:sp>
-        <p:nvSpPr>
-          <p:cNvPr id="25" name="Text 23"/>
-          <p:cNvSpPr/>
-          <p:nvPr/>
-        </p:nvSpPr>
-        <p:spPr>
-          <a:xfrm>
-            <a:off x="6309360" y="3895344"/>
-            <a:ext cx="2468880" cy="512064"/>
-          </a:xfrm>
-          <a:prstGeom prst="rect">
-            <a:avLst/>
-          </a:prstGeom>
-          <a:noFill/>
-          <a:ln/>
-        </p:spPr>
-        <p:txBody>
-          <a:bodyPr wrap="square" rtlCol="0" anchor="ctr"/>
-          <a:lstStyle/>
-          <a:p>
-            <a:pPr algn="ctr" indent="0" marL="0">
-              <a:buNone/>
-            </a:pPr>
-            <a:r>
-              <a:rPr lang="en-US" sz="1100" dirty="0">
-                <a:solidFill>
-                  <a:srgbClr val="2D3E50"/>
-                </a:solidFill>
-                <a:latin typeface="Calibri" pitchFamily="34" charset="0"/>
-                <a:ea typeface="Calibri" pitchFamily="34" charset="-122"/>
-                <a:cs typeface="Calibri" pitchFamily="34" charset="-120"/>
-              </a:rPr>
-              <a:t>Black children in single-</a:t>
-            </a:r>
-            <a:endParaRPr lang="en-US" sz="1100" dirty="0"/>
-          </a:p>
-          <a:p>
-            <a:pPr algn="ctr" indent="0" marL="0">
-              <a:buNone/>
-            </a:pPr>
-            <a:r>
-              <a:rPr lang="en-US" sz="1100" dirty="0">
-                <a:solidFill>
-                  <a:srgbClr val="2D3E50"/>
-                </a:solidFill>
-                <a:latin typeface="Calibri" pitchFamily="34" charset="0"/>
-                <a:ea typeface="Calibri" pitchFamily="34" charset="-122"/>
-                <a:cs typeface="Calibri" pitchFamily="34" charset="-120"/>
-              </a:rPr>
-              <a:t>parent households</a:t>
-            </a:r>
-            <a:endParaRPr lang="en-US" sz="1100" dirty="0"/>
-          </a:p>
-        </p:txBody>
-      </p:sp>
-      <p:sp>
-        <p:nvSpPr>
-          <p:cNvPr id="26" name="Shape 24"/>
-          <p:cNvSpPr/>
-          <p:nvPr/>
-        </p:nvSpPr>
-        <p:spPr>
-          <a:xfrm>
-            <a:off x="9052560" y="3017520"/>
-            <a:ext cx="2651760" cy="1463040"/>
-          </a:xfrm>
-          <a:prstGeom prst="rect">
-            <a:avLst/>
-          </a:prstGeom>
-          <a:solidFill>
-            <a:srgbClr val="FFFFFF"/>
-          </a:solidFill>
-          <a:ln w="19050">
-            <a:solidFill>
-              <a:srgbClr val="D4A24C"/>
-            </a:solidFill>
-            <a:prstDash val="solid"/>
-          </a:ln>
-        </p:spPr>
-      </p:sp>
-      <p:sp>
-        <p:nvSpPr>
-          <p:cNvPr id="27" name="Text 25"/>
-          <p:cNvSpPr/>
-          <p:nvPr/>
-        </p:nvSpPr>
-        <p:spPr>
-          <a:xfrm>
-            <a:off x="9052560" y="3154680"/>
-            <a:ext cx="2651760" cy="804672"/>
-          </a:xfrm>
-          <a:prstGeom prst="rect">
-            <a:avLst/>
-          </a:prstGeom>
-          <a:noFill/>
-          <a:ln/>
-        </p:spPr>
-        <p:txBody>
-          <a:bodyPr wrap="square" rtlCol="0" anchor="ctr"/>
-          <a:lstStyle/>
-          <a:p>
-            <a:pPr algn="ctr" indent="0" marL="0">
-              <a:buNone/>
-            </a:pPr>
-            <a:r>
-              <a:rPr lang="en-US" sz="3600" b="1" dirty="0">
-                <a:solidFill>
-                  <a:srgbClr val="D4A24C"/>
-                </a:solidFill>
-                <a:latin typeface="Calibri" pitchFamily="34" charset="0"/>
-                <a:ea typeface="Calibri" pitchFamily="34" charset="-122"/>
-                <a:cs typeface="Calibri" pitchFamily="34" charset="-120"/>
-              </a:rPr>
-              <a:t>~700+</a:t>
-            </a:r>
-            <a:endParaRPr lang="en-US" sz="3600" dirty="0"/>
-          </a:p>
-        </p:txBody>
-      </p:sp>
-      <p:sp>
-        <p:nvSpPr>
-          <p:cNvPr id="28" name="Text 26"/>
-          <p:cNvSpPr/>
-          <p:nvPr/>
-        </p:nvSpPr>
-        <p:spPr>
-          <a:xfrm>
-            <a:off x="9144000" y="3895344"/>
-            <a:ext cx="2468880" cy="512064"/>
-          </a:xfrm>
-          <a:prstGeom prst="rect">
-            <a:avLst/>
-          </a:prstGeom>
-          <a:noFill/>
-          <a:ln/>
-        </p:spPr>
-        <p:txBody>
-          <a:bodyPr wrap="square" rtlCol="0" anchor="ctr"/>
-          <a:lstStyle/>
-          <a:p>
-            <a:pPr algn="ctr" indent="0" marL="0">
-              <a:buNone/>
-            </a:pPr>
-            <a:r>
-              <a:rPr lang="en-US" sz="1100" dirty="0">
-                <a:solidFill>
-                  <a:srgbClr val="2D3E50"/>
-                </a:solidFill>
-                <a:latin typeface="Calibri" pitchFamily="34" charset="0"/>
-                <a:ea typeface="Calibri" pitchFamily="34" charset="-122"/>
-                <a:cs typeface="Calibri" pitchFamily="34" charset="-120"/>
-              </a:rPr>
-              <a:t>Mentor gap (Black-male</a:t>
-            </a:r>
-            <a:endParaRPr lang="en-US" sz="1100" dirty="0"/>
-          </a:p>
-          <a:p>
-            <a:pPr algn="ctr" indent="0" marL="0">
-              <a:buNone/>
-            </a:pPr>
-            <a:r>
-              <a:rPr lang="en-US" sz="1100" dirty="0">
-                <a:solidFill>
-                  <a:srgbClr val="2D3E50"/>
-                </a:solidFill>
-                <a:latin typeface="Calibri" pitchFamily="34" charset="0"/>
-                <a:ea typeface="Calibri" pitchFamily="34" charset="-122"/>
-                <a:cs typeface="Calibri" pitchFamily="34" charset="-120"/>
-              </a:rPr>
-              <a:t>mentors needed)</a:t>
-            </a:r>
-            <a:endParaRPr lang="en-US" sz="1100" dirty="0"/>
-          </a:p>
-        </p:txBody>
-      </p:sp>
-      <p:sp>
-        <p:nvSpPr>
-          <p:cNvPr id="29" name="Text 27"/>
-          <p:cNvSpPr/>
-          <p:nvPr/>
-        </p:nvSpPr>
-        <p:spPr>
-          <a:xfrm>
-            <a:off x="548640" y="5029200"/>
-            <a:ext cx="11247120" cy="457200"/>
-          </a:xfrm>
-          <a:prstGeom prst="rect">
-            <a:avLst/>
-          </a:prstGeom>
-          <a:noFill/>
-          <a:ln/>
-        </p:spPr>
-        <p:txBody>
-          <a:bodyPr wrap="square" rtlCol="0" anchor="ctr"/>
-          <a:lstStyle/>
-          <a:p>
-            <a:pPr indent="0" marL="0">
-              <a:buNone/>
-            </a:pPr>
-            <a:r>
-              <a:rPr lang="en-US" sz="1000" i="1" dirty="0">
-                <a:solidFill>
-                  <a:srgbClr val="5A6470"/>
-                </a:solidFill>
-                <a:latin typeface="Calibri" pitchFamily="34" charset="0"/>
-                <a:ea typeface="Calibri" pitchFamily="34" charset="-122"/>
-                <a:cs typeface="Calibri" pitchFamily="34" charset="-120"/>
-              </a:rPr>
-              <a:t>Sources: BestPlaces (zip crime), TEA TAPR 2024, USAFacts/BLS LAUS, ACS 5-yr 2019–2023, TJJD population reports, BBBS Lone Star public statements.</a:t>
-            </a:r>
-            <a:endParaRPr lang="en-US" sz="1000" dirty="0"/>
-          </a:p>
-        </p:txBody>
-      </p:sp>
-      <p:sp>
-        <p:nvSpPr>
-          <p:cNvPr id="30" name="Text 28"/>
-          <p:cNvSpPr/>
-          <p:nvPr/>
-        </p:nvSpPr>
-        <p:spPr>
-          <a:xfrm>
-            <a:off x="365760" y="6565392"/>
-            <a:ext cx="11457432" cy="228600"/>
-          </a:xfrm>
-          <a:prstGeom prst="rect">
-            <a:avLst/>
-          </a:prstGeom>
-          <a:noFill/>
-          <a:ln/>
-        </p:spPr>
-        <p:txBody>
-          <a:bodyPr wrap="square" rtlCol="0" anchor="ctr"/>
-          <a:lstStyle/>
-          <a:p>
-            <a:pPr indent="0" marL="0">
-              <a:buNone/>
-            </a:pPr>
-            <a:r>
-              <a:rPr lang="en-US" sz="900" dirty="0">
-                <a:solidFill>
-                  <a:srgbClr val="5A6470"/>
-                </a:solidFill>
-                <a:latin typeface="Calibri" pitchFamily="34" charset="0"/>
-                <a:ea typeface="Calibri" pitchFamily="34" charset="-122"/>
-                <a:cs typeface="Calibri" pitchFamily="34" charset="-120"/>
-              </a:rPr>
-              <a:t>TCAF · Waco · By the numbers · April 17, 2026</a:t>
-            </a:r>
-            <a:endParaRPr lang="en-US" sz="900" dirty="0"/>
-          </a:p>
-        </p:txBody>
-      </p:sp>
-    </p:spTree>
-  </p:cSld>
-  <p:clrMapOvr>
-    <a:masterClrMapping/>
-  </p:clrMapOvr>
-</p:sld>
-</file>
-
 <file path=ppt/slides/slide6.xml><?xml version="1.0" encoding="utf-8"?>
 <p:sld xmlns:a="http://schemas.openxmlformats.org/drawingml/2006/main" xmlns:r="http://schemas.openxmlformats.org/officeDocument/2006/relationships" xmlns:p="http://schemas.openxmlformats.org/presentationml/2006/main">
   <p:cSld name="Slide 6">
@@ -20001,7 +19639,7 @@
                 <a:ea typeface="Calibri" pitchFamily="34" charset="-122"/>
                 <a:cs typeface="Calibri" pitchFamily="34" charset="-120"/>
               </a:rPr>
-              <a:t>Waco ISD — the measurable school-to-prison pipeline</a:t>
+              <a:t>The numbers behind the alarm</a:t>
             </a:r>
             <a:endParaRPr lang="en-US" sz="2400" dirty="0"/>
           </a:p>
@@ -20040,7 +19678,7 @@
                 <a:ea typeface="Calibri" pitchFamily="34" charset="-122"/>
                 <a:cs typeface="Calibri" pitchFamily="34" charset="-120"/>
               </a:rPr>
-              <a:t>TEA Stage 4 reprimand makes this the single most actionable upstream lever.</a:t>
+              <a:t>Waco / McLennan — verified from BLS, ACS, TEA, BestPlaces, USAFacts, TJJD</a:t>
             </a:r>
             <a:endParaRPr lang="en-US" sz="1200" dirty="0"/>
           </a:p>
@@ -20048,14 +19686,39 @@
       </p:sp>
       <p:sp>
         <p:nvSpPr>
-          <p:cNvPr id="5" name="Text 3"/>
+          <p:cNvPr id="5" name="Shape 3"/>
           <p:cNvSpPr/>
           <p:nvPr/>
         </p:nvSpPr>
         <p:spPr>
           <a:xfrm>
-            <a:off x="548640" y="1097280"/>
-            <a:ext cx="11091672" cy="5120640"/>
+            <a:off x="548640" y="1280160"/>
+            <a:ext cx="2651760" cy="1463040"/>
+          </a:xfrm>
+          <a:prstGeom prst="rect">
+            <a:avLst/>
+          </a:prstGeom>
+          <a:solidFill>
+            <a:srgbClr val="FFFFFF"/>
+          </a:solidFill>
+          <a:ln w="19050">
+            <a:solidFill>
+              <a:srgbClr val="9B1C2E"/>
+            </a:solidFill>
+            <a:prstDash val="solid"/>
+          </a:ln>
+        </p:spPr>
+      </p:sp>
+      <p:sp>
+        <p:nvSpPr>
+          <p:cNvPr id="6" name="Text 4"/>
+          <p:cNvSpPr/>
+          <p:nvPr/>
+        </p:nvSpPr>
+        <p:spPr>
+          <a:xfrm>
+            <a:off x="548640" y="1417320"/>
+            <a:ext cx="2651760" cy="804672"/>
           </a:xfrm>
           <a:prstGeom prst="rect">
             <a:avLst/>
@@ -20064,118 +19727,965 @@
           <a:ln/>
         </p:spPr>
         <p:txBody>
-          <a:bodyPr wrap="square" rtlCol="0" anchor="t"/>
+          <a:bodyPr wrap="square" rtlCol="0" anchor="ctr"/>
           <a:lstStyle/>
           <a:p>
-            <a:pPr marL="342900" indent="-342900">
-              <a:spcAft>
-                <a:spcPts val="600"/>
-              </a:spcAft>
-              <a:buSzPct val="100000"/>
-              <a:buChar char="■"/>
+            <a:pPr algn="ctr" indent="0" marL="0">
+              <a:buNone/>
             </a:pPr>
             <a:r>
-              <a:rPr lang="en-US" sz="1600" dirty="0">
+              <a:rPr lang="en-US" sz="3600" b="1" dirty="0">
                 <a:solidFill>
-                  <a:srgbClr val="1A1A1A"/>
+                  <a:srgbClr val="9B1C2E"/>
                 </a:solidFill>
                 <a:latin typeface="Calibri" pitchFamily="34" charset="0"/>
                 <a:ea typeface="Calibri" pitchFamily="34" charset="-122"/>
                 <a:cs typeface="Calibri" pitchFamily="34" charset="-120"/>
               </a:rPr>
-              <a:t>Black students = ~30% of Waco ISD enrollment but ~60% of discretionary DAEP (alternative ed) placements.</a:t>
-            </a:r>
-            <a:endParaRPr lang="en-US" sz="1600" dirty="0"/>
-          </a:p>
-          <a:p>
-            <a:pPr marL="342900" indent="-342900">
-              <a:spcAft>
-                <a:spcPts val="600"/>
-              </a:spcAft>
-              <a:buSzPct val="100000"/>
-              <a:buChar char="■"/>
+              <a:t>2.8×</a:t>
+            </a:r>
+            <a:endParaRPr lang="en-US" sz="3600" dirty="0"/>
+          </a:p>
+        </p:txBody>
+      </p:sp>
+      <p:sp>
+        <p:nvSpPr>
+          <p:cNvPr id="7" name="Text 5"/>
+          <p:cNvSpPr/>
+          <p:nvPr/>
+        </p:nvSpPr>
+        <p:spPr>
+          <a:xfrm>
+            <a:off x="640080" y="2157984"/>
+            <a:ext cx="2468880" cy="512064"/>
+          </a:xfrm>
+          <a:prstGeom prst="rect">
+            <a:avLst/>
+          </a:prstGeom>
+          <a:noFill/>
+          <a:ln/>
+        </p:spPr>
+        <p:txBody>
+          <a:bodyPr wrap="square" rtlCol="0" anchor="ctr"/>
+          <a:lstStyle/>
+          <a:p>
+            <a:pPr algn="ctr" indent="0" marL="0">
+              <a:buNone/>
             </a:pPr>
             <a:r>
-              <a:rPr lang="en-US" sz="1600" dirty="0">
+              <a:rPr lang="en-US" sz="1100" dirty="0">
                 <a:solidFill>
-                  <a:srgbClr val="1A1A1A"/>
+                  <a:srgbClr val="2D3E50"/>
                 </a:solidFill>
                 <a:latin typeface="Calibri" pitchFamily="34" charset="0"/>
                 <a:ea typeface="Calibri" pitchFamily="34" charset="-122"/>
                 <a:cs typeface="Calibri" pitchFamily="34" charset="-120"/>
               </a:rPr>
-              <a:t>Black students are 3× more likely than peers to be sent to DAEP for offenses that don't automatically require placement (gang involvement, threats).</a:t>
-            </a:r>
-            <a:endParaRPr lang="en-US" sz="1600" dirty="0"/>
-          </a:p>
-          <a:p>
-            <a:pPr marL="342900" indent="-342900">
-              <a:spcAft>
-                <a:spcPts val="600"/>
-              </a:spcAft>
-              <a:buSzPct val="100000"/>
-              <a:buChar char="■"/>
+              <a:t>76704 violent crime</a:t>
+            </a:r>
+            <a:endParaRPr lang="en-US" sz="1100" dirty="0"/>
+          </a:p>
+          <a:p>
+            <a:pPr algn="ctr" indent="0" marL="0">
+              <a:buNone/>
             </a:pPr>
             <a:r>
-              <a:rPr lang="en-US" sz="1600" dirty="0">
+              <a:rPr lang="en-US" sz="1100" dirty="0">
                 <a:solidFill>
-                  <a:srgbClr val="1A1A1A"/>
+                  <a:srgbClr val="2D3E50"/>
                 </a:solidFill>
                 <a:latin typeface="Calibri" pitchFamily="34" charset="0"/>
                 <a:ea typeface="Calibri" pitchFamily="34" charset="-122"/>
                 <a:cs typeface="Calibri" pitchFamily="34" charset="-120"/>
               </a:rPr>
-              <a:t>76.4% of Waco ISD students are flagged at-risk of dropping out — among the highest rates in Central Texas.</a:t>
-            </a:r>
-            <a:endParaRPr lang="en-US" sz="1600" dirty="0"/>
-          </a:p>
-          <a:p>
-            <a:pPr marL="342900" indent="-342900">
-              <a:spcAft>
-                <a:spcPts val="600"/>
-              </a:spcAft>
-              <a:buSzPct val="100000"/>
-              <a:buChar char="■"/>
+              <a:t>vs U.S. average</a:t>
+            </a:r>
+            <a:endParaRPr lang="en-US" sz="1100" dirty="0"/>
+          </a:p>
+        </p:txBody>
+      </p:sp>
+      <p:sp>
+        <p:nvSpPr>
+          <p:cNvPr id="8" name="Shape 6"/>
+          <p:cNvSpPr/>
+          <p:nvPr/>
+        </p:nvSpPr>
+        <p:spPr>
+          <a:xfrm>
+            <a:off x="3383280" y="1280160"/>
+            <a:ext cx="2651760" cy="1463040"/>
+          </a:xfrm>
+          <a:prstGeom prst="rect">
+            <a:avLst/>
+          </a:prstGeom>
+          <a:solidFill>
+            <a:srgbClr val="FFFFFF"/>
+          </a:solidFill>
+          <a:ln w="19050">
+            <a:solidFill>
+              <a:srgbClr val="9B1C2E"/>
+            </a:solidFill>
+            <a:prstDash val="solid"/>
+          </a:ln>
+        </p:spPr>
+      </p:sp>
+      <p:sp>
+        <p:nvSpPr>
+          <p:cNvPr id="9" name="Text 7"/>
+          <p:cNvSpPr/>
+          <p:nvPr/>
+        </p:nvSpPr>
+        <p:spPr>
+          <a:xfrm>
+            <a:off x="3383280" y="1417320"/>
+            <a:ext cx="2651760" cy="804672"/>
+          </a:xfrm>
+          <a:prstGeom prst="rect">
+            <a:avLst/>
+          </a:prstGeom>
+          <a:noFill/>
+          <a:ln/>
+        </p:spPr>
+        <p:txBody>
+          <a:bodyPr wrap="square" rtlCol="0" anchor="ctr"/>
+          <a:lstStyle/>
+          <a:p>
+            <a:pPr algn="ctr" indent="0" marL="0">
+              <a:buNone/>
             </a:pPr>
             <a:r>
-              <a:rPr lang="en-US" sz="1600" dirty="0">
+              <a:rPr lang="en-US" sz="3600" b="1" dirty="0">
                 <a:solidFill>
-                  <a:srgbClr val="1A1A1A"/>
+                  <a:srgbClr val="9B1C2E"/>
                 </a:solidFill>
                 <a:latin typeface="Calibri" pitchFamily="34" charset="0"/>
                 <a:ea typeface="Calibri" pitchFamily="34" charset="-122"/>
                 <a:cs typeface="Calibri" pitchFamily="34" charset="-120"/>
               </a:rPr>
-              <a:t>District-wide grad rate is 86%, but the Black-student rate isn't published cleanly — the gap is the story.</a:t>
-            </a:r>
-            <a:endParaRPr lang="en-US" sz="1600" dirty="0"/>
-          </a:p>
-          <a:p>
-            <a:pPr marL="342900" indent="-342900">
-              <a:spcAft>
-                <a:spcPts val="600"/>
-              </a:spcAft>
-              <a:buSzPct val="100000"/>
-              <a:buChar char="■"/>
+              <a:t>3×</a:t>
+            </a:r>
+            <a:endParaRPr lang="en-US" sz="3600" dirty="0"/>
+          </a:p>
+        </p:txBody>
+      </p:sp>
+      <p:sp>
+        <p:nvSpPr>
+          <p:cNvPr id="10" name="Text 8"/>
+          <p:cNvSpPr/>
+          <p:nvPr/>
+        </p:nvSpPr>
+        <p:spPr>
+          <a:xfrm>
+            <a:off x="3474720" y="2157984"/>
+            <a:ext cx="2468880" cy="512064"/>
+          </a:xfrm>
+          <a:prstGeom prst="rect">
+            <a:avLst/>
+          </a:prstGeom>
+          <a:noFill/>
+          <a:ln/>
+        </p:spPr>
+        <p:txBody>
+          <a:bodyPr wrap="square" rtlCol="0" anchor="ctr"/>
+          <a:lstStyle/>
+          <a:p>
+            <a:pPr algn="ctr" indent="0" marL="0">
+              <a:buNone/>
             </a:pPr>
             <a:r>
-              <a:rPr lang="en-US" sz="1600" dirty="0">
+              <a:rPr lang="en-US" sz="1100" dirty="0">
                 <a:solidFill>
-                  <a:srgbClr val="1A1A1A"/>
+                  <a:srgbClr val="2D3E50"/>
                 </a:solidFill>
                 <a:latin typeface="Calibri" pitchFamily="34" charset="0"/>
                 <a:ea typeface="Calibri" pitchFamily="34" charset="-122"/>
                 <a:cs typeface="Calibri" pitchFamily="34" charset="-120"/>
               </a:rPr>
-              <a:t>Every DAEP placement materially increases the probability of justice-system involvement within 24 months. That's the pipeline. We can disrupt it at the campus level.</a:t>
-            </a:r>
-            <a:endParaRPr lang="en-US" sz="1600" dirty="0"/>
+              <a:t>Black students sent to</a:t>
+            </a:r>
+            <a:endParaRPr lang="en-US" sz="1100" dirty="0"/>
+          </a:p>
+          <a:p>
+            <a:pPr algn="ctr" indent="0" marL="0">
+              <a:buNone/>
+            </a:pPr>
+            <a:r>
+              <a:rPr lang="en-US" sz="1100" dirty="0">
+                <a:solidFill>
+                  <a:srgbClr val="2D3E50"/>
+                </a:solidFill>
+                <a:latin typeface="Calibri" pitchFamily="34" charset="0"/>
+                <a:ea typeface="Calibri" pitchFamily="34" charset="-122"/>
+                <a:cs typeface="Calibri" pitchFamily="34" charset="-120"/>
+              </a:rPr>
+              <a:t>alt ed vs peers (TEA)</a:t>
+            </a:r>
+            <a:endParaRPr lang="en-US" sz="1100" dirty="0"/>
           </a:p>
         </p:txBody>
       </p:sp>
       <p:sp>
         <p:nvSpPr>
-          <p:cNvPr id="6" name="Text 4"/>
+          <p:cNvPr id="11" name="Shape 9"/>
+          <p:cNvSpPr/>
+          <p:nvPr/>
+        </p:nvSpPr>
+        <p:spPr>
+          <a:xfrm>
+            <a:off x="6217920" y="1280160"/>
+            <a:ext cx="2651760" cy="1463040"/>
+          </a:xfrm>
+          <a:prstGeom prst="rect">
+            <a:avLst/>
+          </a:prstGeom>
+          <a:solidFill>
+            <a:srgbClr val="FFFFFF"/>
+          </a:solidFill>
+          <a:ln w="19050">
+            <a:solidFill>
+              <a:srgbClr val="9B1C2E"/>
+            </a:solidFill>
+            <a:prstDash val="solid"/>
+          </a:ln>
+        </p:spPr>
+      </p:sp>
+      <p:sp>
+        <p:nvSpPr>
+          <p:cNvPr id="12" name="Text 10"/>
+          <p:cNvSpPr/>
+          <p:nvPr/>
+        </p:nvSpPr>
+        <p:spPr>
+          <a:xfrm>
+            <a:off x="6217920" y="1417320"/>
+            <a:ext cx="2651760" cy="804672"/>
+          </a:xfrm>
+          <a:prstGeom prst="rect">
+            <a:avLst/>
+          </a:prstGeom>
+          <a:noFill/>
+          <a:ln/>
+        </p:spPr>
+        <p:txBody>
+          <a:bodyPr wrap="square" rtlCol="0" anchor="ctr"/>
+          <a:lstStyle/>
+          <a:p>
+            <a:pPr algn="ctr" indent="0" marL="0">
+              <a:buNone/>
+            </a:pPr>
+            <a:r>
+              <a:rPr lang="en-US" sz="3600" b="1" dirty="0">
+                <a:solidFill>
+                  <a:srgbClr val="9B1C2E"/>
+                </a:solidFill>
+                <a:latin typeface="Calibri" pitchFamily="34" charset="0"/>
+                <a:ea typeface="Calibri" pitchFamily="34" charset="-122"/>
+                <a:cs typeface="Calibri" pitchFamily="34" charset="-120"/>
+              </a:rPr>
+              <a:t>60%</a:t>
+            </a:r>
+            <a:endParaRPr lang="en-US" sz="3600" dirty="0"/>
+          </a:p>
+        </p:txBody>
+      </p:sp>
+      <p:sp>
+        <p:nvSpPr>
+          <p:cNvPr id="13" name="Text 11"/>
+          <p:cNvSpPr/>
+          <p:nvPr/>
+        </p:nvSpPr>
+        <p:spPr>
+          <a:xfrm>
+            <a:off x="6309360" y="2157984"/>
+            <a:ext cx="2468880" cy="512064"/>
+          </a:xfrm>
+          <a:prstGeom prst="rect">
+            <a:avLst/>
+          </a:prstGeom>
+          <a:noFill/>
+          <a:ln/>
+        </p:spPr>
+        <p:txBody>
+          <a:bodyPr wrap="square" rtlCol="0" anchor="ctr"/>
+          <a:lstStyle/>
+          <a:p>
+            <a:pPr algn="ctr" indent="0" marL="0">
+              <a:buNone/>
+            </a:pPr>
+            <a:r>
+              <a:rPr lang="en-US" sz="1100" dirty="0">
+                <a:solidFill>
+                  <a:srgbClr val="2D3E50"/>
+                </a:solidFill>
+                <a:latin typeface="Calibri" pitchFamily="34" charset="0"/>
+                <a:ea typeface="Calibri" pitchFamily="34" charset="-122"/>
+                <a:cs typeface="Calibri" pitchFamily="34" charset="-120"/>
+              </a:rPr>
+              <a:t>of discretionary DAEP</a:t>
+            </a:r>
+            <a:endParaRPr lang="en-US" sz="1100" dirty="0"/>
+          </a:p>
+          <a:p>
+            <a:pPr algn="ctr" indent="0" marL="0">
+              <a:buNone/>
+            </a:pPr>
+            <a:r>
+              <a:rPr lang="en-US" sz="1100" dirty="0">
+                <a:solidFill>
+                  <a:srgbClr val="2D3E50"/>
+                </a:solidFill>
+                <a:latin typeface="Calibri" pitchFamily="34" charset="0"/>
+                <a:ea typeface="Calibri" pitchFamily="34" charset="-122"/>
+                <a:cs typeface="Calibri" pitchFamily="34" charset="-120"/>
+              </a:rPr>
+              <a:t> placements are Black</a:t>
+            </a:r>
+            <a:endParaRPr lang="en-US" sz="1100" dirty="0"/>
+          </a:p>
+        </p:txBody>
+      </p:sp>
+      <p:sp>
+        <p:nvSpPr>
+          <p:cNvPr id="14" name="Shape 12"/>
+          <p:cNvSpPr/>
+          <p:nvPr/>
+        </p:nvSpPr>
+        <p:spPr>
+          <a:xfrm>
+            <a:off x="9052560" y="1280160"/>
+            <a:ext cx="2651760" cy="1463040"/>
+          </a:xfrm>
+          <a:prstGeom prst="rect">
+            <a:avLst/>
+          </a:prstGeom>
+          <a:solidFill>
+            <a:srgbClr val="FFFFFF"/>
+          </a:solidFill>
+          <a:ln w="19050">
+            <a:solidFill>
+              <a:srgbClr val="9B1C2E"/>
+            </a:solidFill>
+            <a:prstDash val="solid"/>
+          </a:ln>
+        </p:spPr>
+      </p:sp>
+      <p:sp>
+        <p:nvSpPr>
+          <p:cNvPr id="15" name="Text 13"/>
+          <p:cNvSpPr/>
+          <p:nvPr/>
+        </p:nvSpPr>
+        <p:spPr>
+          <a:xfrm>
+            <a:off x="9052560" y="1417320"/>
+            <a:ext cx="2651760" cy="804672"/>
+          </a:xfrm>
+          <a:prstGeom prst="rect">
+            <a:avLst/>
+          </a:prstGeom>
+          <a:noFill/>
+          <a:ln/>
+        </p:spPr>
+        <p:txBody>
+          <a:bodyPr wrap="square" rtlCol="0" anchor="ctr"/>
+          <a:lstStyle/>
+          <a:p>
+            <a:pPr algn="ctr" indent="0" marL="0">
+              <a:buNone/>
+            </a:pPr>
+            <a:r>
+              <a:rPr lang="en-US" sz="3600" b="1" dirty="0">
+                <a:solidFill>
+                  <a:srgbClr val="9B1C2E"/>
+                </a:solidFill>
+                <a:latin typeface="Calibri" pitchFamily="34" charset="0"/>
+                <a:ea typeface="Calibri" pitchFamily="34" charset="-122"/>
+                <a:cs typeface="Calibri" pitchFamily="34" charset="-120"/>
+              </a:rPr>
+              <a:t>Stage 4</a:t>
+            </a:r>
+            <a:endParaRPr lang="en-US" sz="3600" dirty="0"/>
+          </a:p>
+        </p:txBody>
+      </p:sp>
+      <p:sp>
+        <p:nvSpPr>
+          <p:cNvPr id="16" name="Text 14"/>
+          <p:cNvSpPr/>
+          <p:nvPr/>
+        </p:nvSpPr>
+        <p:spPr>
+          <a:xfrm>
+            <a:off x="9144000" y="2157984"/>
+            <a:ext cx="2468880" cy="512064"/>
+          </a:xfrm>
+          <a:prstGeom prst="rect">
+            <a:avLst/>
+          </a:prstGeom>
+          <a:noFill/>
+          <a:ln/>
+        </p:spPr>
+        <p:txBody>
+          <a:bodyPr wrap="square" rtlCol="0" anchor="ctr"/>
+          <a:lstStyle/>
+          <a:p>
+            <a:pPr algn="ctr" indent="0" marL="0">
+              <a:buNone/>
+            </a:pPr>
+            <a:r>
+              <a:rPr lang="en-US" sz="1100" dirty="0">
+                <a:solidFill>
+                  <a:srgbClr val="2D3E50"/>
+                </a:solidFill>
+                <a:latin typeface="Calibri" pitchFamily="34" charset="0"/>
+                <a:ea typeface="Calibri" pitchFamily="34" charset="-122"/>
+                <a:cs typeface="Calibri" pitchFamily="34" charset="-120"/>
+              </a:rPr>
+              <a:t>TEA discipline reprimand</a:t>
+            </a:r>
+            <a:endParaRPr lang="en-US" sz="1100" dirty="0"/>
+          </a:p>
+          <a:p>
+            <a:pPr algn="ctr" indent="0" marL="0">
+              <a:buNone/>
+            </a:pPr>
+            <a:r>
+              <a:rPr lang="en-US" sz="1100" dirty="0">
+                <a:solidFill>
+                  <a:srgbClr val="2D3E50"/>
+                </a:solidFill>
+                <a:latin typeface="Calibri" pitchFamily="34" charset="0"/>
+                <a:ea typeface="Calibri" pitchFamily="34" charset="-122"/>
+                <a:cs typeface="Calibri" pitchFamily="34" charset="-120"/>
+              </a:rPr>
+              <a:t>(most severe rating)</a:t>
+            </a:r>
+            <a:endParaRPr lang="en-US" sz="1100" dirty="0"/>
+          </a:p>
+        </p:txBody>
+      </p:sp>
+      <p:sp>
+        <p:nvSpPr>
+          <p:cNvPr id="17" name="Shape 15"/>
+          <p:cNvSpPr/>
+          <p:nvPr/>
+        </p:nvSpPr>
+        <p:spPr>
+          <a:xfrm>
+            <a:off x="548640" y="3017520"/>
+            <a:ext cx="2651760" cy="1463040"/>
+          </a:xfrm>
+          <a:prstGeom prst="rect">
+            <a:avLst/>
+          </a:prstGeom>
+          <a:solidFill>
+            <a:srgbClr val="FFFFFF"/>
+          </a:solidFill>
+          <a:ln w="19050">
+            <a:solidFill>
+              <a:srgbClr val="2D3E50"/>
+            </a:solidFill>
+            <a:prstDash val="solid"/>
+          </a:ln>
+        </p:spPr>
+      </p:sp>
+      <p:sp>
+        <p:nvSpPr>
+          <p:cNvPr id="18" name="Text 16"/>
+          <p:cNvSpPr/>
+          <p:nvPr/>
+        </p:nvSpPr>
+        <p:spPr>
+          <a:xfrm>
+            <a:off x="548640" y="3154680"/>
+            <a:ext cx="2651760" cy="804672"/>
+          </a:xfrm>
+          <a:prstGeom prst="rect">
+            <a:avLst/>
+          </a:prstGeom>
+          <a:noFill/>
+          <a:ln/>
+        </p:spPr>
+        <p:txBody>
+          <a:bodyPr wrap="square" rtlCol="0" anchor="ctr"/>
+          <a:lstStyle/>
+          <a:p>
+            <a:pPr algn="ctr" indent="0" marL="0">
+              <a:buNone/>
+            </a:pPr>
+            <a:r>
+              <a:rPr lang="en-US" sz="3600" b="1" dirty="0">
+                <a:solidFill>
+                  <a:srgbClr val="2D3E50"/>
+                </a:solidFill>
+                <a:latin typeface="Calibri" pitchFamily="34" charset="0"/>
+                <a:ea typeface="Calibri" pitchFamily="34" charset="-122"/>
+                <a:cs typeface="Calibri" pitchFamily="34" charset="-120"/>
+              </a:rPr>
+              <a:t>76.4%</a:t>
+            </a:r>
+            <a:endParaRPr lang="en-US" sz="3600" dirty="0"/>
+          </a:p>
+        </p:txBody>
+      </p:sp>
+      <p:sp>
+        <p:nvSpPr>
+          <p:cNvPr id="19" name="Text 17"/>
+          <p:cNvSpPr/>
+          <p:nvPr/>
+        </p:nvSpPr>
+        <p:spPr>
+          <a:xfrm>
+            <a:off x="640080" y="3895344"/>
+            <a:ext cx="2468880" cy="512064"/>
+          </a:xfrm>
+          <a:prstGeom prst="rect">
+            <a:avLst/>
+          </a:prstGeom>
+          <a:noFill/>
+          <a:ln/>
+        </p:spPr>
+        <p:txBody>
+          <a:bodyPr wrap="square" rtlCol="0" anchor="ctr"/>
+          <a:lstStyle/>
+          <a:p>
+            <a:pPr algn="ctr" indent="0" marL="0">
+              <a:buNone/>
+            </a:pPr>
+            <a:r>
+              <a:rPr lang="en-US" sz="1100" dirty="0">
+                <a:solidFill>
+                  <a:srgbClr val="2D3E50"/>
+                </a:solidFill>
+                <a:latin typeface="Calibri" pitchFamily="34" charset="0"/>
+                <a:ea typeface="Calibri" pitchFamily="34" charset="-122"/>
+                <a:cs typeface="Calibri" pitchFamily="34" charset="-120"/>
+              </a:rPr>
+              <a:t>Waco ISD students</a:t>
+            </a:r>
+            <a:endParaRPr lang="en-US" sz="1100" dirty="0"/>
+          </a:p>
+          <a:p>
+            <a:pPr algn="ctr" indent="0" marL="0">
+              <a:buNone/>
+            </a:pPr>
+            <a:r>
+              <a:rPr lang="en-US" sz="1100" dirty="0">
+                <a:solidFill>
+                  <a:srgbClr val="2D3E50"/>
+                </a:solidFill>
+                <a:latin typeface="Calibri" pitchFamily="34" charset="0"/>
+                <a:ea typeface="Calibri" pitchFamily="34" charset="-122"/>
+                <a:cs typeface="Calibri" pitchFamily="34" charset="-120"/>
+              </a:rPr>
+              <a:t>flagged at-risk</a:t>
+            </a:r>
+            <a:endParaRPr lang="en-US" sz="1100" dirty="0"/>
+          </a:p>
+        </p:txBody>
+      </p:sp>
+      <p:sp>
+        <p:nvSpPr>
+          <p:cNvPr id="20" name="Shape 18"/>
+          <p:cNvSpPr/>
+          <p:nvPr/>
+        </p:nvSpPr>
+        <p:spPr>
+          <a:xfrm>
+            <a:off x="3383280" y="3017520"/>
+            <a:ext cx="2651760" cy="1463040"/>
+          </a:xfrm>
+          <a:prstGeom prst="rect">
+            <a:avLst/>
+          </a:prstGeom>
+          <a:solidFill>
+            <a:srgbClr val="FFFFFF"/>
+          </a:solidFill>
+          <a:ln w="19050">
+            <a:solidFill>
+              <a:srgbClr val="2D3E50"/>
+            </a:solidFill>
+            <a:prstDash val="solid"/>
+          </a:ln>
+        </p:spPr>
+      </p:sp>
+      <p:sp>
+        <p:nvSpPr>
+          <p:cNvPr id="21" name="Text 19"/>
+          <p:cNvSpPr/>
+          <p:nvPr/>
+        </p:nvSpPr>
+        <p:spPr>
+          <a:xfrm>
+            <a:off x="3383280" y="3154680"/>
+            <a:ext cx="2651760" cy="804672"/>
+          </a:xfrm>
+          <a:prstGeom prst="rect">
+            <a:avLst/>
+          </a:prstGeom>
+          <a:noFill/>
+          <a:ln/>
+        </p:spPr>
+        <p:txBody>
+          <a:bodyPr wrap="square" rtlCol="0" anchor="ctr"/>
+          <a:lstStyle/>
+          <a:p>
+            <a:pPr algn="ctr" indent="0" marL="0">
+              <a:buNone/>
+            </a:pPr>
+            <a:r>
+              <a:rPr lang="en-US" sz="3600" b="1" dirty="0">
+                <a:solidFill>
+                  <a:srgbClr val="2D3E50"/>
+                </a:solidFill>
+                <a:latin typeface="Calibri" pitchFamily="34" charset="0"/>
+                <a:ea typeface="Calibri" pitchFamily="34" charset="-122"/>
+                <a:cs typeface="Calibri" pitchFamily="34" charset="-120"/>
+              </a:rPr>
+              <a:t>~1,300</a:t>
+            </a:r>
+            <a:endParaRPr lang="en-US" sz="3600" dirty="0"/>
+          </a:p>
+        </p:txBody>
+      </p:sp>
+      <p:sp>
+        <p:nvSpPr>
+          <p:cNvPr id="22" name="Text 20"/>
+          <p:cNvSpPr/>
+          <p:nvPr/>
+        </p:nvSpPr>
+        <p:spPr>
+          <a:xfrm>
+            <a:off x="3474720" y="3895344"/>
+            <a:ext cx="2468880" cy="512064"/>
+          </a:xfrm>
+          <a:prstGeom prst="rect">
+            <a:avLst/>
+          </a:prstGeom>
+          <a:noFill/>
+          <a:ln/>
+        </p:spPr>
+        <p:txBody>
+          <a:bodyPr wrap="square" rtlCol="0" anchor="ctr"/>
+          <a:lstStyle/>
+          <a:p>
+            <a:pPr algn="ctr" indent="0" marL="0">
+              <a:buNone/>
+            </a:pPr>
+            <a:r>
+              <a:rPr lang="en-US" sz="1100" dirty="0">
+                <a:solidFill>
+                  <a:srgbClr val="2D3E50"/>
+                </a:solidFill>
+                <a:latin typeface="Calibri" pitchFamily="34" charset="0"/>
+                <a:ea typeface="Calibri" pitchFamily="34" charset="-122"/>
+                <a:cs typeface="Calibri" pitchFamily="34" charset="-120"/>
+              </a:rPr>
+              <a:t>Est. disconnected Black</a:t>
+            </a:r>
+            <a:endParaRPr lang="en-US" sz="1100" dirty="0"/>
+          </a:p>
+          <a:p>
+            <a:pPr algn="ctr" indent="0" marL="0">
+              <a:buNone/>
+            </a:pPr>
+            <a:r>
+              <a:rPr lang="en-US" sz="1100" dirty="0">
+                <a:solidFill>
+                  <a:srgbClr val="2D3E50"/>
+                </a:solidFill>
+                <a:latin typeface="Calibri" pitchFamily="34" charset="0"/>
+                <a:ea typeface="Calibri" pitchFamily="34" charset="-122"/>
+                <a:cs typeface="Calibri" pitchFamily="34" charset="-120"/>
+              </a:rPr>
+              <a:t>youth 16–24 county-wide</a:t>
+            </a:r>
+            <a:endParaRPr lang="en-US" sz="1100" dirty="0"/>
+          </a:p>
+        </p:txBody>
+      </p:sp>
+      <p:sp>
+        <p:nvSpPr>
+          <p:cNvPr id="23" name="Shape 21"/>
+          <p:cNvSpPr/>
+          <p:nvPr/>
+        </p:nvSpPr>
+        <p:spPr>
+          <a:xfrm>
+            <a:off x="6217920" y="3017520"/>
+            <a:ext cx="2651760" cy="1463040"/>
+          </a:xfrm>
+          <a:prstGeom prst="rect">
+            <a:avLst/>
+          </a:prstGeom>
+          <a:solidFill>
+            <a:srgbClr val="FFFFFF"/>
+          </a:solidFill>
+          <a:ln w="19050">
+            <a:solidFill>
+              <a:srgbClr val="2D3E50"/>
+            </a:solidFill>
+            <a:prstDash val="solid"/>
+          </a:ln>
+        </p:spPr>
+      </p:sp>
+      <p:sp>
+        <p:nvSpPr>
+          <p:cNvPr id="24" name="Text 22"/>
+          <p:cNvSpPr/>
+          <p:nvPr/>
+        </p:nvSpPr>
+        <p:spPr>
+          <a:xfrm>
+            <a:off x="6217920" y="3154680"/>
+            <a:ext cx="2651760" cy="804672"/>
+          </a:xfrm>
+          <a:prstGeom prst="rect">
+            <a:avLst/>
+          </a:prstGeom>
+          <a:noFill/>
+          <a:ln/>
+        </p:spPr>
+        <p:txBody>
+          <a:bodyPr wrap="square" rtlCol="0" anchor="ctr"/>
+          <a:lstStyle/>
+          <a:p>
+            <a:pPr algn="ctr" indent="0" marL="0">
+              <a:buNone/>
+            </a:pPr>
+            <a:r>
+              <a:rPr lang="en-US" sz="3600" b="1" dirty="0">
+                <a:solidFill>
+                  <a:srgbClr val="2D3E50"/>
+                </a:solidFill>
+                <a:latin typeface="Calibri" pitchFamily="34" charset="0"/>
+                <a:ea typeface="Calibri" pitchFamily="34" charset="-122"/>
+                <a:cs typeface="Calibri" pitchFamily="34" charset="-120"/>
+              </a:rPr>
+              <a:t>~3,200</a:t>
+            </a:r>
+            <a:endParaRPr lang="en-US" sz="3600" dirty="0"/>
+          </a:p>
+        </p:txBody>
+      </p:sp>
+      <p:sp>
+        <p:nvSpPr>
+          <p:cNvPr id="25" name="Text 23"/>
+          <p:cNvSpPr/>
+          <p:nvPr/>
+        </p:nvSpPr>
+        <p:spPr>
+          <a:xfrm>
+            <a:off x="6309360" y="3895344"/>
+            <a:ext cx="2468880" cy="512064"/>
+          </a:xfrm>
+          <a:prstGeom prst="rect">
+            <a:avLst/>
+          </a:prstGeom>
+          <a:noFill/>
+          <a:ln/>
+        </p:spPr>
+        <p:txBody>
+          <a:bodyPr wrap="square" rtlCol="0" anchor="ctr"/>
+          <a:lstStyle/>
+          <a:p>
+            <a:pPr algn="ctr" indent="0" marL="0">
+              <a:buNone/>
+            </a:pPr>
+            <a:r>
+              <a:rPr lang="en-US" sz="1100" dirty="0">
+                <a:solidFill>
+                  <a:srgbClr val="2D3E50"/>
+                </a:solidFill>
+                <a:latin typeface="Calibri" pitchFamily="34" charset="0"/>
+                <a:ea typeface="Calibri" pitchFamily="34" charset="-122"/>
+                <a:cs typeface="Calibri" pitchFamily="34" charset="-120"/>
+              </a:rPr>
+              <a:t>Black children in single-</a:t>
+            </a:r>
+            <a:endParaRPr lang="en-US" sz="1100" dirty="0"/>
+          </a:p>
+          <a:p>
+            <a:pPr algn="ctr" indent="0" marL="0">
+              <a:buNone/>
+            </a:pPr>
+            <a:r>
+              <a:rPr lang="en-US" sz="1100" dirty="0">
+                <a:solidFill>
+                  <a:srgbClr val="2D3E50"/>
+                </a:solidFill>
+                <a:latin typeface="Calibri" pitchFamily="34" charset="0"/>
+                <a:ea typeface="Calibri" pitchFamily="34" charset="-122"/>
+                <a:cs typeface="Calibri" pitchFamily="34" charset="-120"/>
+              </a:rPr>
+              <a:t>parent households</a:t>
+            </a:r>
+            <a:endParaRPr lang="en-US" sz="1100" dirty="0"/>
+          </a:p>
+        </p:txBody>
+      </p:sp>
+      <p:sp>
+        <p:nvSpPr>
+          <p:cNvPr id="26" name="Shape 24"/>
+          <p:cNvSpPr/>
+          <p:nvPr/>
+        </p:nvSpPr>
+        <p:spPr>
+          <a:xfrm>
+            <a:off x="9052560" y="3017520"/>
+            <a:ext cx="2651760" cy="1463040"/>
+          </a:xfrm>
+          <a:prstGeom prst="rect">
+            <a:avLst/>
+          </a:prstGeom>
+          <a:solidFill>
+            <a:srgbClr val="FFFFFF"/>
+          </a:solidFill>
+          <a:ln w="19050">
+            <a:solidFill>
+              <a:srgbClr val="D4A24C"/>
+            </a:solidFill>
+            <a:prstDash val="solid"/>
+          </a:ln>
+        </p:spPr>
+      </p:sp>
+      <p:sp>
+        <p:nvSpPr>
+          <p:cNvPr id="27" name="Text 25"/>
+          <p:cNvSpPr/>
+          <p:nvPr/>
+        </p:nvSpPr>
+        <p:spPr>
+          <a:xfrm>
+            <a:off x="9052560" y="3154680"/>
+            <a:ext cx="2651760" cy="804672"/>
+          </a:xfrm>
+          <a:prstGeom prst="rect">
+            <a:avLst/>
+          </a:prstGeom>
+          <a:noFill/>
+          <a:ln/>
+        </p:spPr>
+        <p:txBody>
+          <a:bodyPr wrap="square" rtlCol="0" anchor="ctr"/>
+          <a:lstStyle/>
+          <a:p>
+            <a:pPr algn="ctr" indent="0" marL="0">
+              <a:buNone/>
+            </a:pPr>
+            <a:r>
+              <a:rPr lang="en-US" sz="3600" b="1" dirty="0">
+                <a:solidFill>
+                  <a:srgbClr val="D4A24C"/>
+                </a:solidFill>
+                <a:latin typeface="Calibri" pitchFamily="34" charset="0"/>
+                <a:ea typeface="Calibri" pitchFamily="34" charset="-122"/>
+                <a:cs typeface="Calibri" pitchFamily="34" charset="-120"/>
+              </a:rPr>
+              <a:t>~700+</a:t>
+            </a:r>
+            <a:endParaRPr lang="en-US" sz="3600" dirty="0"/>
+          </a:p>
+        </p:txBody>
+      </p:sp>
+      <p:sp>
+        <p:nvSpPr>
+          <p:cNvPr id="28" name="Text 26"/>
+          <p:cNvSpPr/>
+          <p:nvPr/>
+        </p:nvSpPr>
+        <p:spPr>
+          <a:xfrm>
+            <a:off x="9144000" y="3895344"/>
+            <a:ext cx="2468880" cy="512064"/>
+          </a:xfrm>
+          <a:prstGeom prst="rect">
+            <a:avLst/>
+          </a:prstGeom>
+          <a:noFill/>
+          <a:ln/>
+        </p:spPr>
+        <p:txBody>
+          <a:bodyPr wrap="square" rtlCol="0" anchor="ctr"/>
+          <a:lstStyle/>
+          <a:p>
+            <a:pPr algn="ctr" indent="0" marL="0">
+              <a:buNone/>
+            </a:pPr>
+            <a:r>
+              <a:rPr lang="en-US" sz="1100" dirty="0">
+                <a:solidFill>
+                  <a:srgbClr val="2D3E50"/>
+                </a:solidFill>
+                <a:latin typeface="Calibri" pitchFamily="34" charset="0"/>
+                <a:ea typeface="Calibri" pitchFamily="34" charset="-122"/>
+                <a:cs typeface="Calibri" pitchFamily="34" charset="-120"/>
+              </a:rPr>
+              <a:t>Mentor gap (Black-male</a:t>
+            </a:r>
+            <a:endParaRPr lang="en-US" sz="1100" dirty="0"/>
+          </a:p>
+          <a:p>
+            <a:pPr algn="ctr" indent="0" marL="0">
+              <a:buNone/>
+            </a:pPr>
+            <a:r>
+              <a:rPr lang="en-US" sz="1100" dirty="0">
+                <a:solidFill>
+                  <a:srgbClr val="2D3E50"/>
+                </a:solidFill>
+                <a:latin typeface="Calibri" pitchFamily="34" charset="0"/>
+                <a:ea typeface="Calibri" pitchFamily="34" charset="-122"/>
+                <a:cs typeface="Calibri" pitchFamily="34" charset="-120"/>
+              </a:rPr>
+              <a:t>mentors needed)</a:t>
+            </a:r>
+            <a:endParaRPr lang="en-US" sz="1100" dirty="0"/>
+          </a:p>
+        </p:txBody>
+      </p:sp>
+      <p:sp>
+        <p:nvSpPr>
+          <p:cNvPr id="29" name="Text 27"/>
+          <p:cNvSpPr/>
+          <p:nvPr/>
+        </p:nvSpPr>
+        <p:spPr>
+          <a:xfrm>
+            <a:off x="548640" y="5029200"/>
+            <a:ext cx="11247120" cy="457200"/>
+          </a:xfrm>
+          <a:prstGeom prst="rect">
+            <a:avLst/>
+          </a:prstGeom>
+          <a:noFill/>
+          <a:ln/>
+        </p:spPr>
+        <p:txBody>
+          <a:bodyPr wrap="square" rtlCol="0" anchor="ctr"/>
+          <a:lstStyle/>
+          <a:p>
+            <a:pPr indent="0" marL="0">
+              <a:buNone/>
+            </a:pPr>
+            <a:r>
+              <a:rPr lang="en-US" sz="1000" i="1" dirty="0">
+                <a:solidFill>
+                  <a:srgbClr val="5A6470"/>
+                </a:solidFill>
+                <a:latin typeface="Calibri" pitchFamily="34" charset="0"/>
+                <a:ea typeface="Calibri" pitchFamily="34" charset="-122"/>
+                <a:cs typeface="Calibri" pitchFamily="34" charset="-120"/>
+              </a:rPr>
+              <a:t>Sources: BestPlaces (zip crime), TEA TAPR 2024, USAFacts/BLS LAUS, ACS 5-yr 2019–2023, TJJD population reports, BBBS Lone Star public statements.</a:t>
+            </a:r>
+            <a:endParaRPr lang="en-US" sz="1000" dirty="0"/>
+          </a:p>
+        </p:txBody>
+      </p:sp>
+      <p:sp>
+        <p:nvSpPr>
+          <p:cNvPr id="30" name="Text 28"/>
           <p:cNvSpPr/>
           <p:nvPr/>
         </p:nvSpPr>
@@ -20206,7 +20716,7 @@
                 <a:ea typeface="Calibri" pitchFamily="34" charset="-122"/>
                 <a:cs typeface="Calibri" pitchFamily="34" charset="-120"/>
               </a:rPr>
-              <a:t>TCAF · Waco · Education · April 17, 2026</a:t>
+              <a:t>TCAF · Waco · By the numbers · April 17, 2026</a:t>
             </a:r>
             <a:endParaRPr lang="en-US" sz="900" dirty="0"/>
           </a:p>
@@ -20302,7 +20812,7 @@
                 <a:ea typeface="Calibri" pitchFamily="34" charset="-122"/>
                 <a:cs typeface="Calibri" pitchFamily="34" charset="-120"/>
               </a:rPr>
-              <a:t>Waco — family structure &amp; SDOH layer</a:t>
+              <a:t>Waco ISD — the measurable school-to-prison pipeline</a:t>
             </a:r>
             <a:endParaRPr lang="en-US" sz="2400" dirty="0"/>
           </a:p>
@@ -20341,7 +20851,7 @@
                 <a:ea typeface="Calibri" pitchFamily="34" charset="-122"/>
                 <a:cs typeface="Calibri" pitchFamily="34" charset="-120"/>
               </a:rPr>
-              <a:t>The conditions that produce the gap (and that we can change).</a:t>
+              <a:t>TEA Stage 4 reprimand makes this the single most actionable upstream lever.</a:t>
             </a:r>
             <a:endParaRPr lang="en-US" sz="1200" dirty="0"/>
           </a:p>
@@ -20384,7 +20894,7 @@
                 <a:ea typeface="Calibri" pitchFamily="34" charset="-122"/>
                 <a:cs typeface="Calibri" pitchFamily="34" charset="-120"/>
               </a:rPr>
-              <a:t>An estimated ~55–60% of Black children in McLennan live in single-parent (predominantly female-headed) households — vs ~24% for White children.</a:t>
+              <a:t>Black students = ~30% of Waco ISD enrollment but ~60% of discretionary DAEP (alternative ed) placements.</a:t>
             </a:r>
             <a:endParaRPr lang="en-US" sz="1600" dirty="0"/>
           </a:p>
@@ -20405,7 +20915,7 @@
                 <a:ea typeface="Calibri" pitchFamily="34" charset="-122"/>
                 <a:cs typeface="Calibri" pitchFamily="34" charset="-120"/>
               </a:rPr>
-              <a:t>That maps to ~3,000–3,500 Black children growing up without a residential father in the county.</a:t>
+              <a:t>Black students are 3× more likely than peers to be sent to DAEP for offenses that don't automatically require placement (gang involvement, threats).</a:t>
             </a:r>
             <a:endParaRPr lang="en-US" sz="1600" dirty="0"/>
           </a:p>
@@ -20426,7 +20936,7 @@
                 <a:ea typeface="Calibri" pitchFamily="34" charset="-122"/>
                 <a:cs typeface="Calibri" pitchFamily="34" charset="-120"/>
               </a:rPr>
-              <a:t>76704 carries an 8–12 year life expectancy gap vs West Waco (76710) — comparable to documented gaps in Houston/Dallas Black neighborhoods.</a:t>
+              <a:t>76.4% of Waco ISD students are flagged at-risk of dropping out — among the highest rates in Central Texas.</a:t>
             </a:r>
             <a:endParaRPr lang="en-US" sz="1600" dirty="0"/>
           </a:p>
@@ -20447,7 +20957,7 @@
                 <a:ea typeface="Calibri" pitchFamily="34" charset="-122"/>
                 <a:cs typeface="Calibri" pitchFamily="34" charset="-120"/>
               </a:rPr>
-              <a:t>76704 is a USDA-designated low-income / low-access area for grocery (food desert).</a:t>
+              <a:t>District-wide grad rate is 86%, but the Black-student rate isn't published cleanly — the gap is the story.</a:t>
             </a:r>
             <a:endParaRPr lang="en-US" sz="1600" dirty="0"/>
           </a:p>
@@ -20468,28 +20978,7 @@
                 <a:ea typeface="Calibri" pitchFamily="34" charset="-122"/>
                 <a:cs typeface="Calibri" pitchFamily="34" charset="-120"/>
               </a:rPr>
-              <a:t>Waco Transit coverage from 76704 to major employment hubs is sparse — limiting both youth jobs and adult-male job retention.</a:t>
-            </a:r>
-            <a:endParaRPr lang="en-US" sz="1600" dirty="0"/>
-          </a:p>
-          <a:p>
-            <a:pPr marL="342900" indent="-342900">
-              <a:spcAft>
-                <a:spcPts val="600"/>
-              </a:spcAft>
-              <a:buSzPct val="100000"/>
-              <a:buChar char="■"/>
-            </a:pPr>
-            <a:r>
-              <a:rPr lang="en-US" sz="1600" dirty="0">
-                <a:solidFill>
-                  <a:srgbClr val="1A1A1A"/>
-                </a:solidFill>
-                <a:latin typeface="Calibri" pitchFamily="34" charset="0"/>
-                <a:ea typeface="Calibri" pitchFamily="34" charset="-122"/>
-                <a:cs typeface="Calibri" pitchFamily="34" charset="-120"/>
-              </a:rPr>
-              <a:t>Eviction filings concentrate in 76704 / 76707 — destabilizing the same families we need to anchor.</a:t>
+              <a:t>Every DAEP placement materially increases the probability of justice-system involvement within 24 months. That's the pipeline. We can disrupt it at the campus level.</a:t>
             </a:r>
             <a:endParaRPr lang="en-US" sz="1600" dirty="0"/>
           </a:p>
@@ -20528,7 +21017,7 @@
                 <a:ea typeface="Calibri" pitchFamily="34" charset="-122"/>
                 <a:cs typeface="Calibri" pitchFamily="34" charset="-120"/>
               </a:rPr>
-              <a:t>TCAF · Waco · SDOH · April 17, 2026</a:t>
+              <a:t>TCAF · Waco · Education · April 17, 2026</a:t>
             </a:r>
             <a:endParaRPr lang="en-US" sz="900" dirty="0"/>
           </a:p>
@@ -20624,7 +21113,7 @@
                 <a:ea typeface="Calibri" pitchFamily="34" charset="-122"/>
                 <a:cs typeface="Calibri" pitchFamily="34" charset="-120"/>
               </a:rPr>
-              <a:t>Who's already in the field — and where the gap is</a:t>
+              <a:t>Waco — family structure &amp; SDOH layer</a:t>
             </a:r>
             <a:endParaRPr lang="en-US" sz="2400" dirty="0"/>
           </a:p>
@@ -20663,7 +21152,7 @@
                 <a:ea typeface="Calibri" pitchFamily="34" charset="-122"/>
                 <a:cs typeface="Calibri" pitchFamily="34" charset="-120"/>
               </a:rPr>
-              <a:t>We are not duplicating. We are stitching.</a:t>
+              <a:t>The conditions that produce the gap (and that we can change).</a:t>
             </a:r>
             <a:endParaRPr lang="en-US" sz="1200" dirty="0"/>
           </a:p>
@@ -20706,7 +21195,7 @@
                 <a:ea typeface="Calibri" pitchFamily="34" charset="-122"/>
                 <a:cs typeface="Calibri" pitchFamily="34" charset="-120"/>
               </a:rPr>
-              <a:t>STARRY Fatherhood Program (Columbus Ave, Waco) — only comprehensive fatherhood program. Free. Bell/Coryell/McLennan/Williamson. Funded by TX HHSC + United Way of Waco-McLennan.</a:t>
+              <a:t>An estimated ~55–60% of Black children in McLennan live in single-parent (predominantly female-headed) households — vs ~24% for White children.</a:t>
             </a:r>
             <a:endParaRPr lang="en-US" sz="1600" dirty="0"/>
           </a:p>
@@ -20727,7 +21216,7 @@
                 <a:ea typeface="Calibri" pitchFamily="34" charset="-122"/>
                 <a:cs typeface="Calibri" pitchFamily="34" charset="-120"/>
               </a:rPr>
-              <a:t>BBBS West Central Texas (BBBS Lone Star) — confirmed Black-male mentor waitlist crisis. Boys wait ~2× as long as girls.</a:t>
+              <a:t>That maps to ~3,000–3,500 Black children growing up without a residential father in the county.</a:t>
             </a:r>
             <a:endParaRPr lang="en-US" sz="1600" dirty="0"/>
           </a:p>
@@ -20748,7 +21237,7 @@
                 <a:ea typeface="Calibri" pitchFamily="34" charset="-122"/>
                 <a:cs typeface="Calibri" pitchFamily="34" charset="-120"/>
               </a:rPr>
-              <a:t>Prosper Waco — backbone collective-impact org with a youth pillar; data-ready partner.</a:t>
+              <a:t>76704 carries an 8–12 year life expectancy gap vs West Waco (76710) — comparable to documented gaps in Houston/Dallas Black neighborhoods.</a:t>
             </a:r>
             <a:endParaRPr lang="en-US" sz="1600" dirty="0"/>
           </a:p>
@@ -20769,7 +21258,7 @@
                 <a:ea typeface="Calibri" pitchFamily="34" charset="-122"/>
                 <a:cs typeface="Calibri" pitchFamily="34" charset="-120"/>
               </a:rPr>
-              <a:t>Communities In Schools Waco — campus-level case management, but capacity-limited on Black-male specific work.</a:t>
+              <a:t>76704 is a USDA-designated low-income / low-access area for grocery (food desert).</a:t>
             </a:r>
             <a:endParaRPr lang="en-US" sz="1600" dirty="0"/>
           </a:p>
@@ -20790,7 +21279,7 @@
                 <a:ea typeface="Calibri" pitchFamily="34" charset="-122"/>
                 <a:cs typeface="Calibri" pitchFamily="34" charset="-120"/>
               </a:rPr>
-              <a:t>Waco Foundation, Cooper Foundation, United Way of Waco-McLennan — local funding table.</a:t>
+              <a:t>Waco Transit coverage from 76704 to major employment hubs is sparse — limiting both youth jobs and adult-male job retention.</a:t>
             </a:r>
             <a:endParaRPr lang="en-US" sz="1600" dirty="0"/>
           </a:p>
@@ -20811,28 +21300,7 @@
                 <a:ea typeface="Calibri" pitchFamily="34" charset="-122"/>
                 <a:cs typeface="Calibri" pitchFamily="34" charset="-120"/>
               </a:rPr>
-              <a:t>Baylor University, McLennan Community College, TSTC — workforce / mentor pipeline if activated.</a:t>
-            </a:r>
-            <a:endParaRPr lang="en-US" sz="1600" dirty="0"/>
-          </a:p>
-          <a:p>
-            <a:pPr marL="342900" indent="-342900">
-              <a:spcAft>
-                <a:spcPts val="600"/>
-              </a:spcAft>
-              <a:buSzPct val="100000"/>
-              <a:buChar char="■"/>
-            </a:pPr>
-            <a:r>
-              <a:rPr lang="en-US" sz="1600" dirty="0">
-                <a:solidFill>
-                  <a:srgbClr val="1A1A1A"/>
-                </a:solidFill>
-                <a:latin typeface="Calibri" pitchFamily="34" charset="0"/>
-                <a:ea typeface="Calibri" pitchFamily="34" charset="-122"/>
-                <a:cs typeface="Calibri" pitchFamily="34" charset="-120"/>
-              </a:rPr>
-              <a:t>MISSING: a 100 Black Men chapter, a coordinated Black-male mentor recruitment campaign, and a real-time mentor-to-youth matching layer. That's where TCAF plugs in.</a:t>
+              <a:t>Eviction filings concentrate in 76704 / 76707 — destabilizing the same families we need to anchor.</a:t>
             </a:r>
             <a:endParaRPr lang="en-US" sz="1600" dirty="0"/>
           </a:p>
@@ -20871,7 +21339,7 @@
                 <a:ea typeface="Calibri" pitchFamily="34" charset="-122"/>
                 <a:cs typeface="Calibri" pitchFamily="34" charset="-120"/>
               </a:rPr>
-              <a:t>TCAF · Waco · Capacity · April 17, 2026</a:t>
+              <a:t>TCAF · Waco · SDOH · April 17, 2026</a:t>
             </a:r>
             <a:endParaRPr lang="en-US" sz="900" dirty="0"/>
           </a:p>
@@ -20891,7 +21359,7 @@
     <p:bg>
       <p:bgPr>
         <a:solidFill>
-          <a:srgbClr val="0B2545"/>
+          <a:srgbClr val="F7F2E7"/>
         </a:solidFill>
       </p:bgPr>
     </p:bg>
@@ -20917,18 +21385,18 @@
         </p:nvSpPr>
         <p:spPr>
           <a:xfrm>
-            <a:off x="0" y="3383280"/>
-            <a:ext cx="12188952" cy="45720"/>
+            <a:off x="0" y="0"/>
+            <a:ext cx="12188952" cy="822960"/>
           </a:xfrm>
           <a:prstGeom prst="rect">
             <a:avLst/>
           </a:prstGeom>
           <a:solidFill>
-            <a:srgbClr val="D4A24C"/>
+            <a:srgbClr val="0B2545"/>
           </a:solidFill>
           <a:ln w="12700">
             <a:solidFill>
-              <a:srgbClr val="D4A24C"/>
+              <a:srgbClr val="0B2545"/>
             </a:solidFill>
             <a:prstDash val="solid"/>
           </a:ln>
@@ -20942,8 +21410,8 @@
         </p:nvSpPr>
         <p:spPr>
           <a:xfrm>
-            <a:off x="457200" y="2057400"/>
-            <a:ext cx="11274552" cy="914400"/>
+            <a:off x="365760" y="109728"/>
+            <a:ext cx="11457432" cy="457200"/>
           </a:xfrm>
           <a:prstGeom prst="rect">
             <a:avLst/>
@@ -20955,11 +21423,11 @@
           <a:bodyPr wrap="square" rtlCol="0" anchor="ctr"/>
           <a:lstStyle/>
           <a:p>
-            <a:pPr algn="ctr" indent="0" marL="0">
+            <a:pPr indent="0" marL="0">
               <a:buNone/>
             </a:pPr>
             <a:r>
-              <a:rPr lang="en-US" sz="4400" b="1" dirty="0">
+              <a:rPr lang="en-US" sz="2400" b="1" dirty="0">
                 <a:solidFill>
                   <a:srgbClr val="FFFFFF"/>
                 </a:solidFill>
@@ -20967,9 +21435,9 @@
                 <a:ea typeface="Calibri" pitchFamily="34" charset="-122"/>
                 <a:cs typeface="Calibri" pitchFamily="34" charset="-120"/>
               </a:rPr>
-              <a:t>PART B · AUSTIN / TRAVIS COUNTY</a:t>
-            </a:r>
-            <a:endParaRPr lang="en-US" sz="4400" dirty="0"/>
+              <a:t>Who's already in the field — and where the gap is</a:t>
+            </a:r>
+            <a:endParaRPr lang="en-US" sz="2400" dirty="0"/>
           </a:p>
         </p:txBody>
       </p:sp>
@@ -20981,8 +21449,8 @@
         </p:nvSpPr>
         <p:spPr>
           <a:xfrm>
-            <a:off x="457200" y="3611880"/>
-            <a:ext cx="11274552" cy="548640"/>
+            <a:off x="365760" y="457200"/>
+            <a:ext cx="11457432" cy="320040"/>
           </a:xfrm>
           <a:prstGeom prst="rect">
             <a:avLst/>
@@ -20994,11 +21462,11 @@
           <a:bodyPr wrap="square" rtlCol="0" anchor="ctr"/>
           <a:lstStyle/>
           <a:p>
-            <a:pPr algn="ctr" indent="0" marL="0">
+            <a:pPr indent="0" marL="0">
               <a:buNone/>
             </a:pPr>
             <a:r>
-              <a:rPr lang="en-US" sz="1800" i="1" dirty="0">
+              <a:rPr lang="en-US" sz="1200" i="1" dirty="0">
                 <a:solidFill>
                   <a:srgbClr val="D4A24C"/>
                 </a:solidFill>
@@ -21006,9 +21474,217 @@
                 <a:ea typeface="Calibri" pitchFamily="34" charset="-122"/>
                 <a:cs typeface="Calibri" pitchFamily="34" charset="-120"/>
               </a:rPr>
-              <a:t>The dispersed picture: gentrification scattered the same problem.</a:t>
-            </a:r>
-            <a:endParaRPr lang="en-US" sz="1800" dirty="0"/>
+              <a:t>We are not duplicating. We are stitching.</a:t>
+            </a:r>
+            <a:endParaRPr lang="en-US" sz="1200" dirty="0"/>
+          </a:p>
+        </p:txBody>
+      </p:sp>
+      <p:sp>
+        <p:nvSpPr>
+          <p:cNvPr id="5" name="Text 3"/>
+          <p:cNvSpPr/>
+          <p:nvPr/>
+        </p:nvSpPr>
+        <p:spPr>
+          <a:xfrm>
+            <a:off x="548640" y="1097280"/>
+            <a:ext cx="11091672" cy="5120640"/>
+          </a:xfrm>
+          <a:prstGeom prst="rect">
+            <a:avLst/>
+          </a:prstGeom>
+          <a:noFill/>
+          <a:ln/>
+        </p:spPr>
+        <p:txBody>
+          <a:bodyPr wrap="square" rtlCol="0" anchor="t"/>
+          <a:lstStyle/>
+          <a:p>
+            <a:pPr marL="342900" indent="-342900">
+              <a:spcAft>
+                <a:spcPts val="600"/>
+              </a:spcAft>
+              <a:buSzPct val="100000"/>
+              <a:buChar char="■"/>
+            </a:pPr>
+            <a:r>
+              <a:rPr lang="en-US" sz="1600" dirty="0">
+                <a:solidFill>
+                  <a:srgbClr val="1A1A1A"/>
+                </a:solidFill>
+                <a:latin typeface="Calibri" pitchFamily="34" charset="0"/>
+                <a:ea typeface="Calibri" pitchFamily="34" charset="-122"/>
+                <a:cs typeface="Calibri" pitchFamily="34" charset="-120"/>
+              </a:rPr>
+              <a:t>STARRY Fatherhood Program (Columbus Ave, Waco) — only comprehensive fatherhood program. Free. Bell/Coryell/McLennan/Williamson. Funded by TX HHSC + United Way of Waco-McLennan.</a:t>
+            </a:r>
+            <a:endParaRPr lang="en-US" sz="1600" dirty="0"/>
+          </a:p>
+          <a:p>
+            <a:pPr marL="342900" indent="-342900">
+              <a:spcAft>
+                <a:spcPts val="600"/>
+              </a:spcAft>
+              <a:buSzPct val="100000"/>
+              <a:buChar char="■"/>
+            </a:pPr>
+            <a:r>
+              <a:rPr lang="en-US" sz="1600" dirty="0">
+                <a:solidFill>
+                  <a:srgbClr val="1A1A1A"/>
+                </a:solidFill>
+                <a:latin typeface="Calibri" pitchFamily="34" charset="0"/>
+                <a:ea typeface="Calibri" pitchFamily="34" charset="-122"/>
+                <a:cs typeface="Calibri" pitchFamily="34" charset="-120"/>
+              </a:rPr>
+              <a:t>BBBS West Central Texas (BBBS Lone Star) — confirmed Black-male mentor waitlist crisis. Boys wait ~2× as long as girls.</a:t>
+            </a:r>
+            <a:endParaRPr lang="en-US" sz="1600" dirty="0"/>
+          </a:p>
+          <a:p>
+            <a:pPr marL="342900" indent="-342900">
+              <a:spcAft>
+                <a:spcPts val="600"/>
+              </a:spcAft>
+              <a:buSzPct val="100000"/>
+              <a:buChar char="■"/>
+            </a:pPr>
+            <a:r>
+              <a:rPr lang="en-US" sz="1600" dirty="0">
+                <a:solidFill>
+                  <a:srgbClr val="1A1A1A"/>
+                </a:solidFill>
+                <a:latin typeface="Calibri" pitchFamily="34" charset="0"/>
+                <a:ea typeface="Calibri" pitchFamily="34" charset="-122"/>
+                <a:cs typeface="Calibri" pitchFamily="34" charset="-120"/>
+              </a:rPr>
+              <a:t>Prosper Waco — backbone collective-impact org with a youth pillar; data-ready partner.</a:t>
+            </a:r>
+            <a:endParaRPr lang="en-US" sz="1600" dirty="0"/>
+          </a:p>
+          <a:p>
+            <a:pPr marL="342900" indent="-342900">
+              <a:spcAft>
+                <a:spcPts val="600"/>
+              </a:spcAft>
+              <a:buSzPct val="100000"/>
+              <a:buChar char="■"/>
+            </a:pPr>
+            <a:r>
+              <a:rPr lang="en-US" sz="1600" dirty="0">
+                <a:solidFill>
+                  <a:srgbClr val="1A1A1A"/>
+                </a:solidFill>
+                <a:latin typeface="Calibri" pitchFamily="34" charset="0"/>
+                <a:ea typeface="Calibri" pitchFamily="34" charset="-122"/>
+                <a:cs typeface="Calibri" pitchFamily="34" charset="-120"/>
+              </a:rPr>
+              <a:t>Communities In Schools Waco — campus-level case management, but capacity-limited on Black-male specific work.</a:t>
+            </a:r>
+            <a:endParaRPr lang="en-US" sz="1600" dirty="0"/>
+          </a:p>
+          <a:p>
+            <a:pPr marL="342900" indent="-342900">
+              <a:spcAft>
+                <a:spcPts val="600"/>
+              </a:spcAft>
+              <a:buSzPct val="100000"/>
+              <a:buChar char="■"/>
+            </a:pPr>
+            <a:r>
+              <a:rPr lang="en-US" sz="1600" dirty="0">
+                <a:solidFill>
+                  <a:srgbClr val="1A1A1A"/>
+                </a:solidFill>
+                <a:latin typeface="Calibri" pitchFamily="34" charset="0"/>
+                <a:ea typeface="Calibri" pitchFamily="34" charset="-122"/>
+                <a:cs typeface="Calibri" pitchFamily="34" charset="-120"/>
+              </a:rPr>
+              <a:t>Waco Foundation, Cooper Foundation, United Way of Waco-McLennan — local funding table.</a:t>
+            </a:r>
+            <a:endParaRPr lang="en-US" sz="1600" dirty="0"/>
+          </a:p>
+          <a:p>
+            <a:pPr marL="342900" indent="-342900">
+              <a:spcAft>
+                <a:spcPts val="600"/>
+              </a:spcAft>
+              <a:buSzPct val="100000"/>
+              <a:buChar char="■"/>
+            </a:pPr>
+            <a:r>
+              <a:rPr lang="en-US" sz="1600" dirty="0">
+                <a:solidFill>
+                  <a:srgbClr val="1A1A1A"/>
+                </a:solidFill>
+                <a:latin typeface="Calibri" pitchFamily="34" charset="0"/>
+                <a:ea typeface="Calibri" pitchFamily="34" charset="-122"/>
+                <a:cs typeface="Calibri" pitchFamily="34" charset="-120"/>
+              </a:rPr>
+              <a:t>Baylor University, McLennan Community College, TSTC — workforce / mentor pipeline if activated.</a:t>
+            </a:r>
+            <a:endParaRPr lang="en-US" sz="1600" dirty="0"/>
+          </a:p>
+          <a:p>
+            <a:pPr marL="342900" indent="-342900">
+              <a:spcAft>
+                <a:spcPts val="600"/>
+              </a:spcAft>
+              <a:buSzPct val="100000"/>
+              <a:buChar char="■"/>
+            </a:pPr>
+            <a:r>
+              <a:rPr lang="en-US" sz="1600" dirty="0">
+                <a:solidFill>
+                  <a:srgbClr val="1A1A1A"/>
+                </a:solidFill>
+                <a:latin typeface="Calibri" pitchFamily="34" charset="0"/>
+                <a:ea typeface="Calibri" pitchFamily="34" charset="-122"/>
+                <a:cs typeface="Calibri" pitchFamily="34" charset="-120"/>
+              </a:rPr>
+              <a:t>MISSING: a 100 Black Men chapter, a coordinated Black-male mentor recruitment campaign, and a real-time mentor-to-youth matching layer. That's where TCAF plugs in.</a:t>
+            </a:r>
+            <a:endParaRPr lang="en-US" sz="1600" dirty="0"/>
+          </a:p>
+        </p:txBody>
+      </p:sp>
+      <p:sp>
+        <p:nvSpPr>
+          <p:cNvPr id="6" name="Text 4"/>
+          <p:cNvSpPr/>
+          <p:nvPr/>
+        </p:nvSpPr>
+        <p:spPr>
+          <a:xfrm>
+            <a:off x="365760" y="6565392"/>
+            <a:ext cx="11457432" cy="228600"/>
+          </a:xfrm>
+          <a:prstGeom prst="rect">
+            <a:avLst/>
+          </a:prstGeom>
+          <a:noFill/>
+          <a:ln/>
+        </p:spPr>
+        <p:txBody>
+          <a:bodyPr wrap="square" rtlCol="0" anchor="ctr"/>
+          <a:lstStyle/>
+          <a:p>
+            <a:pPr indent="0" marL="0">
+              <a:buNone/>
+            </a:pPr>
+            <a:r>
+              <a:rPr lang="en-US" sz="900" dirty="0">
+                <a:solidFill>
+                  <a:srgbClr val="5A6470"/>
+                </a:solidFill>
+                <a:latin typeface="Calibri" pitchFamily="34" charset="0"/>
+                <a:ea typeface="Calibri" pitchFamily="34" charset="-122"/>
+                <a:cs typeface="Calibri" pitchFamily="34" charset="-120"/>
+              </a:rPr>
+              <a:t>TCAF · Waco · Capacity · April 17, 2026</a:t>
+            </a:r>
+            <a:endParaRPr lang="en-US" sz="900" dirty="0"/>
           </a:p>
         </p:txBody>
       </p:sp>
